--- a/deck.pptx
+++ b/deck.pptx
@@ -17,6 +17,8 @@
     <p:sldId id="265" r:id="rId17"/>
     <p:sldId id="266" r:id="rId18"/>
     <p:sldId id="267" r:id="rId19"/>
+    <p:sldId id="268" r:id="rId20"/>
+    <p:sldId id="269" r:id="rId21"/>
   </p:sldIdLst>
   <p:sldSz cx="12191695" cy="6858000" type="screen4x3"/>
   <p:notesSz cx="6858000" cy="9144000"/>
@@ -513,7 +515,7 @@
           <a:lstStyle/>
           <a:p>
             <a:r>
-              <a:t>本报告围绕搜索步长如何影响梯级水库优化结果展开。作者为方国华、郑旺、吴承君、颜敏。论文发表于水电能源科学42卷9期179—184页。</a:t>
+              <a:t>介绍文章的研究问题：日尺度和多时段下的强约束使可行解生成困难。作者为黄显峰、王宁、刘志佳、方国华、钱骏，论文发表于水利水电科技进展44卷4期51—58页。</a:t>
             </a:r>
           </a:p>
         </p:txBody>
@@ -583,7 +585,7 @@
           <a:lstStyle/>
           <a:p>
             <a:r>
-              <a:t>总出力原表数值3927.37至3939.14，原表单位与图4及目标口径不一致，故此页仅显示原文百分比。普定出力提高12.70%，总弃水流量从259.11降至248.56 m³/s。收益不是各站同步增加，构皮滩等水库略降。</a:t>
+              <a:t>表2各算法均运行20000次。改进算法偏移度0，PSO48.36、GA28.67、NSGA-II34.58。原文图4是最终解集最小偏移度随迭代的变化，不能当作可行个体比例。</a:t>
             </a:r>
           </a:p>
         </p:txBody>
@@ -653,7 +655,7 @@
           <a:lstStyle/>
           <a:p>
             <a:r>
-              <a:t>保留图5四面板与图例。原文解释普定6月末改进方案蓄至汛限水位，减少6月弃水，部分水库较高水位发挥水头效益。洪家渡与构皮滩的趋势还受汛限和末水位约束影响。</a:t>
+              <a:t>表3前三列是多次计算所得解集中各目标函数最优值的平均值，来自不同极端解，不能拼接为同一调度方案。原文没有给出这些均值的误差范围，本页不绘制误差线。</a:t>
             </a:r>
           </a:p>
         </p:txBody>
@@ -723,7 +725,147 @@
           <a:lstStyle/>
           <a:p>
             <a:r>
-              <a:t>贡献是保留正交降维并改变扰动尺度调度。原文承认工程结果稳定性较差。后续可做多随机种子、等时间预算、丰枯年份及跨流域验证，报告均值与标准差。不能把候选集最优和全局最优混同。</a:t>
+              <a:t>三行各是可行调度方案，目标间存在权衡。原文表4中最大下泄最小方案最高水位276m，高于最高水位最小方案275m，不应把各行最优值合并。</a:t>
+            </a:r>
+          </a:p>
+        </p:txBody>
+      </p:sp>
+      <p:sp>
+        <p:nvSpPr>
+          <p:cNvPr id="4" name="Slide Number Placeholder 3"/>
+          <p:cNvSpPr>
+            <a:spLocks noGrp="1"/>
+          </p:cNvSpPr>
+          <p:nvPr>
+            <p:ph type="sldNum" idx="5" sz="quarter"/>
+          </p:nvPr>
+        </p:nvSpPr>
+        <p:spPr/>
+      </p:sp>
+    </p:spTree>
+  </p:cSld>
+  <p:clrMapOvr>
+    <a:masterClrMapping/>
+  </p:clrMapOvr>
+</p:notes>
+</file>
+
+<file path=ppt/notesSlides/notesSlide13.xml><?xml version="1.0" encoding="utf-8"?>
+<p:notes xmlns:a="http://schemas.openxmlformats.org/drawingml/2006/main" xmlns:p="http://schemas.openxmlformats.org/presentationml/2006/main" xmlns:r="http://schemas.openxmlformats.org/officeDocument/2006/relationships">
+  <p:cSld>
+    <p:spTree>
+      <p:nvGrpSpPr>
+        <p:cNvPr id="1" name=""/>
+        <p:cNvGrpSpPr/>
+        <p:nvPr/>
+      </p:nvGrpSpPr>
+      <p:grpSpPr>
+        <a:xfrm>
+          <a:off x="0" y="0"/>
+          <a:ext cx="0" cy="0"/>
+          <a:chOff x="0" y="0"/>
+          <a:chExt cx="0" cy="0"/>
+        </a:xfrm>
+      </p:grpSpPr>
+      <p:sp>
+        <p:nvSpPr>
+          <p:cNvPr id="2" name="Slide Image Placeholder 1"/>
+          <p:cNvSpPr>
+            <a:spLocks noGrp="1"/>
+          </p:cNvSpPr>
+          <p:nvPr>
+            <p:ph type="sldImg" idx="2"/>
+          </p:nvPr>
+        </p:nvSpPr>
+        <p:spPr/>
+      </p:sp>
+      <p:sp>
+        <p:nvSpPr>
+          <p:cNvPr id="3" name="Notes Placeholder 2"/>
+          <p:cNvSpPr>
+            <a:spLocks noGrp="1"/>
+          </p:cNvSpPr>
+          <p:nvPr>
+            <p:ph type="body" idx="3" sz="quarter"/>
+          </p:nvPr>
+        </p:nvSpPr>
+        <p:spPr/>
+        <p:txBody>
+          <a:bodyPr/>
+          <a:lstStyle/>
+          <a:p>
+            <a:r>
+              <a:t>作者指出变异算子设置影响效率和解集质量。本文没有分别移除参考目标值、偏移加权和变异引导的消融对照，难以独立量化每部分贡献。工程验证基于单流域平水年。权重与概率分支在实现时需逐项核对。</a:t>
+            </a:r>
+          </a:p>
+        </p:txBody>
+      </p:sp>
+      <p:sp>
+        <p:nvSpPr>
+          <p:cNvPr id="4" name="Slide Number Placeholder 3"/>
+          <p:cNvSpPr>
+            <a:spLocks noGrp="1"/>
+          </p:cNvSpPr>
+          <p:nvPr>
+            <p:ph type="sldNum" idx="5" sz="quarter"/>
+          </p:nvPr>
+        </p:nvSpPr>
+        <p:spPr/>
+      </p:sp>
+    </p:spTree>
+  </p:cSld>
+  <p:clrMapOvr>
+    <a:masterClrMapping/>
+  </p:clrMapOvr>
+</p:notes>
+</file>
+
+<file path=ppt/notesSlides/notesSlide14.xml><?xml version="1.0" encoding="utf-8"?>
+<p:notes xmlns:a="http://schemas.openxmlformats.org/drawingml/2006/main" xmlns:p="http://schemas.openxmlformats.org/presentationml/2006/main" xmlns:r="http://schemas.openxmlformats.org/officeDocument/2006/relationships">
+  <p:cSld>
+    <p:spTree>
+      <p:nvGrpSpPr>
+        <p:cNvPr id="1" name=""/>
+        <p:cNvGrpSpPr/>
+        <p:nvPr/>
+      </p:nvGrpSpPr>
+      <p:grpSpPr>
+        <a:xfrm>
+          <a:off x="0" y="0"/>
+          <a:ext cx="0" cy="0"/>
+          <a:chOff x="0" y="0"/>
+          <a:chExt cx="0" cy="0"/>
+        </a:xfrm>
+      </p:grpSpPr>
+      <p:sp>
+        <p:nvSpPr>
+          <p:cNvPr id="2" name="Slide Image Placeholder 1"/>
+          <p:cNvSpPr>
+            <a:spLocks noGrp="1"/>
+          </p:cNvSpPr>
+          <p:nvPr>
+            <p:ph type="sldImg" idx="2"/>
+          </p:nvPr>
+        </p:nvSpPr>
+        <p:spPr/>
+      </p:sp>
+      <p:sp>
+        <p:nvSpPr>
+          <p:cNvPr id="3" name="Notes Placeholder 2"/>
+          <p:cNvSpPr>
+            <a:spLocks noGrp="1"/>
+          </p:cNvSpPr>
+          <p:nvPr>
+            <p:ph type="body" idx="3" sz="quarter"/>
+          </p:nvPr>
+        </p:nvSpPr>
+        <p:spPr/>
+        <p:txBody>
+          <a:bodyPr/>
+          <a:lstStyle/>
+          <a:p>
+            <a:r>
+              <a:t>报告结论：强约束跨时段耦合导致虚假目标评价，引入参考目标值、潜力目标值、偏移度与变异引导，改善算例的可行性和多目标结果。但工程算例优于基线不证明已获得真实Pareto前沿。文本、表格与流程节点为原生对象，可编辑；原文图件是图片。</a:t>
             </a:r>
           </a:p>
         </p:txBody>
@@ -793,7 +935,7 @@
           <a:lstStyle/>
           <a:p>
             <a:r>
-              <a:t>DDDP的组合数量随水库数快速增长。ODDDP通过代表性组合降低计算规模，但沿用逐渐缩小的离散增量，初期搜索偏离优良区域后，后期可能难以修正。</a:t>
+              <a:t>时段数增加意味着更多相互关联的决策变量。某时段库容改变会影响前后时段的流量边界。传统算法可能在大量不可行方案中搜索，无法依靠固定的逐点边界判断整体可行性。</a:t>
             </a:r>
           </a:p>
         </p:txBody>
@@ -863,7 +1005,7 @@
           <a:lstStyle/>
           <a:p>
             <a:r>
-              <a:t>论文以一年为调度期，目标表述为梯级总出力最大，正文也使用总发电量表述。原文量纲口径存在不一致，本报告不换算绝对发电量。约束包括水量平衡、库容或水位、出库流量、出力、发电流量、水头及上下游耦合。</a:t>
+              <a:t>注意模型有三个显式优化指标：最高水位最小、最大下泄流量最小、总发电量最大。生态需求转化为最小下泄流量约束，并非第四个独立优化目标。</a:t>
             </a:r>
           </a:p>
         </p:txBody>
@@ -933,7 +1075,7 @@
           <a:lstStyle/>
           <a:p>
             <a:r>
-              <a:t>图1为原文寻优过程示意图，不应理解为工程结果的收敛曲线。高斯变量使步长随机变化，余弦平方控制标准差，使全局与局部搜索交替进行。</a:t>
+              <a:t>图1是方法示意，不是工程实测过程。第2和第4时段违反约束，会使相邻时段产生实际不可能的巨大发电流量。若直接以目标值选优，可能鼓励种群向不可行域移动。</a:t>
             </a:r>
           </a:p>
         </p:txBody>
@@ -1003,7 +1145,7 @@
           <a:lstStyle/>
           <a:p>
             <a:r>
-              <a:t>初始水位过程可用等流量或随机方法生成。正交系数乘以高斯增量得到候选状态，动态规划寻找当前候选集中的最优路径。注意当前候选集最优不等同于连续问题全局最优。</a:t>
+              <a:t>先顺时序推算蓄水量允许范围，再从后续合理节点逆向推算，取区间中点生成参考过程线。作者明确指出该参考过程仍不一定可行，参考目标值只是更可信的近似评价。</a:t>
             </a:r>
           </a:p>
         </p:txBody>
@@ -1073,7 +1215,7 @@
           <a:lstStyle/>
           <a:p>
             <a:r>
-              <a:t>测试函数验证收敛精度，Schaffer用于100组初始解及参数敏感性实验。工程采用2018年实际入流。4座日调节水库按出入库平衡模拟，7座参与正交状态组合。</a:t>
+              <a:t>偏移值为库容偏离合理范围的绝对差与该时段库容的比值，偏移度为各时段之和。潜力目标值Pq来自罚函数评价。P由Pq与Pc加权。偏移度越大，按原文公式潜力值权重越低。权重越界截断等实现细节原文未明确说明。</a:t>
             </a:r>
           </a:p>
         </p:txBody>
@@ -1143,7 +1285,7 @@
           <a:lstStyle/>
           <a:p>
             <a:r>
-              <a:t>Schaffer最小值为0，M-IWO-ODDDP结果接近0。Shubert最优值约为−186.7309，两种改进算法均接近该值。这里只展示论文给出的结果，不能据此判断高维问题的普遍性能。</a:t>
+              <a:t>高于允许范围的点向下变异，低于允许范围的点向上变异。可行范围内的点仍可能变异，并根据相邻时段协调。操作包含概率分支，不能理解为逐点投影后全部可行。</a:t>
             </a:r>
           </a:p>
         </p:txBody>
@@ -1213,7 +1355,7 @@
           <a:lstStyle/>
           <a:p>
             <a:r>
-              <a:t>11级混联水库群包含支流和干流耦合。索风营、格里桥、思林、沙沱4座日调节水库按出入库平衡。7因素3水平正交表L18生成18种组合。初始解采用等流量法，标准差初值10、终值0.001。</a:t>
+              <a:t>用各水库各时间节点蓄水量生成种群。计算参考与潜力目标值，选择交叉后通过引导算子变异，父子代合并后按非支配序和拥挤距离筛选。循环至最大迭代次数，得到末代种群。</a:t>
             </a:r>
           </a:p>
         </p:txBody>
@@ -1283,7 +1425,7 @@
           <a:lstStyle/>
           <a:p>
             <a:r>
-              <a:t>原文图4比较不同最大迭代次数设置的最终优化结果与耗时，不是一次运行的逐轮收敛轨迹。改进算法在较小迭代预算下结果波动明显，增加预算后趋稳但仍有波动。两者同预算耗时无明显差别。</a:t>
+              <a:t>金溪9座电站，只有池潭具有不完全年调节能力，其余无调节能力。以平水年径流和365日时段建模。两组实验基线不同、预算不同，不能混用耗时。</a:t>
             </a:r>
           </a:p>
         </p:txBody>
@@ -4331,7 +4473,7 @@
               </a:defRPr>
             </a:pPr>
             <a:r>
-              <a:t>梯级水库优化调度的</a:t>
+              <a:t>基于改进 NSGA-II 算法的</a:t>
             </a:r>
           </a:p>
           <a:p>
@@ -4347,7 +4489,7 @@
               </a:defRPr>
             </a:pPr>
             <a:r>
-              <a:t>改进 ODDDP 算法研究</a:t>
+              <a:t>梯级水库多目标优化调度</a:t>
             </a:r>
           </a:p>
         </p:txBody>
@@ -4386,7 +4528,7 @@
               </a:defRPr>
             </a:pPr>
             <a:r>
-              <a:t>文献汇报 / 方国华等，2024</a:t>
+              <a:t>黄显峰等（2024） / 中文文献汇报</a:t>
             </a:r>
           </a:p>
         </p:txBody>
@@ -4438,8 +4580,8 @@
         </p:nvSpPr>
         <p:spPr>
           <a:xfrm>
-            <a:off x="685800" y="2240280"/>
-            <a:ext cx="10698480" cy="1005840"/>
+            <a:off x="731520" y="2286000"/>
+            <a:ext cx="10698480" cy="1097280"/>
           </a:xfrm>
           <a:prstGeom prst="rect">
             <a:avLst/>
@@ -4464,7 +4606,7 @@
               </a:defRPr>
             </a:pPr>
             <a:r>
-              <a:t>高斯扰动与周期性步长如何改善局部搜索</a:t>
+              <a:t>用可行性信息改善解的评价与种群进化</a:t>
             </a:r>
           </a:p>
         </p:txBody>
@@ -4477,8 +4619,8 @@
         </p:nvSpPr>
         <p:spPr>
           <a:xfrm>
-            <a:off x="685800" y="3931920"/>
-            <a:ext cx="10515600" cy="1280160"/>
+            <a:off x="731520" y="3931920"/>
+            <a:ext cx="10607040" cy="1371600"/>
           </a:xfrm>
           <a:prstGeom prst="rect">
             <a:avLst/>
@@ -4503,7 +4645,7 @@
               </a:defRPr>
             </a:pPr>
             <a:r>
-              <a:t>方国华、郑旺、吴承君、颜敏</a:t>
+              <a:t>黄显峰、王宁、刘志佳、方国华、钱骏</a:t>
             </a:r>
           </a:p>
           <a:p>
@@ -4519,7 +4661,7 @@
               </a:defRPr>
             </a:pPr>
             <a:r>
-              <a:t>《水电能源科学》2024，42(9)：179–184</a:t>
+              <a:t>《水利水电科技进展》2024，44(4)：51–58</a:t>
             </a:r>
           </a:p>
           <a:p>
@@ -4535,7 +4677,7 @@
               </a:defRPr>
             </a:pPr>
             <a:r>
-              <a:t>DOI：10.20040/j.cnki.1000-7709.2024.20240662</a:t>
+              <a:t>DOI：10.3880/j.issn.1006-7647.2024.04.008</a:t>
             </a:r>
           </a:p>
         </p:txBody>
@@ -4600,7 +4742,7 @@
               </a:defRPr>
             </a:pPr>
             <a:r>
-              <a:t>总出力提高0.30%，弃水流量减少4.07%</a:t>
+              <a:t>求可行解实验中，改进算法的偏移度降为0</a:t>
             </a:r>
           </a:p>
         </p:txBody>
@@ -4639,7 +4781,7 @@
               </a:defRPr>
             </a:pPr>
             <a:r>
-              <a:t>依据：第5.2节，原文表3；百分比沿用原文</a:t>
+              <a:t>依据：第3.2节、表2与原文图4</a:t>
             </a:r>
           </a:p>
         </p:txBody>
@@ -4683,17 +4825,41 @@
           </a:p>
         </p:txBody>
       </p:sp>
+      <p:pic>
+        <p:nvPicPr>
+          <p:cNvPr id="5" name="Picture 4" descr="fig4.png"/>
+          <p:cNvPicPr>
+            <a:picLocks noChangeAspect="1"/>
+          </p:cNvPicPr>
+          <p:nvPr/>
+        </p:nvPicPr>
+        <p:blipFill>
+          <a:blip r:embed="rId3"/>
+          <a:stretch>
+            <a:fillRect/>
+          </a:stretch>
+        </p:blipFill>
+        <p:spPr>
+          <a:xfrm>
+            <a:off x="976604" y="1417320"/>
+            <a:ext cx="6459271" cy="4023360"/>
+          </a:xfrm>
+          <a:prstGeom prst="rect">
+            <a:avLst/>
+          </a:prstGeom>
+        </p:spPr>
+      </p:pic>
       <p:graphicFrame>
         <p:nvGraphicFramePr>
-          <p:cNvPr id="5" name="Table 4"/>
+          <p:cNvPr id="6" name="Table 5"/>
           <p:cNvGraphicFramePr>
             <a:graphicFrameLocks noGrp="1"/>
           </p:cNvGraphicFramePr>
           <p:nvPr/>
         </p:nvGraphicFramePr>
         <p:xfrm>
-          <a:off x="731520" y="1554480"/>
-          <a:ext cx="10698480" cy="3108960"/>
+          <a:off x="7909560" y="1828800"/>
+          <a:ext cx="3611880" cy="2468880"/>
         </p:xfrm>
         <a:graphic>
           <a:graphicData uri="http://schemas.openxmlformats.org/drawingml/2006/table">
@@ -4702,12 +4868,11 @@
                 <a:tableStyleId>{5C22544A-7EE6-4342-B048-85BDC9FD1C3A}</a:tableStyleId>
               </a:tblPr>
               <a:tblGrid>
-                <a:gridCol w="2674620"/>
-                <a:gridCol w="2674620"/>
-                <a:gridCol w="2674620"/>
-                <a:gridCol w="2674620"/>
+                <a:gridCol w="1203960"/>
+                <a:gridCol w="1203960"/>
+                <a:gridCol w="1203960"/>
               </a:tblGrid>
-              <a:tr h="621792">
+              <a:tr h="493776">
                 <a:tc>
                   <a:txBody>
                     <a:bodyPr/>
@@ -4722,7 +4887,7 @@
                         </a:defRPr>
                       </a:pPr>
                       <a:r>
-                        <a:t>指标</a:t>
+                        <a:t>算法</a:t>
                       </a:r>
                     </a:p>
                   </a:txBody>
@@ -4746,7 +4911,7 @@
                         </a:defRPr>
                       </a:pPr>
                       <a:r>
-                        <a:t>ODDDP</a:t>
+                        <a:t>偏移度</a:t>
                       </a:r>
                     </a:p>
                   </a:txBody>
@@ -4770,31 +4935,7 @@
                         </a:defRPr>
                       </a:pPr>
                       <a:r>
-                        <a:t>M-IWO-ODDDP</a:t>
-                      </a:r>
-                    </a:p>
-                  </a:txBody>
-                  <a:tcPr>
-                    <a:solidFill>
-                      <a:srgbClr val="287D8D"/>
-                    </a:solidFill>
-                  </a:tcPr>
-                </a:tc>
-                <a:tc>
-                  <a:txBody>
-                    <a:bodyPr/>
-                    <a:lstStyle/>
-                    <a:p>
-                      <a:pPr>
-                        <a:defRPr sz="1700">
-                          <a:solidFill>
-                            <a:srgbClr val="FFFFFF"/>
-                          </a:solidFill>
-                          <a:latin typeface="Microsoft YaHei"/>
-                        </a:defRPr>
-                      </a:pPr>
-                      <a:r>
-                        <a:t>原文变化率</a:t>
+                        <a:t>耗时/s</a:t>
                       </a:r>
                     </a:p>
                   </a:txBody>
@@ -4805,7 +4946,7 @@
                   </a:tcPr>
                 </a:tc>
               </a:tr>
-              <a:tr h="621792">
+              <a:tr h="493776">
                 <a:tc>
                   <a:txBody>
                     <a:bodyPr/>
@@ -4820,7 +4961,7 @@
                         </a:defRPr>
                       </a:pPr>
                       <a:r>
-                        <a:t>总弃水流量（m³/s）</a:t>
+                        <a:t>PSO</a:t>
                       </a:r>
                     </a:p>
                   </a:txBody>
@@ -4844,7 +4985,7 @@
                         </a:defRPr>
                       </a:pPr>
                       <a:r>
-                        <a:t>259.11</a:t>
+                        <a:t>48.36</a:t>
                       </a:r>
                     </a:p>
                   </a:txBody>
@@ -4868,7 +5009,107 @@
                         </a:defRPr>
                       </a:pPr>
                       <a:r>
-                        <a:t>248.56</a:t>
+                        <a:t>1067.85</a:t>
+                      </a:r>
+                    </a:p>
+                  </a:txBody>
+                  <a:tcPr>
+                    <a:solidFill>
+                      <a:srgbClr val="F0F5F7"/>
+                    </a:solidFill>
+                  </a:tcPr>
+                </a:tc>
+              </a:tr>
+              <a:tr h="493776">
+                <a:tc>
+                  <a:txBody>
+                    <a:bodyPr/>
+                    <a:lstStyle/>
+                    <a:p>
+                      <a:pPr>
+                        <a:defRPr sz="1700">
+                          <a:solidFill>
+                            <a:srgbClr val="183343"/>
+                          </a:solidFill>
+                          <a:latin typeface="Microsoft YaHei"/>
+                        </a:defRPr>
+                      </a:pPr>
+                      <a:r>
+                        <a:t>GA</a:t>
+                      </a:r>
+                    </a:p>
+                  </a:txBody>
+                  <a:tcPr>
+                    <a:solidFill>
+                      <a:srgbClr val="FFFFFF"/>
+                    </a:solidFill>
+                  </a:tcPr>
+                </a:tc>
+                <a:tc>
+                  <a:txBody>
+                    <a:bodyPr/>
+                    <a:lstStyle/>
+                    <a:p>
+                      <a:pPr>
+                        <a:defRPr sz="1700">
+                          <a:solidFill>
+                            <a:srgbClr val="183343"/>
+                          </a:solidFill>
+                          <a:latin typeface="Microsoft YaHei"/>
+                        </a:defRPr>
+                      </a:pPr>
+                      <a:r>
+                        <a:t>28.67</a:t>
+                      </a:r>
+                    </a:p>
+                  </a:txBody>
+                  <a:tcPr>
+                    <a:solidFill>
+                      <a:srgbClr val="FFFFFF"/>
+                    </a:solidFill>
+                  </a:tcPr>
+                </a:tc>
+                <a:tc>
+                  <a:txBody>
+                    <a:bodyPr/>
+                    <a:lstStyle/>
+                    <a:p>
+                      <a:pPr>
+                        <a:defRPr sz="1700">
+                          <a:solidFill>
+                            <a:srgbClr val="183343"/>
+                          </a:solidFill>
+                          <a:latin typeface="Microsoft YaHei"/>
+                        </a:defRPr>
+                      </a:pPr>
+                      <a:r>
+                        <a:t>1862.49</a:t>
+                      </a:r>
+                    </a:p>
+                  </a:txBody>
+                  <a:tcPr>
+                    <a:solidFill>
+                      <a:srgbClr val="FFFFFF"/>
+                    </a:solidFill>
+                  </a:tcPr>
+                </a:tc>
+              </a:tr>
+              <a:tr h="493776">
+                <a:tc>
+                  <a:txBody>
+                    <a:bodyPr/>
+                    <a:lstStyle/>
+                    <a:p>
+                      <a:pPr>
+                        <a:defRPr sz="1700">
+                          <a:solidFill>
+                            <a:srgbClr val="183343"/>
+                          </a:solidFill>
+                          <a:latin typeface="Microsoft YaHei"/>
+                        </a:defRPr>
+                      </a:pPr>
+                      <a:r>
+                        <a:t>NSGA-II</a:t>
                       </a:r>
                     </a:p>
                   </a:txBody>
@@ -4892,7 +5133,7 @@
                         </a:defRPr>
                       </a:pPr>
                       <a:r>
-                        <a:t>−4.07%</a:t>
+                        <a:t>34.58</a:t>
                       </a:r>
                     </a:p>
                   </a:txBody>
@@ -4902,8 +5143,6 @@
                     </a:solidFill>
                   </a:tcPr>
                 </a:tc>
-              </a:tr>
-              <a:tr h="621792">
                 <a:tc>
                   <a:txBody>
                     <a:bodyPr/>
@@ -4918,7 +5157,33 @@
                         </a:defRPr>
                       </a:pPr>
                       <a:r>
-                        <a:t>梯级总出力</a:t>
+                        <a:t>1184.52</a:t>
+                      </a:r>
+                    </a:p>
+                  </a:txBody>
+                  <a:tcPr>
+                    <a:solidFill>
+                      <a:srgbClr val="F0F5F7"/>
+                    </a:solidFill>
+                  </a:tcPr>
+                </a:tc>
+              </a:tr>
+              <a:tr h="493776">
+                <a:tc>
+                  <a:txBody>
+                    <a:bodyPr/>
+                    <a:lstStyle/>
+                    <a:p>
+                      <a:pPr>
+                        <a:defRPr sz="1700">
+                          <a:solidFill>
+                            <a:srgbClr val="183343"/>
+                          </a:solidFill>
+                          <a:latin typeface="Microsoft YaHei"/>
+                        </a:defRPr>
+                      </a:pPr>
+                      <a:r>
+                        <a:t>改进NSGA-II</a:t>
                       </a:r>
                     </a:p>
                   </a:txBody>
@@ -4942,7 +5207,7 @@
                         </a:defRPr>
                       </a:pPr>
                       <a:r>
-                        <a:t>原表口径</a:t>
+                        <a:t>0</a:t>
                       </a:r>
                     </a:p>
                   </a:txBody>
@@ -4966,227 +5231,7 @@
                         </a:defRPr>
                       </a:pPr>
                       <a:r>
-                        <a:t>原表口径</a:t>
-                      </a:r>
-                    </a:p>
-                  </a:txBody>
-                  <a:tcPr>
-                    <a:solidFill>
-                      <a:srgbClr val="FFFFFF"/>
-                    </a:solidFill>
-                  </a:tcPr>
-                </a:tc>
-                <a:tc>
-                  <a:txBody>
-                    <a:bodyPr/>
-                    <a:lstStyle/>
-                    <a:p>
-                      <a:pPr>
-                        <a:defRPr sz="1700">
-                          <a:solidFill>
-                            <a:srgbClr val="183343"/>
-                          </a:solidFill>
-                          <a:latin typeface="Microsoft YaHei"/>
-                        </a:defRPr>
-                      </a:pPr>
-                      <a:r>
-                        <a:t>+0.30%</a:t>
-                      </a:r>
-                    </a:p>
-                  </a:txBody>
-                  <a:tcPr>
-                    <a:solidFill>
-                      <a:srgbClr val="FFFFFF"/>
-                    </a:solidFill>
-                  </a:tcPr>
-                </a:tc>
-              </a:tr>
-              <a:tr h="621792">
-                <a:tc>
-                  <a:txBody>
-                    <a:bodyPr/>
-                    <a:lstStyle/>
-                    <a:p>
-                      <a:pPr>
-                        <a:defRPr sz="1700">
-                          <a:solidFill>
-                            <a:srgbClr val="183343"/>
-                          </a:solidFill>
-                          <a:latin typeface="Microsoft YaHei"/>
-                        </a:defRPr>
-                      </a:pPr>
-                      <a:r>
-                        <a:t>普定水库出力</a:t>
-                      </a:r>
-                    </a:p>
-                  </a:txBody>
-                  <a:tcPr>
-                    <a:solidFill>
-                      <a:srgbClr val="F0F5F7"/>
-                    </a:solidFill>
-                  </a:tcPr>
-                </a:tc>
-                <a:tc>
-                  <a:txBody>
-                    <a:bodyPr/>
-                    <a:lstStyle/>
-                    <a:p>
-                      <a:pPr>
-                        <a:defRPr sz="1700">
-                          <a:solidFill>
-                            <a:srgbClr val="183343"/>
-                          </a:solidFill>
-                          <a:latin typeface="Microsoft YaHei"/>
-                        </a:defRPr>
-                      </a:pPr>
-                      <a:r>
-                        <a:t>原表口径</a:t>
-                      </a:r>
-                    </a:p>
-                  </a:txBody>
-                  <a:tcPr>
-                    <a:solidFill>
-                      <a:srgbClr val="F0F5F7"/>
-                    </a:solidFill>
-                  </a:tcPr>
-                </a:tc>
-                <a:tc>
-                  <a:txBody>
-                    <a:bodyPr/>
-                    <a:lstStyle/>
-                    <a:p>
-                      <a:pPr>
-                        <a:defRPr sz="1700">
-                          <a:solidFill>
-                            <a:srgbClr val="183343"/>
-                          </a:solidFill>
-                          <a:latin typeface="Microsoft YaHei"/>
-                        </a:defRPr>
-                      </a:pPr>
-                      <a:r>
-                        <a:t>原表口径</a:t>
-                      </a:r>
-                    </a:p>
-                  </a:txBody>
-                  <a:tcPr>
-                    <a:solidFill>
-                      <a:srgbClr val="F0F5F7"/>
-                    </a:solidFill>
-                  </a:tcPr>
-                </a:tc>
-                <a:tc>
-                  <a:txBody>
-                    <a:bodyPr/>
-                    <a:lstStyle/>
-                    <a:p>
-                      <a:pPr>
-                        <a:defRPr sz="1700">
-                          <a:solidFill>
-                            <a:srgbClr val="183343"/>
-                          </a:solidFill>
-                          <a:latin typeface="Microsoft YaHei"/>
-                        </a:defRPr>
-                      </a:pPr>
-                      <a:r>
-                        <a:t>+12.70%</a:t>
-                      </a:r>
-                    </a:p>
-                  </a:txBody>
-                  <a:tcPr>
-                    <a:solidFill>
-                      <a:srgbClr val="F0F5F7"/>
-                    </a:solidFill>
-                  </a:tcPr>
-                </a:tc>
-              </a:tr>
-              <a:tr h="621792">
-                <a:tc>
-                  <a:txBody>
-                    <a:bodyPr/>
-                    <a:lstStyle/>
-                    <a:p>
-                      <a:pPr>
-                        <a:defRPr sz="1700">
-                          <a:solidFill>
-                            <a:srgbClr val="183343"/>
-                          </a:solidFill>
-                          <a:latin typeface="Microsoft YaHei"/>
-                        </a:defRPr>
-                      </a:pPr>
-                      <a:r>
-                        <a:t>大花水水库出力</a:t>
-                      </a:r>
-                    </a:p>
-                  </a:txBody>
-                  <a:tcPr>
-                    <a:solidFill>
-                      <a:srgbClr val="FFFFFF"/>
-                    </a:solidFill>
-                  </a:tcPr>
-                </a:tc>
-                <a:tc>
-                  <a:txBody>
-                    <a:bodyPr/>
-                    <a:lstStyle/>
-                    <a:p>
-                      <a:pPr>
-                        <a:defRPr sz="1700">
-                          <a:solidFill>
-                            <a:srgbClr val="183343"/>
-                          </a:solidFill>
-                          <a:latin typeface="Microsoft YaHei"/>
-                        </a:defRPr>
-                      </a:pPr>
-                      <a:r>
-                        <a:t>原表口径</a:t>
-                      </a:r>
-                    </a:p>
-                  </a:txBody>
-                  <a:tcPr>
-                    <a:solidFill>
-                      <a:srgbClr val="FFFFFF"/>
-                    </a:solidFill>
-                  </a:tcPr>
-                </a:tc>
-                <a:tc>
-                  <a:txBody>
-                    <a:bodyPr/>
-                    <a:lstStyle/>
-                    <a:p>
-                      <a:pPr>
-                        <a:defRPr sz="1700">
-                          <a:solidFill>
-                            <a:srgbClr val="183343"/>
-                          </a:solidFill>
-                          <a:latin typeface="Microsoft YaHei"/>
-                        </a:defRPr>
-                      </a:pPr>
-                      <a:r>
-                        <a:t>原表口径</a:t>
-                      </a:r>
-                    </a:p>
-                  </a:txBody>
-                  <a:tcPr>
-                    <a:solidFill>
-                      <a:srgbClr val="FFFFFF"/>
-                    </a:solidFill>
-                  </a:tcPr>
-                </a:tc>
-                <a:tc>
-                  <a:txBody>
-                    <a:bodyPr/>
-                    <a:lstStyle/>
-                    <a:p>
-                      <a:pPr>
-                        <a:defRPr sz="1700">
-                          <a:solidFill>
-                            <a:srgbClr val="183343"/>
-                          </a:solidFill>
-                          <a:latin typeface="Microsoft YaHei"/>
-                        </a:defRPr>
-                      </a:pPr>
-                      <a:r>
-                        <a:t>+2.85%</a:t>
+                        <a:t>807.46</a:t>
                       </a:r>
                     </a:p>
                   </a:txBody>
@@ -5203,7 +5248,7 @@
       </p:graphicFrame>
       <p:sp>
         <p:nvSpPr>
-          <p:cNvPr id="6" name="TextBox 5"/>
+          <p:cNvPr id="7" name="TextBox 6"/>
           <p:cNvSpPr txBox="1"/>
           <p:nvPr/>
         </p:nvSpPr>
@@ -5235,7 +5280,7 @@
               </a:defRPr>
             </a:pPr>
             <a:r>
-              <a:t>主要收益集中于部分水库，体现整体调度的权衡。</a:t>
+              <a:t>20000次迭代预算下，改进算法在该算例中达到可行域。</a:t>
             </a:r>
           </a:p>
         </p:txBody>
@@ -5300,7 +5345,7 @@
               </a:defRPr>
             </a:pPr>
             <a:r>
-              <a:t>水位过程解释了水头收益与弃水改善</a:t>
+              <a:t>多目标优化同时改善发电与洪峰指标</a:t>
             </a:r>
           </a:p>
         </p:txBody>
@@ -5339,7 +5384,7 @@
               </a:defRPr>
             </a:pPr>
             <a:r>
-              <a:t>依据：第5.2节，原文图5</a:t>
+              <a:t>依据：表3，均为500000次迭代</a:t>
             </a:r>
           </a:p>
         </p:txBody>
@@ -5383,30 +5428,767 @@
           </a:p>
         </p:txBody>
       </p:sp>
-      <p:pic>
-        <p:nvPicPr>
-          <p:cNvPr id="5" name="Picture 4" descr="fig5.png"/>
-          <p:cNvPicPr>
-            <a:picLocks noChangeAspect="1"/>
-          </p:cNvPicPr>
+      <p:graphicFrame>
+        <p:nvGraphicFramePr>
+          <p:cNvPr id="5" name="Table 4"/>
+          <p:cNvGraphicFramePr>
+            <a:graphicFrameLocks noGrp="1"/>
+          </p:cNvGraphicFramePr>
           <p:nvPr/>
-        </p:nvPicPr>
-        <p:blipFill>
-          <a:blip r:embed="rId3"/>
-          <a:stretch>
-            <a:fillRect/>
-          </a:stretch>
-        </p:blipFill>
-        <p:spPr>
-          <a:xfrm>
-            <a:off x="1942233" y="1371600"/>
-            <a:ext cx="4436573" cy="4160520"/>
-          </a:xfrm>
-          <a:prstGeom prst="rect">
-            <a:avLst/>
-          </a:prstGeom>
-        </p:spPr>
-      </p:pic>
+        </p:nvGraphicFramePr>
+        <p:xfrm>
+          <a:off x="731520" y="1463040"/>
+          <a:ext cx="10698480" cy="3383280"/>
+        </p:xfrm>
+        <a:graphic>
+          <a:graphicData uri="http://schemas.openxmlformats.org/drawingml/2006/table">
+            <a:tbl>
+              <a:tblPr firstRow="1" bandRow="1">
+                <a:tableStyleId>{5C22544A-7EE6-4342-B048-85BDC9FD1C3A}</a:tableStyleId>
+              </a:tblPr>
+              <a:tblGrid>
+                <a:gridCol w="2139696"/>
+                <a:gridCol w="2139696"/>
+                <a:gridCol w="2139696"/>
+                <a:gridCol w="2139696"/>
+                <a:gridCol w="2139696"/>
+              </a:tblGrid>
+              <a:tr h="563880">
+                <a:tc>
+                  <a:txBody>
+                    <a:bodyPr/>
+                    <a:lstStyle/>
+                    <a:p>
+                      <a:pPr>
+                        <a:defRPr sz="1500">
+                          <a:solidFill>
+                            <a:srgbClr val="FFFFFF"/>
+                          </a:solidFill>
+                          <a:latin typeface="Microsoft YaHei"/>
+                        </a:defRPr>
+                      </a:pPr>
+                      <a:r>
+                        <a:t>算法</a:t>
+                      </a:r>
+                    </a:p>
+                  </a:txBody>
+                  <a:tcPr>
+                    <a:solidFill>
+                      <a:srgbClr val="287D8D"/>
+                    </a:solidFill>
+                  </a:tcPr>
+                </a:tc>
+                <a:tc>
+                  <a:txBody>
+                    <a:bodyPr/>
+                    <a:lstStyle/>
+                    <a:p>
+                      <a:pPr>
+                        <a:defRPr sz="1500">
+                          <a:solidFill>
+                            <a:srgbClr val="FFFFFF"/>
+                          </a:solidFill>
+                          <a:latin typeface="Microsoft YaHei"/>
+                        </a:defRPr>
+                      </a:pPr>
+                      <a:r>
+                        <a:t>发电/亿kW·h</a:t>
+                      </a:r>
+                    </a:p>
+                  </a:txBody>
+                  <a:tcPr>
+                    <a:solidFill>
+                      <a:srgbClr val="287D8D"/>
+                    </a:solidFill>
+                  </a:tcPr>
+                </a:tc>
+                <a:tc>
+                  <a:txBody>
+                    <a:bodyPr/>
+                    <a:lstStyle/>
+                    <a:p>
+                      <a:pPr>
+                        <a:defRPr sz="1500">
+                          <a:solidFill>
+                            <a:srgbClr val="FFFFFF"/>
+                          </a:solidFill>
+                          <a:latin typeface="Microsoft YaHei"/>
+                        </a:defRPr>
+                      </a:pPr>
+                      <a:r>
+                        <a:t>最高水位/m</a:t>
+                      </a:r>
+                    </a:p>
+                  </a:txBody>
+                  <a:tcPr>
+                    <a:solidFill>
+                      <a:srgbClr val="287D8D"/>
+                    </a:solidFill>
+                  </a:tcPr>
+                </a:tc>
+                <a:tc>
+                  <a:txBody>
+                    <a:bodyPr/>
+                    <a:lstStyle/>
+                    <a:p>
+                      <a:pPr>
+                        <a:defRPr sz="1500">
+                          <a:solidFill>
+                            <a:srgbClr val="FFFFFF"/>
+                          </a:solidFill>
+                          <a:latin typeface="Microsoft YaHei"/>
+                        </a:defRPr>
+                      </a:pPr>
+                      <a:r>
+                        <a:t>最大下泄/m³·s⁻¹</a:t>
+                      </a:r>
+                    </a:p>
+                  </a:txBody>
+                  <a:tcPr>
+                    <a:solidFill>
+                      <a:srgbClr val="287D8D"/>
+                    </a:solidFill>
+                  </a:tcPr>
+                </a:tc>
+                <a:tc>
+                  <a:txBody>
+                    <a:bodyPr/>
+                    <a:lstStyle/>
+                    <a:p>
+                      <a:pPr>
+                        <a:defRPr sz="1500">
+                          <a:solidFill>
+                            <a:srgbClr val="FFFFFF"/>
+                          </a:solidFill>
+                          <a:latin typeface="Microsoft YaHei"/>
+                        </a:defRPr>
+                      </a:pPr>
+                      <a:r>
+                        <a:t>耗时/s</a:t>
+                      </a:r>
+                    </a:p>
+                  </a:txBody>
+                  <a:tcPr>
+                    <a:solidFill>
+                      <a:srgbClr val="287D8D"/>
+                    </a:solidFill>
+                  </a:tcPr>
+                </a:tc>
+              </a:tr>
+              <a:tr h="563880">
+                <a:tc>
+                  <a:txBody>
+                    <a:bodyPr/>
+                    <a:lstStyle/>
+                    <a:p>
+                      <a:pPr>
+                        <a:defRPr sz="1500">
+                          <a:solidFill>
+                            <a:srgbClr val="183343"/>
+                          </a:solidFill>
+                          <a:latin typeface="Microsoft YaHei"/>
+                        </a:defRPr>
+                      </a:pPr>
+                      <a:r>
+                        <a:t>MODP</a:t>
+                      </a:r>
+                    </a:p>
+                  </a:txBody>
+                  <a:tcPr>
+                    <a:solidFill>
+                      <a:srgbClr val="F0F5F7"/>
+                    </a:solidFill>
+                  </a:tcPr>
+                </a:tc>
+                <a:tc>
+                  <a:txBody>
+                    <a:bodyPr/>
+                    <a:lstStyle/>
+                    <a:p>
+                      <a:pPr>
+                        <a:defRPr sz="1500">
+                          <a:solidFill>
+                            <a:srgbClr val="183343"/>
+                          </a:solidFill>
+                          <a:latin typeface="Microsoft YaHei"/>
+                        </a:defRPr>
+                      </a:pPr>
+                      <a:r>
+                        <a:t>19.9</a:t>
+                      </a:r>
+                    </a:p>
+                  </a:txBody>
+                  <a:tcPr>
+                    <a:solidFill>
+                      <a:srgbClr val="F0F5F7"/>
+                    </a:solidFill>
+                  </a:tcPr>
+                </a:tc>
+                <a:tc>
+                  <a:txBody>
+                    <a:bodyPr/>
+                    <a:lstStyle/>
+                    <a:p>
+                      <a:pPr>
+                        <a:defRPr sz="1500">
+                          <a:solidFill>
+                            <a:srgbClr val="183343"/>
+                          </a:solidFill>
+                          <a:latin typeface="Microsoft YaHei"/>
+                        </a:defRPr>
+                      </a:pPr>
+                      <a:r>
+                        <a:t>275.01</a:t>
+                      </a:r>
+                    </a:p>
+                  </a:txBody>
+                  <a:tcPr>
+                    <a:solidFill>
+                      <a:srgbClr val="F0F5F7"/>
+                    </a:solidFill>
+                  </a:tcPr>
+                </a:tc>
+                <a:tc>
+                  <a:txBody>
+                    <a:bodyPr/>
+                    <a:lstStyle/>
+                    <a:p>
+                      <a:pPr>
+                        <a:defRPr sz="1500">
+                          <a:solidFill>
+                            <a:srgbClr val="183343"/>
+                          </a:solidFill>
+                          <a:latin typeface="Microsoft YaHei"/>
+                        </a:defRPr>
+                      </a:pPr>
+                      <a:r>
+                        <a:t>2127.12</a:t>
+                      </a:r>
+                    </a:p>
+                  </a:txBody>
+                  <a:tcPr>
+                    <a:solidFill>
+                      <a:srgbClr val="F0F5F7"/>
+                    </a:solidFill>
+                  </a:tcPr>
+                </a:tc>
+                <a:tc>
+                  <a:txBody>
+                    <a:bodyPr/>
+                    <a:lstStyle/>
+                    <a:p>
+                      <a:pPr>
+                        <a:defRPr sz="1500">
+                          <a:solidFill>
+                            <a:srgbClr val="183343"/>
+                          </a:solidFill>
+                          <a:latin typeface="Microsoft YaHei"/>
+                        </a:defRPr>
+                      </a:pPr>
+                      <a:r>
+                        <a:t>67328.59</a:t>
+                      </a:r>
+                    </a:p>
+                  </a:txBody>
+                  <a:tcPr>
+                    <a:solidFill>
+                      <a:srgbClr val="F0F5F7"/>
+                    </a:solidFill>
+                  </a:tcPr>
+                </a:tc>
+              </a:tr>
+              <a:tr h="563880">
+                <a:tc>
+                  <a:txBody>
+                    <a:bodyPr/>
+                    <a:lstStyle/>
+                    <a:p>
+                      <a:pPr>
+                        <a:defRPr sz="1500">
+                          <a:solidFill>
+                            <a:srgbClr val="183343"/>
+                          </a:solidFill>
+                          <a:latin typeface="Microsoft YaHei"/>
+                        </a:defRPr>
+                      </a:pPr>
+                      <a:r>
+                        <a:t>MOPSO</a:t>
+                      </a:r>
+                    </a:p>
+                  </a:txBody>
+                  <a:tcPr>
+                    <a:solidFill>
+                      <a:srgbClr val="FFFFFF"/>
+                    </a:solidFill>
+                  </a:tcPr>
+                </a:tc>
+                <a:tc>
+                  <a:txBody>
+                    <a:bodyPr/>
+                    <a:lstStyle/>
+                    <a:p>
+                      <a:pPr>
+                        <a:defRPr sz="1500">
+                          <a:solidFill>
+                            <a:srgbClr val="183343"/>
+                          </a:solidFill>
+                          <a:latin typeface="Microsoft YaHei"/>
+                        </a:defRPr>
+                      </a:pPr>
+                      <a:r>
+                        <a:t>20.4</a:t>
+                      </a:r>
+                    </a:p>
+                  </a:txBody>
+                  <a:tcPr>
+                    <a:solidFill>
+                      <a:srgbClr val="FFFFFF"/>
+                    </a:solidFill>
+                  </a:tcPr>
+                </a:tc>
+                <a:tc>
+                  <a:txBody>
+                    <a:bodyPr/>
+                    <a:lstStyle/>
+                    <a:p>
+                      <a:pPr>
+                        <a:defRPr sz="1500">
+                          <a:solidFill>
+                            <a:srgbClr val="183343"/>
+                          </a:solidFill>
+                          <a:latin typeface="Microsoft YaHei"/>
+                        </a:defRPr>
+                      </a:pPr>
+                      <a:r>
+                        <a:t>275.13</a:t>
+                      </a:r>
+                    </a:p>
+                  </a:txBody>
+                  <a:tcPr>
+                    <a:solidFill>
+                      <a:srgbClr val="FFFFFF"/>
+                    </a:solidFill>
+                  </a:tcPr>
+                </a:tc>
+                <a:tc>
+                  <a:txBody>
+                    <a:bodyPr/>
+                    <a:lstStyle/>
+                    <a:p>
+                      <a:pPr>
+                        <a:defRPr sz="1500">
+                          <a:solidFill>
+                            <a:srgbClr val="183343"/>
+                          </a:solidFill>
+                          <a:latin typeface="Microsoft YaHei"/>
+                        </a:defRPr>
+                      </a:pPr>
+                      <a:r>
+                        <a:t>2980.66</a:t>
+                      </a:r>
+                    </a:p>
+                  </a:txBody>
+                  <a:tcPr>
+                    <a:solidFill>
+                      <a:srgbClr val="FFFFFF"/>
+                    </a:solidFill>
+                  </a:tcPr>
+                </a:tc>
+                <a:tc>
+                  <a:txBody>
+                    <a:bodyPr/>
+                    <a:lstStyle/>
+                    <a:p>
+                      <a:pPr>
+                        <a:defRPr sz="1500">
+                          <a:solidFill>
+                            <a:srgbClr val="183343"/>
+                          </a:solidFill>
+                          <a:latin typeface="Microsoft YaHei"/>
+                        </a:defRPr>
+                      </a:pPr>
+                      <a:r>
+                        <a:t>26697.95</a:t>
+                      </a:r>
+                    </a:p>
+                  </a:txBody>
+                  <a:tcPr>
+                    <a:solidFill>
+                      <a:srgbClr val="FFFFFF"/>
+                    </a:solidFill>
+                  </a:tcPr>
+                </a:tc>
+              </a:tr>
+              <a:tr h="563880">
+                <a:tc>
+                  <a:txBody>
+                    <a:bodyPr/>
+                    <a:lstStyle/>
+                    <a:p>
+                      <a:pPr>
+                        <a:defRPr sz="1500">
+                          <a:solidFill>
+                            <a:srgbClr val="183343"/>
+                          </a:solidFill>
+                          <a:latin typeface="Microsoft YaHei"/>
+                        </a:defRPr>
+                      </a:pPr>
+                      <a:r>
+                        <a:t>MOGA</a:t>
+                      </a:r>
+                    </a:p>
+                  </a:txBody>
+                  <a:tcPr>
+                    <a:solidFill>
+                      <a:srgbClr val="F0F5F7"/>
+                    </a:solidFill>
+                  </a:tcPr>
+                </a:tc>
+                <a:tc>
+                  <a:txBody>
+                    <a:bodyPr/>
+                    <a:lstStyle/>
+                    <a:p>
+                      <a:pPr>
+                        <a:defRPr sz="1500">
+                          <a:solidFill>
+                            <a:srgbClr val="183343"/>
+                          </a:solidFill>
+                          <a:latin typeface="Microsoft YaHei"/>
+                        </a:defRPr>
+                      </a:pPr>
+                      <a:r>
+                        <a:t>20.9</a:t>
+                      </a:r>
+                    </a:p>
+                  </a:txBody>
+                  <a:tcPr>
+                    <a:solidFill>
+                      <a:srgbClr val="F0F5F7"/>
+                    </a:solidFill>
+                  </a:tcPr>
+                </a:tc>
+                <a:tc>
+                  <a:txBody>
+                    <a:bodyPr/>
+                    <a:lstStyle/>
+                    <a:p>
+                      <a:pPr>
+                        <a:defRPr sz="1500">
+                          <a:solidFill>
+                            <a:srgbClr val="183343"/>
+                          </a:solidFill>
+                          <a:latin typeface="Microsoft YaHei"/>
+                        </a:defRPr>
+                      </a:pPr>
+                      <a:r>
+                        <a:t>275.00</a:t>
+                      </a:r>
+                    </a:p>
+                  </a:txBody>
+                  <a:tcPr>
+                    <a:solidFill>
+                      <a:srgbClr val="F0F5F7"/>
+                    </a:solidFill>
+                  </a:tcPr>
+                </a:tc>
+                <a:tc>
+                  <a:txBody>
+                    <a:bodyPr/>
+                    <a:lstStyle/>
+                    <a:p>
+                      <a:pPr>
+                        <a:defRPr sz="1500">
+                          <a:solidFill>
+                            <a:srgbClr val="183343"/>
+                          </a:solidFill>
+                          <a:latin typeface="Microsoft YaHei"/>
+                        </a:defRPr>
+                      </a:pPr>
+                      <a:r>
+                        <a:t>2408.43</a:t>
+                      </a:r>
+                    </a:p>
+                  </a:txBody>
+                  <a:tcPr>
+                    <a:solidFill>
+                      <a:srgbClr val="F0F5F7"/>
+                    </a:solidFill>
+                  </a:tcPr>
+                </a:tc>
+                <a:tc>
+                  <a:txBody>
+                    <a:bodyPr/>
+                    <a:lstStyle/>
+                    <a:p>
+                      <a:pPr>
+                        <a:defRPr sz="1500">
+                          <a:solidFill>
+                            <a:srgbClr val="183343"/>
+                          </a:solidFill>
+                          <a:latin typeface="Microsoft YaHei"/>
+                        </a:defRPr>
+                      </a:pPr>
+                      <a:r>
+                        <a:t>46549.36</a:t>
+                      </a:r>
+                    </a:p>
+                  </a:txBody>
+                  <a:tcPr>
+                    <a:solidFill>
+                      <a:srgbClr val="F0F5F7"/>
+                    </a:solidFill>
+                  </a:tcPr>
+                </a:tc>
+              </a:tr>
+              <a:tr h="563880">
+                <a:tc>
+                  <a:txBody>
+                    <a:bodyPr/>
+                    <a:lstStyle/>
+                    <a:p>
+                      <a:pPr>
+                        <a:defRPr sz="1500">
+                          <a:solidFill>
+                            <a:srgbClr val="183343"/>
+                          </a:solidFill>
+                          <a:latin typeface="Microsoft YaHei"/>
+                        </a:defRPr>
+                      </a:pPr>
+                      <a:r>
+                        <a:t>NSGA-II</a:t>
+                      </a:r>
+                    </a:p>
+                  </a:txBody>
+                  <a:tcPr>
+                    <a:solidFill>
+                      <a:srgbClr val="FFFFFF"/>
+                    </a:solidFill>
+                  </a:tcPr>
+                </a:tc>
+                <a:tc>
+                  <a:txBody>
+                    <a:bodyPr/>
+                    <a:lstStyle/>
+                    <a:p>
+                      <a:pPr>
+                        <a:defRPr sz="1500">
+                          <a:solidFill>
+                            <a:srgbClr val="183343"/>
+                          </a:solidFill>
+                          <a:latin typeface="Microsoft YaHei"/>
+                        </a:defRPr>
+                      </a:pPr>
+                      <a:r>
+                        <a:t>21.3</a:t>
+                      </a:r>
+                    </a:p>
+                  </a:txBody>
+                  <a:tcPr>
+                    <a:solidFill>
+                      <a:srgbClr val="FFFFFF"/>
+                    </a:solidFill>
+                  </a:tcPr>
+                </a:tc>
+                <a:tc>
+                  <a:txBody>
+                    <a:bodyPr/>
+                    <a:lstStyle/>
+                    <a:p>
+                      <a:pPr>
+                        <a:defRPr sz="1500">
+                          <a:solidFill>
+                            <a:srgbClr val="183343"/>
+                          </a:solidFill>
+                          <a:latin typeface="Microsoft YaHei"/>
+                        </a:defRPr>
+                      </a:pPr>
+                      <a:r>
+                        <a:t>275.04</a:t>
+                      </a:r>
+                    </a:p>
+                  </a:txBody>
+                  <a:tcPr>
+                    <a:solidFill>
+                      <a:srgbClr val="FFFFFF"/>
+                    </a:solidFill>
+                  </a:tcPr>
+                </a:tc>
+                <a:tc>
+                  <a:txBody>
+                    <a:bodyPr/>
+                    <a:lstStyle/>
+                    <a:p>
+                      <a:pPr>
+                        <a:defRPr sz="1500">
+                          <a:solidFill>
+                            <a:srgbClr val="183343"/>
+                          </a:solidFill>
+                          <a:latin typeface="Microsoft YaHei"/>
+                        </a:defRPr>
+                      </a:pPr>
+                      <a:r>
+                        <a:t>2644.57</a:t>
+                      </a:r>
+                    </a:p>
+                  </a:txBody>
+                  <a:tcPr>
+                    <a:solidFill>
+                      <a:srgbClr val="FFFFFF"/>
+                    </a:solidFill>
+                  </a:tcPr>
+                </a:tc>
+                <a:tc>
+                  <a:txBody>
+                    <a:bodyPr/>
+                    <a:lstStyle/>
+                    <a:p>
+                      <a:pPr>
+                        <a:defRPr sz="1500">
+                          <a:solidFill>
+                            <a:srgbClr val="183343"/>
+                          </a:solidFill>
+                          <a:latin typeface="Microsoft YaHei"/>
+                        </a:defRPr>
+                      </a:pPr>
+                      <a:r>
+                        <a:t>29703.58</a:t>
+                      </a:r>
+                    </a:p>
+                  </a:txBody>
+                  <a:tcPr>
+                    <a:solidFill>
+                      <a:srgbClr val="FFFFFF"/>
+                    </a:solidFill>
+                  </a:tcPr>
+                </a:tc>
+              </a:tr>
+              <a:tr h="563880">
+                <a:tc>
+                  <a:txBody>
+                    <a:bodyPr/>
+                    <a:lstStyle/>
+                    <a:p>
+                      <a:pPr>
+                        <a:defRPr sz="1500">
+                          <a:solidFill>
+                            <a:srgbClr val="183343"/>
+                          </a:solidFill>
+                          <a:latin typeface="Microsoft YaHei"/>
+                        </a:defRPr>
+                      </a:pPr>
+                      <a:r>
+                        <a:t>改进NSGA-II</a:t>
+                      </a:r>
+                    </a:p>
+                  </a:txBody>
+                  <a:tcPr>
+                    <a:solidFill>
+                      <a:srgbClr val="F0F5F7"/>
+                    </a:solidFill>
+                  </a:tcPr>
+                </a:tc>
+                <a:tc>
+                  <a:txBody>
+                    <a:bodyPr/>
+                    <a:lstStyle/>
+                    <a:p>
+                      <a:pPr>
+                        <a:defRPr sz="1500">
+                          <a:solidFill>
+                            <a:srgbClr val="183343"/>
+                          </a:solidFill>
+                          <a:latin typeface="Microsoft YaHei"/>
+                        </a:defRPr>
+                      </a:pPr>
+                      <a:r>
+                        <a:t>25.6</a:t>
+                      </a:r>
+                    </a:p>
+                  </a:txBody>
+                  <a:tcPr>
+                    <a:solidFill>
+                      <a:srgbClr val="F0F5F7"/>
+                    </a:solidFill>
+                  </a:tcPr>
+                </a:tc>
+                <a:tc>
+                  <a:txBody>
+                    <a:bodyPr/>
+                    <a:lstStyle/>
+                    <a:p>
+                      <a:pPr>
+                        <a:defRPr sz="1500">
+                          <a:solidFill>
+                            <a:srgbClr val="183343"/>
+                          </a:solidFill>
+                          <a:latin typeface="Microsoft YaHei"/>
+                        </a:defRPr>
+                      </a:pPr>
+                      <a:r>
+                        <a:t>275.00</a:t>
+                      </a:r>
+                    </a:p>
+                  </a:txBody>
+                  <a:tcPr>
+                    <a:solidFill>
+                      <a:srgbClr val="F0F5F7"/>
+                    </a:solidFill>
+                  </a:tcPr>
+                </a:tc>
+                <a:tc>
+                  <a:txBody>
+                    <a:bodyPr/>
+                    <a:lstStyle/>
+                    <a:p>
+                      <a:pPr>
+                        <a:defRPr sz="1500">
+                          <a:solidFill>
+                            <a:srgbClr val="183343"/>
+                          </a:solidFill>
+                          <a:latin typeface="Microsoft YaHei"/>
+                        </a:defRPr>
+                      </a:pPr>
+                      <a:r>
+                        <a:t>1326.49</a:t>
+                      </a:r>
+                    </a:p>
+                  </a:txBody>
+                  <a:tcPr>
+                    <a:solidFill>
+                      <a:srgbClr val="F0F5F7"/>
+                    </a:solidFill>
+                  </a:tcPr>
+                </a:tc>
+                <a:tc>
+                  <a:txBody>
+                    <a:bodyPr/>
+                    <a:lstStyle/>
+                    <a:p>
+                      <a:pPr>
+                        <a:defRPr sz="1500">
+                          <a:solidFill>
+                            <a:srgbClr val="183343"/>
+                          </a:solidFill>
+                          <a:latin typeface="Microsoft YaHei"/>
+                        </a:defRPr>
+                      </a:pPr>
+                      <a:r>
+                        <a:t>20196.47</a:t>
+                      </a:r>
+                    </a:p>
+                  </a:txBody>
+                  <a:tcPr>
+                    <a:solidFill>
+                      <a:srgbClr val="F0F5F7"/>
+                    </a:solidFill>
+                  </a:tcPr>
+                </a:tc>
+              </a:tr>
+            </a:tbl>
+          </a:graphicData>
+        </a:graphic>
+      </p:graphicFrame>
       <p:sp>
         <p:nvSpPr>
           <p:cNvPr id="6" name="TextBox 5"/>
@@ -5415,8 +6197,8 @@
         </p:nvSpPr>
         <p:spPr>
           <a:xfrm>
-            <a:off x="8046720" y="1828800"/>
-            <a:ext cx="3383280" cy="3200400"/>
+            <a:off x="777240" y="5074920"/>
+            <a:ext cx="10515600" cy="411480"/>
           </a:xfrm>
           <a:prstGeom prst="rect">
             <a:avLst/>
@@ -5433,121 +6215,15 @@
               <a:spcAft>
                 <a:spcPts val="1200"/>
               </a:spcAft>
-              <a:defRPr sz="1800" b="0">
-                <a:solidFill>
-                  <a:srgbClr val="183343"/>
+              <a:defRPr sz="1700" b="0">
+                <a:solidFill>
+                  <a:srgbClr val="576774"/>
                 </a:solidFill>
                 <a:latin typeface="Microsoft YaHei"/>
               </a:defRPr>
             </a:pPr>
             <a:r>
-              <a:t>水头效益</a:t>
-            </a:r>
-          </a:p>
-          <a:p>
-            <a:pPr>
-              <a:spcAft>
-                <a:spcPts val="1200"/>
-              </a:spcAft>
-              <a:defRPr sz="1800" b="0">
-                <a:solidFill>
-                  <a:srgbClr val="183343"/>
-                </a:solidFill>
-                <a:latin typeface="Microsoft YaHei"/>
-              </a:defRPr>
-            </a:pPr>
-            <a:r>
-              <a:t>部分水库维持较高水位</a:t>
-            </a:r>
-          </a:p>
-          <a:p>
-            <a:pPr>
-              <a:spcAft>
-                <a:spcPts val="1200"/>
-              </a:spcAft>
-              <a:defRPr sz="1800" b="0">
-                <a:solidFill>
-                  <a:srgbClr val="183343"/>
-                </a:solidFill>
-                <a:latin typeface="Microsoft YaHei"/>
-              </a:defRPr>
-            </a:pPr>
-          </a:p>
-          <a:p>
-            <a:pPr>
-              <a:spcAft>
-                <a:spcPts val="1200"/>
-              </a:spcAft>
-              <a:defRPr sz="1800" b="0">
-                <a:solidFill>
-                  <a:srgbClr val="183343"/>
-                </a:solidFill>
-                <a:latin typeface="Microsoft YaHei"/>
-              </a:defRPr>
-            </a:pPr>
-            <a:r>
-              <a:t>蓄泄安排</a:t>
-            </a:r>
-          </a:p>
-          <a:p>
-            <a:pPr>
-              <a:spcAft>
-                <a:spcPts val="1200"/>
-              </a:spcAft>
-              <a:defRPr sz="1800" b="0">
-                <a:solidFill>
-                  <a:srgbClr val="183343"/>
-                </a:solidFill>
-                <a:latin typeface="Microsoft YaHei"/>
-              </a:defRPr>
-            </a:pPr>
-            <a:r>
-              <a:t>普定6月末更充分蓄水</a:t>
-            </a:r>
-          </a:p>
-          <a:p>
-            <a:pPr>
-              <a:spcAft>
-                <a:spcPts val="1200"/>
-              </a:spcAft>
-              <a:defRPr sz="1800" b="0">
-                <a:solidFill>
-                  <a:srgbClr val="183343"/>
-                </a:solidFill>
-                <a:latin typeface="Microsoft YaHei"/>
-              </a:defRPr>
-            </a:pPr>
-          </a:p>
-          <a:p>
-            <a:pPr>
-              <a:spcAft>
-                <a:spcPts val="1200"/>
-              </a:spcAft>
-              <a:defRPr sz="1800" b="0">
-                <a:solidFill>
-                  <a:srgbClr val="183343"/>
-                </a:solidFill>
-                <a:latin typeface="Microsoft YaHei"/>
-              </a:defRPr>
-            </a:pPr>
-            <a:r>
-              <a:t>边界约束</a:t>
-            </a:r>
-          </a:p>
-          <a:p>
-            <a:pPr>
-              <a:spcAft>
-                <a:spcPts val="1200"/>
-              </a:spcAft>
-              <a:defRPr sz="1800" b="0">
-                <a:solidFill>
-                  <a:srgbClr val="183343"/>
-                </a:solidFill>
-                <a:latin typeface="Microsoft YaHei"/>
-              </a:defRPr>
-            </a:pPr>
-            <a:r>
-              <a:t>汛限与末水位约束影响过程</a:t>
+              <a:t>前三项为各目标最优值的均值，不对应同一个调度方案。</a:t>
             </a:r>
           </a:p>
         </p:txBody>
@@ -5586,7 +6262,7 @@
               </a:defRPr>
             </a:pPr>
             <a:r>
-              <a:t>算法性能差异最终表现为可解释的蓄泄方案差异。</a:t>
+              <a:t>相对NSGA-II：发电 +20.19%，最大下泄 −49.84%，耗时 −32.01%。</a:t>
             </a:r>
           </a:p>
         </p:txBody>
@@ -5651,7 +6327,7 @@
               </a:defRPr>
             </a:pPr>
             <a:r>
-              <a:t>证据支持工程改进，也限定了结论范围</a:t>
+              <a:t>不同偏好的典型方案体现发电与防洪权衡</a:t>
             </a:r>
           </a:p>
         </p:txBody>
@@ -5690,7 +6366,7 @@
               </a:defRPr>
             </a:pPr>
             <a:r>
-              <a:t>依据：第6节；下列验证建议为汇报者评议</a:t>
+              <a:t>依据：表4，仅列改进NSGA-II方案</a:t>
             </a:r>
           </a:p>
         </p:txBody>
@@ -5734,6 +6410,608 @@
           </a:p>
         </p:txBody>
       </p:sp>
+      <p:graphicFrame>
+        <p:nvGraphicFramePr>
+          <p:cNvPr id="5" name="Table 4"/>
+          <p:cNvGraphicFramePr>
+            <a:graphicFrameLocks noGrp="1"/>
+          </p:cNvGraphicFramePr>
+          <p:nvPr/>
+        </p:nvGraphicFramePr>
+        <p:xfrm>
+          <a:off x="731520" y="1828800"/>
+          <a:ext cx="10698480" cy="2560320"/>
+        </p:xfrm>
+        <a:graphic>
+          <a:graphicData uri="http://schemas.openxmlformats.org/drawingml/2006/table">
+            <a:tbl>
+              <a:tblPr firstRow="1" bandRow="1">
+                <a:tableStyleId>{5C22544A-7EE6-4342-B048-85BDC9FD1C3A}</a:tableStyleId>
+              </a:tblPr>
+              <a:tblGrid>
+                <a:gridCol w="2674620"/>
+                <a:gridCol w="2674620"/>
+                <a:gridCol w="2674620"/>
+                <a:gridCol w="2674620"/>
+              </a:tblGrid>
+              <a:tr h="640080">
+                <a:tc>
+                  <a:txBody>
+                    <a:bodyPr/>
+                    <a:lstStyle/>
+                    <a:p>
+                      <a:pPr>
+                        <a:defRPr sz="1700">
+                          <a:solidFill>
+                            <a:srgbClr val="FFFFFF"/>
+                          </a:solidFill>
+                          <a:latin typeface="Microsoft YaHei"/>
+                        </a:defRPr>
+                      </a:pPr>
+                      <a:r>
+                        <a:t>方案偏好</a:t>
+                      </a:r>
+                    </a:p>
+                  </a:txBody>
+                  <a:tcPr>
+                    <a:solidFill>
+                      <a:srgbClr val="287D8D"/>
+                    </a:solidFill>
+                  </a:tcPr>
+                </a:tc>
+                <a:tc>
+                  <a:txBody>
+                    <a:bodyPr/>
+                    <a:lstStyle/>
+                    <a:p>
+                      <a:pPr>
+                        <a:defRPr sz="1700">
+                          <a:solidFill>
+                            <a:srgbClr val="FFFFFF"/>
+                          </a:solidFill>
+                          <a:latin typeface="Microsoft YaHei"/>
+                        </a:defRPr>
+                      </a:pPr>
+                      <a:r>
+                        <a:t>发电/亿kW·h</a:t>
+                      </a:r>
+                    </a:p>
+                  </a:txBody>
+                  <a:tcPr>
+                    <a:solidFill>
+                      <a:srgbClr val="287D8D"/>
+                    </a:solidFill>
+                  </a:tcPr>
+                </a:tc>
+                <a:tc>
+                  <a:txBody>
+                    <a:bodyPr/>
+                    <a:lstStyle/>
+                    <a:p>
+                      <a:pPr>
+                        <a:defRPr sz="1700">
+                          <a:solidFill>
+                            <a:srgbClr val="FFFFFF"/>
+                          </a:solidFill>
+                          <a:latin typeface="Microsoft YaHei"/>
+                        </a:defRPr>
+                      </a:pPr>
+                      <a:r>
+                        <a:t>最高水位/m</a:t>
+                      </a:r>
+                    </a:p>
+                  </a:txBody>
+                  <a:tcPr>
+                    <a:solidFill>
+                      <a:srgbClr val="287D8D"/>
+                    </a:solidFill>
+                  </a:tcPr>
+                </a:tc>
+                <a:tc>
+                  <a:txBody>
+                    <a:bodyPr/>
+                    <a:lstStyle/>
+                    <a:p>
+                      <a:pPr>
+                        <a:defRPr sz="1700">
+                          <a:solidFill>
+                            <a:srgbClr val="FFFFFF"/>
+                          </a:solidFill>
+                          <a:latin typeface="Microsoft YaHei"/>
+                        </a:defRPr>
+                      </a:pPr>
+                      <a:r>
+                        <a:t>最大下泄/m³·s⁻¹</a:t>
+                      </a:r>
+                    </a:p>
+                  </a:txBody>
+                  <a:tcPr>
+                    <a:solidFill>
+                      <a:srgbClr val="287D8D"/>
+                    </a:solidFill>
+                  </a:tcPr>
+                </a:tc>
+              </a:tr>
+              <a:tr h="640080">
+                <a:tc>
+                  <a:txBody>
+                    <a:bodyPr/>
+                    <a:lstStyle/>
+                    <a:p>
+                      <a:pPr>
+                        <a:defRPr sz="1700">
+                          <a:solidFill>
+                            <a:srgbClr val="183343"/>
+                          </a:solidFill>
+                          <a:latin typeface="Microsoft YaHei"/>
+                        </a:defRPr>
+                      </a:pPr>
+                      <a:r>
+                        <a:t>发电量最大</a:t>
+                      </a:r>
+                    </a:p>
+                  </a:txBody>
+                  <a:tcPr>
+                    <a:solidFill>
+                      <a:srgbClr val="F0F5F7"/>
+                    </a:solidFill>
+                  </a:tcPr>
+                </a:tc>
+                <a:tc>
+                  <a:txBody>
+                    <a:bodyPr/>
+                    <a:lstStyle/>
+                    <a:p>
+                      <a:pPr>
+                        <a:defRPr sz="1700">
+                          <a:solidFill>
+                            <a:srgbClr val="183343"/>
+                          </a:solidFill>
+                          <a:latin typeface="Microsoft YaHei"/>
+                        </a:defRPr>
+                      </a:pPr>
+                      <a:r>
+                        <a:t>25.8</a:t>
+                      </a:r>
+                    </a:p>
+                  </a:txBody>
+                  <a:tcPr>
+                    <a:solidFill>
+                      <a:srgbClr val="F0F5F7"/>
+                    </a:solidFill>
+                  </a:tcPr>
+                </a:tc>
+                <a:tc>
+                  <a:txBody>
+                    <a:bodyPr/>
+                    <a:lstStyle/>
+                    <a:p>
+                      <a:pPr>
+                        <a:defRPr sz="1700">
+                          <a:solidFill>
+                            <a:srgbClr val="183343"/>
+                          </a:solidFill>
+                          <a:latin typeface="Microsoft YaHei"/>
+                        </a:defRPr>
+                      </a:pPr>
+                      <a:r>
+                        <a:t>276.00</a:t>
+                      </a:r>
+                    </a:p>
+                  </a:txBody>
+                  <a:tcPr>
+                    <a:solidFill>
+                      <a:srgbClr val="F0F5F7"/>
+                    </a:solidFill>
+                  </a:tcPr>
+                </a:tc>
+                <a:tc>
+                  <a:txBody>
+                    <a:bodyPr/>
+                    <a:lstStyle/>
+                    <a:p>
+                      <a:pPr>
+                        <a:defRPr sz="1700">
+                          <a:solidFill>
+                            <a:srgbClr val="183343"/>
+                          </a:solidFill>
+                          <a:latin typeface="Microsoft YaHei"/>
+                        </a:defRPr>
+                      </a:pPr>
+                      <a:r>
+                        <a:t>2969.14</a:t>
+                      </a:r>
+                    </a:p>
+                  </a:txBody>
+                  <a:tcPr>
+                    <a:solidFill>
+                      <a:srgbClr val="F0F5F7"/>
+                    </a:solidFill>
+                  </a:tcPr>
+                </a:tc>
+              </a:tr>
+              <a:tr h="640080">
+                <a:tc>
+                  <a:txBody>
+                    <a:bodyPr/>
+                    <a:lstStyle/>
+                    <a:p>
+                      <a:pPr>
+                        <a:defRPr sz="1700">
+                          <a:solidFill>
+                            <a:srgbClr val="183343"/>
+                          </a:solidFill>
+                          <a:latin typeface="Microsoft YaHei"/>
+                        </a:defRPr>
+                      </a:pPr>
+                      <a:r>
+                        <a:t>最高水位最小</a:t>
+                      </a:r>
+                    </a:p>
+                  </a:txBody>
+                  <a:tcPr>
+                    <a:solidFill>
+                      <a:srgbClr val="FFFFFF"/>
+                    </a:solidFill>
+                  </a:tcPr>
+                </a:tc>
+                <a:tc>
+                  <a:txBody>
+                    <a:bodyPr/>
+                    <a:lstStyle/>
+                    <a:p>
+                      <a:pPr>
+                        <a:defRPr sz="1700">
+                          <a:solidFill>
+                            <a:srgbClr val="183343"/>
+                          </a:solidFill>
+                          <a:latin typeface="Microsoft YaHei"/>
+                        </a:defRPr>
+                      </a:pPr>
+                      <a:r>
+                        <a:t>24.9</a:t>
+                      </a:r>
+                    </a:p>
+                  </a:txBody>
+                  <a:tcPr>
+                    <a:solidFill>
+                      <a:srgbClr val="FFFFFF"/>
+                    </a:solidFill>
+                  </a:tcPr>
+                </a:tc>
+                <a:tc>
+                  <a:txBody>
+                    <a:bodyPr/>
+                    <a:lstStyle/>
+                    <a:p>
+                      <a:pPr>
+                        <a:defRPr sz="1700">
+                          <a:solidFill>
+                            <a:srgbClr val="183343"/>
+                          </a:solidFill>
+                          <a:latin typeface="Microsoft YaHei"/>
+                        </a:defRPr>
+                      </a:pPr>
+                      <a:r>
+                        <a:t>275.00</a:t>
+                      </a:r>
+                    </a:p>
+                  </a:txBody>
+                  <a:tcPr>
+                    <a:solidFill>
+                      <a:srgbClr val="FFFFFF"/>
+                    </a:solidFill>
+                  </a:tcPr>
+                </a:tc>
+                <a:tc>
+                  <a:txBody>
+                    <a:bodyPr/>
+                    <a:lstStyle/>
+                    <a:p>
+                      <a:pPr>
+                        <a:defRPr sz="1700">
+                          <a:solidFill>
+                            <a:srgbClr val="183343"/>
+                          </a:solidFill>
+                          <a:latin typeface="Microsoft YaHei"/>
+                        </a:defRPr>
+                      </a:pPr>
+                      <a:r>
+                        <a:t>2677.98</a:t>
+                      </a:r>
+                    </a:p>
+                  </a:txBody>
+                  <a:tcPr>
+                    <a:solidFill>
+                      <a:srgbClr val="FFFFFF"/>
+                    </a:solidFill>
+                  </a:tcPr>
+                </a:tc>
+              </a:tr>
+              <a:tr h="640080">
+                <a:tc>
+                  <a:txBody>
+                    <a:bodyPr/>
+                    <a:lstStyle/>
+                    <a:p>
+                      <a:pPr>
+                        <a:defRPr sz="1700">
+                          <a:solidFill>
+                            <a:srgbClr val="183343"/>
+                          </a:solidFill>
+                          <a:latin typeface="Microsoft YaHei"/>
+                        </a:defRPr>
+                      </a:pPr>
+                      <a:r>
+                        <a:t>最大下泄最小</a:t>
+                      </a:r>
+                    </a:p>
+                  </a:txBody>
+                  <a:tcPr>
+                    <a:solidFill>
+                      <a:srgbClr val="F0F5F7"/>
+                    </a:solidFill>
+                  </a:tcPr>
+                </a:tc>
+                <a:tc>
+                  <a:txBody>
+                    <a:bodyPr/>
+                    <a:lstStyle/>
+                    <a:p>
+                      <a:pPr>
+                        <a:defRPr sz="1700">
+                          <a:solidFill>
+                            <a:srgbClr val="183343"/>
+                          </a:solidFill>
+                          <a:latin typeface="Microsoft YaHei"/>
+                        </a:defRPr>
+                      </a:pPr>
+                      <a:r>
+                        <a:t>22.3</a:t>
+                      </a:r>
+                    </a:p>
+                  </a:txBody>
+                  <a:tcPr>
+                    <a:solidFill>
+                      <a:srgbClr val="F0F5F7"/>
+                    </a:solidFill>
+                  </a:tcPr>
+                </a:tc>
+                <a:tc>
+                  <a:txBody>
+                    <a:bodyPr/>
+                    <a:lstStyle/>
+                    <a:p>
+                      <a:pPr>
+                        <a:defRPr sz="1700">
+                          <a:solidFill>
+                            <a:srgbClr val="183343"/>
+                          </a:solidFill>
+                          <a:latin typeface="Microsoft YaHei"/>
+                        </a:defRPr>
+                      </a:pPr>
+                      <a:r>
+                        <a:t>276.00</a:t>
+                      </a:r>
+                    </a:p>
+                  </a:txBody>
+                  <a:tcPr>
+                    <a:solidFill>
+                      <a:srgbClr val="F0F5F7"/>
+                    </a:solidFill>
+                  </a:tcPr>
+                </a:tc>
+                <a:tc>
+                  <a:txBody>
+                    <a:bodyPr/>
+                    <a:lstStyle/>
+                    <a:p>
+                      <a:pPr>
+                        <a:defRPr sz="1700">
+                          <a:solidFill>
+                            <a:srgbClr val="183343"/>
+                          </a:solidFill>
+                          <a:latin typeface="Microsoft YaHei"/>
+                        </a:defRPr>
+                      </a:pPr>
+                      <a:r>
+                        <a:t>1847.42</a:t>
+                      </a:r>
+                    </a:p>
+                  </a:txBody>
+                  <a:tcPr>
+                    <a:solidFill>
+                      <a:srgbClr val="F0F5F7"/>
+                    </a:solidFill>
+                  </a:tcPr>
+                </a:tc>
+              </a:tr>
+            </a:tbl>
+          </a:graphicData>
+        </a:graphic>
+      </p:graphicFrame>
+      <p:sp>
+        <p:nvSpPr>
+          <p:cNvPr id="6" name="TextBox 5"/>
+          <p:cNvSpPr txBox="1"/>
+          <p:nvPr/>
+        </p:nvSpPr>
+        <p:spPr>
+          <a:xfrm>
+            <a:off x="640080" y="5715000"/>
+            <a:ext cx="10881360" cy="502920"/>
+          </a:xfrm>
+          <a:prstGeom prst="rect">
+            <a:avLst/>
+          </a:prstGeom>
+          <a:noFill/>
+        </p:spPr>
+        <p:txBody>
+          <a:bodyPr wrap="square" lIns="0" rIns="0" tIns="0" bIns="0">
+            <a:spAutoFit/>
+          </a:bodyPr>
+          <a:lstStyle/>
+          <a:p>
+            <a:pPr>
+              <a:spcAft>
+                <a:spcPts val="1200"/>
+              </a:spcAft>
+              <a:defRPr sz="1900" b="1">
+                <a:solidFill>
+                  <a:srgbClr val="287D8D"/>
+                </a:solidFill>
+                <a:latin typeface="Microsoft YaHei"/>
+              </a:defRPr>
+            </a:pPr>
+            <a:r>
+              <a:t>解集为决策者提供选项，单一指标最优并不意味着全部目标同时最优。</a:t>
+            </a:r>
+          </a:p>
+        </p:txBody>
+      </p:sp>
+    </p:spTree>
+  </p:cSld>
+  <p:clrMapOvr>
+    <a:masterClrMapping/>
+  </p:clrMapOvr>
+</p:sld>
+</file>
+
+<file path=ppt/slides/slide13.xml><?xml version="1.0" encoding="utf-8"?>
+<p:sld xmlns:a="http://schemas.openxmlformats.org/drawingml/2006/main" xmlns:p="http://schemas.openxmlformats.org/presentationml/2006/main" xmlns:r="http://schemas.openxmlformats.org/officeDocument/2006/relationships">
+  <p:cSld>
+    <p:bg>
+      <p:bgPr>
+        <a:solidFill>
+          <a:srgbClr val="FFFFFF"/>
+        </a:solidFill>
+        <a:effectLst/>
+      </p:bgPr>
+    </p:bg>
+    <p:spTree>
+      <p:nvGrpSpPr>
+        <p:cNvPr id="1" name=""/>
+        <p:cNvGrpSpPr/>
+        <p:nvPr/>
+      </p:nvGrpSpPr>
+      <p:grpSpPr/>
+      <p:sp>
+        <p:nvSpPr>
+          <p:cNvPr id="2" name="TextBox 1"/>
+          <p:cNvSpPr txBox="1"/>
+          <p:nvPr/>
+        </p:nvSpPr>
+        <p:spPr>
+          <a:xfrm>
+            <a:off x="594360" y="411480"/>
+            <a:ext cx="10972800" cy="914400"/>
+          </a:xfrm>
+          <a:prstGeom prst="rect">
+            <a:avLst/>
+          </a:prstGeom>
+          <a:noFill/>
+        </p:spPr>
+        <p:txBody>
+          <a:bodyPr wrap="square" lIns="0" rIns="0" tIns="0" bIns="0">
+            <a:spAutoFit/>
+          </a:bodyPr>
+          <a:lstStyle/>
+          <a:p>
+            <a:pPr>
+              <a:spcAft>
+                <a:spcPts val="1200"/>
+              </a:spcAft>
+              <a:defRPr sz="2800" b="1">
+                <a:solidFill>
+                  <a:srgbClr val="183343"/>
+                </a:solidFill>
+                <a:latin typeface="Microsoft YaHei"/>
+              </a:defRPr>
+            </a:pPr>
+            <a:r>
+              <a:t>改进效果仍需消融与跨情景验证</a:t>
+            </a:r>
+          </a:p>
+        </p:txBody>
+      </p:sp>
+      <p:sp>
+        <p:nvSpPr>
+          <p:cNvPr id="3" name="TextBox 2"/>
+          <p:cNvSpPr txBox="1"/>
+          <p:nvPr/>
+        </p:nvSpPr>
+        <p:spPr>
+          <a:xfrm>
+            <a:off x="594360" y="6455664"/>
+            <a:ext cx="10515600" cy="228600"/>
+          </a:xfrm>
+          <a:prstGeom prst="rect">
+            <a:avLst/>
+          </a:prstGeom>
+          <a:noFill/>
+        </p:spPr>
+        <p:txBody>
+          <a:bodyPr wrap="square" lIns="0" rIns="0" tIns="0" bIns="0">
+            <a:spAutoFit/>
+          </a:bodyPr>
+          <a:lstStyle/>
+          <a:p>
+            <a:pPr>
+              <a:spcAft>
+                <a:spcPts val="1200"/>
+              </a:spcAft>
+              <a:defRPr sz="900" b="0">
+                <a:solidFill>
+                  <a:srgbClr val="576774"/>
+                </a:solidFill>
+                <a:latin typeface="Microsoft YaHei"/>
+              </a:defRPr>
+            </a:pPr>
+            <a:r>
+              <a:t>依据：第4节；验证建议为汇报者评议</a:t>
+            </a:r>
+          </a:p>
+        </p:txBody>
+      </p:sp>
+      <p:sp>
+        <p:nvSpPr>
+          <p:cNvPr id="4" name="TextBox 3"/>
+          <p:cNvSpPr txBox="1"/>
+          <p:nvPr/>
+        </p:nvSpPr>
+        <p:spPr>
+          <a:xfrm>
+            <a:off x="11109960" y="6428232"/>
+            <a:ext cx="457200" cy="274320"/>
+          </a:xfrm>
+          <a:prstGeom prst="rect">
+            <a:avLst/>
+          </a:prstGeom>
+          <a:noFill/>
+        </p:spPr>
+        <p:txBody>
+          <a:bodyPr wrap="square" lIns="0" rIns="0" tIns="0" bIns="0">
+            <a:spAutoFit/>
+          </a:bodyPr>
+          <a:lstStyle/>
+          <a:p>
+            <a:pPr>
+              <a:spcAft>
+                <a:spcPts val="1200"/>
+              </a:spcAft>
+              <a:defRPr sz="1000" b="0">
+                <a:solidFill>
+                  <a:srgbClr val="576774"/>
+                </a:solidFill>
+                <a:latin typeface="Microsoft YaHei"/>
+              </a:defRPr>
+            </a:pPr>
+            <a:r>
+              <a:t>13</a:t>
+            </a:r>
+          </a:p>
+        </p:txBody>
+      </p:sp>
       <p:sp>
         <p:nvSpPr>
           <p:cNvPr id="5" name="TextBox 4"/>
@@ -5768,7 +7046,7 @@
               </a:defRPr>
             </a:pPr>
             <a:r>
-              <a:t>已有证据</a:t>
+              <a:t>作者指出的局限</a:t>
             </a:r>
           </a:p>
         </p:txBody>
@@ -5807,7 +7085,7 @@
               </a:defRPr>
             </a:pPr>
             <a:r>
-              <a:t>二维函数接近最优，单流域算例获得更高收益。</a:t>
+              <a:t>变异方式影响运算效率与解集质量。</a:t>
             </a:r>
           </a:p>
         </p:txBody>
@@ -5846,7 +7124,7 @@
               </a:defRPr>
             </a:pPr>
             <a:r>
-              <a:t>适用边界</a:t>
+              <a:t>证据边界</a:t>
             </a:r>
           </a:p>
         </p:txBody>
@@ -5885,7 +7163,7 @@
               </a:defRPr>
             </a:pPr>
             <a:r>
-              <a:t>工程结果存在随机波动，缺少跨年份验证。</a:t>
+              <a:t>单流域平水年，缺少改进模块消融。</a:t>
             </a:r>
           </a:p>
         </p:txBody>
@@ -5924,7 +7202,7 @@
               </a:defRPr>
             </a:pPr>
             <a:r>
-              <a:t>复现重点</a:t>
+              <a:t>可补充的验证</a:t>
             </a:r>
           </a:p>
         </p:txBody>
@@ -5963,14 +7241,251 @@
               </a:defRPr>
             </a:pPr>
             <a:r>
-              <a:t>多随机种子、等时间预算，并报告结果分布。</a:t>
-            </a:r>
-          </a:p>
-        </p:txBody>
-      </p:sp>
-      <p:sp>
-        <p:nvSpPr>
-          <p:cNvPr id="11" name="TextBox 10"/>
+              <a:t>跨水情、多随机种子、HV或IGD及运行预算比较。</a:t>
+            </a:r>
+          </a:p>
+        </p:txBody>
+      </p:sp>
+    </p:spTree>
+  </p:cSld>
+  <p:clrMapOvr>
+    <a:masterClrMapping/>
+  </p:clrMapOvr>
+</p:sld>
+</file>
+
+<file path=ppt/slides/slide14.xml><?xml version="1.0" encoding="utf-8"?>
+<p:sld xmlns:a="http://schemas.openxmlformats.org/drawingml/2006/main" xmlns:p="http://schemas.openxmlformats.org/presentationml/2006/main" xmlns:r="http://schemas.openxmlformats.org/officeDocument/2006/relationships">
+  <p:cSld>
+    <p:bg>
+      <p:bgPr>
+        <a:solidFill>
+          <a:srgbClr val="FFFFFF"/>
+        </a:solidFill>
+        <a:effectLst/>
+      </p:bgPr>
+    </p:bg>
+    <p:spTree>
+      <p:nvGrpSpPr>
+        <p:cNvPr id="1" name=""/>
+        <p:cNvGrpSpPr/>
+        <p:nvPr/>
+      </p:nvGrpSpPr>
+      <p:grpSpPr/>
+      <p:sp>
+        <p:nvSpPr>
+          <p:cNvPr id="2" name="TextBox 1"/>
+          <p:cNvSpPr txBox="1"/>
+          <p:nvPr/>
+        </p:nvSpPr>
+        <p:spPr>
+          <a:xfrm>
+            <a:off x="594360" y="411480"/>
+            <a:ext cx="10972800" cy="914400"/>
+          </a:xfrm>
+          <a:prstGeom prst="rect">
+            <a:avLst/>
+          </a:prstGeom>
+          <a:noFill/>
+        </p:spPr>
+        <p:txBody>
+          <a:bodyPr wrap="square" lIns="0" rIns="0" tIns="0" bIns="0">
+            <a:spAutoFit/>
+          </a:bodyPr>
+          <a:lstStyle/>
+          <a:p>
+            <a:pPr>
+              <a:spcAft>
+                <a:spcPts val="1200"/>
+              </a:spcAft>
+              <a:defRPr sz="2800" b="1">
+                <a:solidFill>
+                  <a:srgbClr val="183343"/>
+                </a:solidFill>
+                <a:latin typeface="Microsoft YaHei"/>
+              </a:defRPr>
+            </a:pPr>
+            <a:r>
+              <a:t>可行性信息改善了目标评价与进化方向</a:t>
+            </a:r>
+          </a:p>
+        </p:txBody>
+      </p:sp>
+      <p:sp>
+        <p:nvSpPr>
+          <p:cNvPr id="3" name="TextBox 2"/>
+          <p:cNvSpPr txBox="1"/>
+          <p:nvPr/>
+        </p:nvSpPr>
+        <p:spPr>
+          <a:xfrm>
+            <a:off x="594360" y="6455664"/>
+            <a:ext cx="10515600" cy="228600"/>
+          </a:xfrm>
+          <a:prstGeom prst="rect">
+            <a:avLst/>
+          </a:prstGeom>
+          <a:noFill/>
+        </p:spPr>
+        <p:txBody>
+          <a:bodyPr wrap="square" lIns="0" rIns="0" tIns="0" bIns="0">
+            <a:spAutoFit/>
+          </a:bodyPr>
+          <a:lstStyle/>
+          <a:p>
+            <a:pPr>
+              <a:spcAft>
+                <a:spcPts val="1200"/>
+              </a:spcAft>
+              <a:defRPr sz="900" b="0">
+                <a:solidFill>
+                  <a:srgbClr val="576774"/>
+                </a:solidFill>
+                <a:latin typeface="Microsoft YaHei"/>
+              </a:defRPr>
+            </a:pPr>
+            <a:r>
+              <a:t>总结依据：第2–4节</a:t>
+            </a:r>
+          </a:p>
+        </p:txBody>
+      </p:sp>
+      <p:sp>
+        <p:nvSpPr>
+          <p:cNvPr id="4" name="TextBox 3"/>
+          <p:cNvSpPr txBox="1"/>
+          <p:nvPr/>
+        </p:nvSpPr>
+        <p:spPr>
+          <a:xfrm>
+            <a:off x="11109960" y="6428232"/>
+            <a:ext cx="457200" cy="274320"/>
+          </a:xfrm>
+          <a:prstGeom prst="rect">
+            <a:avLst/>
+          </a:prstGeom>
+          <a:noFill/>
+        </p:spPr>
+        <p:txBody>
+          <a:bodyPr wrap="square" lIns="0" rIns="0" tIns="0" bIns="0">
+            <a:spAutoFit/>
+          </a:bodyPr>
+          <a:lstStyle/>
+          <a:p>
+            <a:pPr>
+              <a:spcAft>
+                <a:spcPts val="1200"/>
+              </a:spcAft>
+              <a:defRPr sz="1000" b="0">
+                <a:solidFill>
+                  <a:srgbClr val="576774"/>
+                </a:solidFill>
+                <a:latin typeface="Microsoft YaHei"/>
+              </a:defRPr>
+            </a:pPr>
+            <a:r>
+              <a:t>14</a:t>
+            </a:r>
+          </a:p>
+        </p:txBody>
+      </p:sp>
+      <p:sp>
+        <p:nvSpPr>
+          <p:cNvPr id="5" name="TextBox 4"/>
+          <p:cNvSpPr txBox="1"/>
+          <p:nvPr/>
+        </p:nvSpPr>
+        <p:spPr>
+          <a:xfrm>
+            <a:off x="822960" y="1645920"/>
+            <a:ext cx="10424160" cy="914400"/>
+          </a:xfrm>
+          <a:prstGeom prst="rect">
+            <a:avLst/>
+          </a:prstGeom>
+          <a:noFill/>
+        </p:spPr>
+        <p:txBody>
+          <a:bodyPr wrap="square" lIns="0" rIns="0" tIns="0" bIns="0">
+            <a:spAutoFit/>
+          </a:bodyPr>
+          <a:lstStyle/>
+          <a:p>
+            <a:pPr>
+              <a:spcAft>
+                <a:spcPts val="1200"/>
+              </a:spcAft>
+              <a:defRPr sz="2700" b="1">
+                <a:solidFill>
+                  <a:srgbClr val="287D8D"/>
+                </a:solidFill>
+                <a:latin typeface="Microsoft YaHei"/>
+              </a:defRPr>
+            </a:pPr>
+            <a:r>
+              <a:t>核心贡献：将约束破坏信息用于解评价和变异引导。</a:t>
+            </a:r>
+          </a:p>
+        </p:txBody>
+      </p:sp>
+      <p:sp>
+        <p:nvSpPr>
+          <p:cNvPr id="6" name="TextBox 5"/>
+          <p:cNvSpPr txBox="1"/>
+          <p:nvPr/>
+        </p:nvSpPr>
+        <p:spPr>
+          <a:xfrm>
+            <a:off x="822960" y="3063240"/>
+            <a:ext cx="10424160" cy="1463040"/>
+          </a:xfrm>
+          <a:prstGeom prst="rect">
+            <a:avLst/>
+          </a:prstGeom>
+          <a:noFill/>
+        </p:spPr>
+        <p:txBody>
+          <a:bodyPr wrap="square" lIns="0" rIns="0" tIns="0" bIns="0">
+            <a:spAutoFit/>
+          </a:bodyPr>
+          <a:lstStyle/>
+          <a:p>
+            <a:pPr>
+              <a:spcAft>
+                <a:spcPts val="1200"/>
+              </a:spcAft>
+              <a:defRPr sz="2300" b="0">
+                <a:solidFill>
+                  <a:srgbClr val="183343"/>
+                </a:solidFill>
+                <a:latin typeface="Microsoft YaHei"/>
+              </a:defRPr>
+            </a:pPr>
+            <a:r>
+              <a:t>算例证据：更早进入可行域，获得更优的目标极值。</a:t>
+            </a:r>
+          </a:p>
+          <a:p>
+            <a:pPr>
+              <a:spcAft>
+                <a:spcPts val="1200"/>
+              </a:spcAft>
+              <a:defRPr sz="2300" b="0">
+                <a:solidFill>
+                  <a:srgbClr val="183343"/>
+                </a:solidFill>
+                <a:latin typeface="Microsoft YaHei"/>
+              </a:defRPr>
+            </a:pPr>
+            <a:r>
+              <a:t>适用边界：尚不能证明已达到真实 Pareto 前沿。</a:t>
+            </a:r>
+          </a:p>
+        </p:txBody>
+      </p:sp>
+      <p:sp>
+        <p:nvSpPr>
+          <p:cNvPr id="7" name="TextBox 6"/>
           <p:cNvSpPr txBox="1"/>
           <p:nvPr/>
         </p:nvSpPr>
@@ -6002,7 +7517,7 @@
               </a:defRPr>
             </a:pPr>
             <a:r>
-              <a:t>关键启发：在局部精细搜索之外，保留重新探索的机会。</a:t>
+              <a:t>讨论：如何分别验证“评价改进”和“变异引导”的贡献？</a:t>
             </a:r>
           </a:p>
         </p:txBody>
@@ -6067,7 +7582,7 @@
               </a:defRPr>
             </a:pPr>
             <a:r>
-              <a:t>正交降维后，搜索仍可能停在局部最优</a:t>
+              <a:t>日尺度强约束使可行解更难生成</a:t>
             </a:r>
           </a:p>
         </p:txBody>
@@ -6106,7 +7621,7 @@
               </a:defRPr>
             </a:pPr>
             <a:r>
-              <a:t>依据：第1节、第3.1节</a:t>
+              <a:t>依据：引言、第2.1节</a:t>
             </a:r>
           </a:p>
         </p:txBody>
@@ -6184,7 +7699,7 @@
               </a:defRPr>
             </a:pPr>
             <a:r>
-              <a:t>DDDP：状态组合过多</a:t>
+              <a:t>变量跨时段关联</a:t>
             </a:r>
           </a:p>
         </p:txBody>
@@ -6223,7 +7738,7 @@
               </a:defRPr>
             </a:pPr>
             <a:r>
-              <a:t>高维、非线性和多约束增加求解难度。</a:t>
+              <a:t>本时段库容变化会影响后续可行区间。</a:t>
             </a:r>
           </a:p>
         </p:txBody>
@@ -6262,7 +7777,7 @@
               </a:defRPr>
             </a:pPr>
             <a:r>
-              <a:t>ODDDP：用代表性组合减少计算</a:t>
+              <a:t>不可行解可能获得虚假高收益</a:t>
             </a:r>
           </a:p>
         </p:txBody>
@@ -6301,7 +7816,7 @@
               </a:defRPr>
             </a:pPr>
             <a:r>
-              <a:t>正交试验减轻计算规模，但保留原有步长机制。</a:t>
+              <a:t>局部异常蓄泄过程扭曲目标值评价。</a:t>
             </a:r>
           </a:p>
         </p:txBody>
@@ -6340,7 +7855,7 @@
               </a:defRPr>
             </a:pPr>
             <a:r>
-              <a:t>待解决：搜索范围收缩过早</a:t>
+              <a:t>改进目标</a:t>
             </a:r>
           </a:p>
         </p:txBody>
@@ -6379,7 +7894,7 @@
               </a:defRPr>
             </a:pPr>
             <a:r>
-              <a:t>初始解质量和局部最优仍影响最终方案。</a:t>
+              <a:t>更合理地评价解，并将变异引向可行域。</a:t>
             </a:r>
           </a:p>
         </p:txBody>
@@ -6444,7 +7959,7 @@
               </a:defRPr>
             </a:pPr>
             <a:r>
-              <a:t>本文优化的是受多种约束的梯级联合调度</a:t>
+              <a:t>模型同时考虑发电、防洪与生态需求</a:t>
             </a:r>
           </a:p>
         </p:txBody>
@@ -6483,7 +7998,7 @@
               </a:defRPr>
             </a:pPr>
             <a:r>
-              <a:t>依据：第2节，式1–8</a:t>
+              <a:t>依据：第1节，式1–9</a:t>
             </a:r>
           </a:p>
         </p:txBody>
@@ -6523,1337 +8038,6 @@
             </a:pPr>
             <a:r>
               <a:t>03</a:t>
-            </a:r>
-          </a:p>
-        </p:txBody>
-      </p:sp>
-      <p:sp>
-        <p:nvSpPr>
-          <p:cNvPr id="5" name="TextBox 4"/>
-          <p:cNvSpPr txBox="1"/>
-          <p:nvPr/>
-        </p:nvSpPr>
-        <p:spPr>
-          <a:xfrm>
-            <a:off x="777240" y="1554480"/>
-            <a:ext cx="10515600" cy="685800"/>
-          </a:xfrm>
-          <a:prstGeom prst="rect">
-            <a:avLst/>
-          </a:prstGeom>
-          <a:noFill/>
-        </p:spPr>
-        <p:txBody>
-          <a:bodyPr wrap="square" lIns="0" rIns="0" tIns="0" bIns="0">
-            <a:spAutoFit/>
-          </a:bodyPr>
-          <a:lstStyle/>
-          <a:p>
-            <a:pPr>
-              <a:spcAft>
-                <a:spcPts val="1200"/>
-              </a:spcAft>
-              <a:defRPr sz="2800" b="1">
-                <a:solidFill>
-                  <a:srgbClr val="287D8D"/>
-                </a:solidFill>
-                <a:latin typeface="Microsoft YaHei"/>
-              </a:defRPr>
-            </a:pPr>
-            <a:r>
-              <a:t>目标：提高调度期内梯级整体发电收益</a:t>
-            </a:r>
-          </a:p>
-        </p:txBody>
-      </p:sp>
-      <p:graphicFrame>
-        <p:nvGraphicFramePr>
-          <p:cNvPr id="6" name="Table 5"/>
-          <p:cNvGraphicFramePr>
-            <a:graphicFrameLocks noGrp="1"/>
-          </p:cNvGraphicFramePr>
-          <p:nvPr/>
-        </p:nvGraphicFramePr>
-        <p:xfrm>
-          <a:off x="731520" y="2560320"/>
-          <a:ext cx="10698480" cy="2377440"/>
-        </p:xfrm>
-        <a:graphic>
-          <a:graphicData uri="http://schemas.openxmlformats.org/drawingml/2006/table">
-            <a:tbl>
-              <a:tblPr firstRow="1" bandRow="1">
-                <a:tableStyleId>{5C22544A-7EE6-4342-B048-85BDC9FD1C3A}</a:tableStyleId>
-              </a:tblPr>
-              <a:tblGrid>
-                <a:gridCol w="5349240"/>
-                <a:gridCol w="5349240"/>
-              </a:tblGrid>
-              <a:tr h="594360">
-                <a:tc>
-                  <a:txBody>
-                    <a:bodyPr/>
-                    <a:lstStyle/>
-                    <a:p>
-                      <a:pPr>
-                        <a:defRPr sz="1700">
-                          <a:solidFill>
-                            <a:srgbClr val="FFFFFF"/>
-                          </a:solidFill>
-                          <a:latin typeface="Microsoft YaHei"/>
-                        </a:defRPr>
-                      </a:pPr>
-                      <a:r>
-                        <a:t>约束层次</a:t>
-                      </a:r>
-                    </a:p>
-                  </a:txBody>
-                  <a:tcPr>
-                    <a:solidFill>
-                      <a:srgbClr val="287D8D"/>
-                    </a:solidFill>
-                  </a:tcPr>
-                </a:tc>
-                <a:tc>
-                  <a:txBody>
-                    <a:bodyPr/>
-                    <a:lstStyle/>
-                    <a:p>
-                      <a:pPr>
-                        <a:defRPr sz="1700">
-                          <a:solidFill>
-                            <a:srgbClr val="FFFFFF"/>
-                          </a:solidFill>
-                          <a:latin typeface="Microsoft YaHei"/>
-                        </a:defRPr>
-                      </a:pPr>
-                      <a:r>
-                        <a:t>主要内容</a:t>
-                      </a:r>
-                    </a:p>
-                  </a:txBody>
-                  <a:tcPr>
-                    <a:solidFill>
-                      <a:srgbClr val="287D8D"/>
-                    </a:solidFill>
-                  </a:tcPr>
-                </a:tc>
-              </a:tr>
-              <a:tr h="594360">
-                <a:tc>
-                  <a:txBody>
-                    <a:bodyPr/>
-                    <a:lstStyle/>
-                    <a:p>
-                      <a:pPr>
-                        <a:defRPr sz="1700">
-                          <a:solidFill>
-                            <a:srgbClr val="183343"/>
-                          </a:solidFill>
-                          <a:latin typeface="Microsoft YaHei"/>
-                        </a:defRPr>
-                      </a:pPr>
-                      <a:r>
-                        <a:t>水库自身</a:t>
-                      </a:r>
-                    </a:p>
-                  </a:txBody>
-                  <a:tcPr>
-                    <a:solidFill>
-                      <a:srgbClr val="F0F5F7"/>
-                    </a:solidFill>
-                  </a:tcPr>
-                </a:tc>
-                <a:tc>
-                  <a:txBody>
-                    <a:bodyPr/>
-                    <a:lstStyle/>
-                    <a:p>
-                      <a:pPr>
-                        <a:defRPr sz="1700">
-                          <a:solidFill>
-                            <a:srgbClr val="183343"/>
-                          </a:solidFill>
-                          <a:latin typeface="Microsoft YaHei"/>
-                        </a:defRPr>
-                      </a:pPr>
-                      <a:r>
-                        <a:t>水量平衡、库容与水位边界</a:t>
-                      </a:r>
-                    </a:p>
-                  </a:txBody>
-                  <a:tcPr>
-                    <a:solidFill>
-                      <a:srgbClr val="F0F5F7"/>
-                    </a:solidFill>
-                  </a:tcPr>
-                </a:tc>
-              </a:tr>
-              <a:tr h="594360">
-                <a:tc>
-                  <a:txBody>
-                    <a:bodyPr/>
-                    <a:lstStyle/>
-                    <a:p>
-                      <a:pPr>
-                        <a:defRPr sz="1700">
-                          <a:solidFill>
-                            <a:srgbClr val="183343"/>
-                          </a:solidFill>
-                          <a:latin typeface="Microsoft YaHei"/>
-                        </a:defRPr>
-                      </a:pPr>
-                      <a:r>
-                        <a:t>电站运行</a:t>
-                      </a:r>
-                    </a:p>
-                  </a:txBody>
-                  <a:tcPr>
-                    <a:solidFill>
-                      <a:srgbClr val="FFFFFF"/>
-                    </a:solidFill>
-                  </a:tcPr>
-                </a:tc>
-                <a:tc>
-                  <a:txBody>
-                    <a:bodyPr/>
-                    <a:lstStyle/>
-                    <a:p>
-                      <a:pPr>
-                        <a:defRPr sz="1700">
-                          <a:solidFill>
-                            <a:srgbClr val="183343"/>
-                          </a:solidFill>
-                          <a:latin typeface="Microsoft YaHei"/>
-                        </a:defRPr>
-                      </a:pPr>
-                      <a:r>
-                        <a:t>出力、发电流量与水头限制</a:t>
-                      </a:r>
-                    </a:p>
-                  </a:txBody>
-                  <a:tcPr>
-                    <a:solidFill>
-                      <a:srgbClr val="FFFFFF"/>
-                    </a:solidFill>
-                  </a:tcPr>
-                </a:tc>
-              </a:tr>
-              <a:tr h="594360">
-                <a:tc>
-                  <a:txBody>
-                    <a:bodyPr/>
-                    <a:lstStyle/>
-                    <a:p>
-                      <a:pPr>
-                        <a:defRPr sz="1700">
-                          <a:solidFill>
-                            <a:srgbClr val="183343"/>
-                          </a:solidFill>
-                          <a:latin typeface="Microsoft YaHei"/>
-                        </a:defRPr>
-                      </a:pPr>
-                      <a:r>
-                        <a:t>梯级耦合</a:t>
-                      </a:r>
-                    </a:p>
-                  </a:txBody>
-                  <a:tcPr>
-                    <a:solidFill>
-                      <a:srgbClr val="F0F5F7"/>
-                    </a:solidFill>
-                  </a:tcPr>
-                </a:tc>
-                <a:tc>
-                  <a:txBody>
-                    <a:bodyPr/>
-                    <a:lstStyle/>
-                    <a:p>
-                      <a:pPr>
-                        <a:defRPr sz="1700">
-                          <a:solidFill>
-                            <a:srgbClr val="183343"/>
-                          </a:solidFill>
-                          <a:latin typeface="Microsoft YaHei"/>
-                        </a:defRPr>
-                      </a:pPr>
-                      <a:r>
-                        <a:t>上游出流与区间径流共同形成下游入流</a:t>
-                      </a:r>
-                    </a:p>
-                  </a:txBody>
-                  <a:tcPr>
-                    <a:solidFill>
-                      <a:srgbClr val="F0F5F7"/>
-                    </a:solidFill>
-                  </a:tcPr>
-                </a:tc>
-              </a:tr>
-            </a:tbl>
-          </a:graphicData>
-        </a:graphic>
-      </p:graphicFrame>
-      <p:sp>
-        <p:nvSpPr>
-          <p:cNvPr id="7" name="TextBox 6"/>
-          <p:cNvSpPr txBox="1"/>
-          <p:nvPr/>
-        </p:nvSpPr>
-        <p:spPr>
-          <a:xfrm>
-            <a:off x="640080" y="5715000"/>
-            <a:ext cx="10881360" cy="502920"/>
-          </a:xfrm>
-          <a:prstGeom prst="rect">
-            <a:avLst/>
-          </a:prstGeom>
-          <a:noFill/>
-        </p:spPr>
-        <p:txBody>
-          <a:bodyPr wrap="square" lIns="0" rIns="0" tIns="0" bIns="0">
-            <a:spAutoFit/>
-          </a:bodyPr>
-          <a:lstStyle/>
-          <a:p>
-            <a:pPr>
-              <a:spcAft>
-                <a:spcPts val="1200"/>
-              </a:spcAft>
-              <a:defRPr sz="1900" b="1">
-                <a:solidFill>
-                  <a:srgbClr val="287D8D"/>
-                </a:solidFill>
-                <a:latin typeface="Microsoft YaHei"/>
-              </a:defRPr>
-            </a:pPr>
-            <a:r>
-              <a:t>整体收益最大化允许部分水库出力略降。</a:t>
-            </a:r>
-          </a:p>
-        </p:txBody>
-      </p:sp>
-    </p:spTree>
-  </p:cSld>
-  <p:clrMapOvr>
-    <a:masterClrMapping/>
-  </p:clrMapOvr>
-</p:sld>
-</file>
-
-<file path=ppt/slides/slide4.xml><?xml version="1.0" encoding="utf-8"?>
-<p:sld xmlns:a="http://schemas.openxmlformats.org/drawingml/2006/main" xmlns:p="http://schemas.openxmlformats.org/presentationml/2006/main" xmlns:r="http://schemas.openxmlformats.org/officeDocument/2006/relationships">
-  <p:cSld>
-    <p:bg>
-      <p:bgPr>
-        <a:solidFill>
-          <a:srgbClr val="FFFFFF"/>
-        </a:solidFill>
-        <a:effectLst/>
-      </p:bgPr>
-    </p:bg>
-    <p:spTree>
-      <p:nvGrpSpPr>
-        <p:cNvPr id="1" name=""/>
-        <p:cNvGrpSpPr/>
-        <p:nvPr/>
-      </p:nvGrpSpPr>
-      <p:grpSpPr/>
-      <p:sp>
-        <p:nvSpPr>
-          <p:cNvPr id="2" name="TextBox 1"/>
-          <p:cNvSpPr txBox="1"/>
-          <p:nvPr/>
-        </p:nvSpPr>
-        <p:spPr>
-          <a:xfrm>
-            <a:off x="594360" y="411480"/>
-            <a:ext cx="10972800" cy="914400"/>
-          </a:xfrm>
-          <a:prstGeom prst="rect">
-            <a:avLst/>
-          </a:prstGeom>
-          <a:noFill/>
-        </p:spPr>
-        <p:txBody>
-          <a:bodyPr wrap="square" lIns="0" rIns="0" tIns="0" bIns="0">
-            <a:spAutoFit/>
-          </a:bodyPr>
-          <a:lstStyle/>
-          <a:p>
-            <a:pPr>
-              <a:spcAft>
-                <a:spcPts val="1200"/>
-              </a:spcAft>
-              <a:defRPr sz="2800" b="1">
-                <a:solidFill>
-                  <a:srgbClr val="183343"/>
-                </a:solidFill>
-                <a:latin typeface="Microsoft YaHei"/>
-              </a:defRPr>
-            </a:pPr>
-            <a:r>
-              <a:t>周期性扰动让搜索范围能够再次扩大</a:t>
-            </a:r>
-          </a:p>
-        </p:txBody>
-      </p:sp>
-      <p:sp>
-        <p:nvSpPr>
-          <p:cNvPr id="3" name="TextBox 2"/>
-          <p:cNvSpPr txBox="1"/>
-          <p:nvPr/>
-        </p:nvSpPr>
-        <p:spPr>
-          <a:xfrm>
-            <a:off x="594360" y="6455664"/>
-            <a:ext cx="10515600" cy="228600"/>
-          </a:xfrm>
-          <a:prstGeom prst="rect">
-            <a:avLst/>
-          </a:prstGeom>
-          <a:noFill/>
-        </p:spPr>
-        <p:txBody>
-          <a:bodyPr wrap="square" lIns="0" rIns="0" tIns="0" bIns="0">
-            <a:spAutoFit/>
-          </a:bodyPr>
-          <a:lstStyle/>
-          <a:p>
-            <a:pPr>
-              <a:spcAft>
-                <a:spcPts val="1200"/>
-              </a:spcAft>
-              <a:defRPr sz="900" b="0">
-                <a:solidFill>
-                  <a:srgbClr val="576774"/>
-                </a:solidFill>
-                <a:latin typeface="Microsoft YaHei"/>
-              </a:defRPr>
-            </a:pPr>
-            <a:r>
-              <a:t>依据：第3.2–3.3节，原文图1</a:t>
-            </a:r>
-          </a:p>
-        </p:txBody>
-      </p:sp>
-      <p:sp>
-        <p:nvSpPr>
-          <p:cNvPr id="4" name="TextBox 3"/>
-          <p:cNvSpPr txBox="1"/>
-          <p:nvPr/>
-        </p:nvSpPr>
-        <p:spPr>
-          <a:xfrm>
-            <a:off x="11109960" y="6428232"/>
-            <a:ext cx="457200" cy="274320"/>
-          </a:xfrm>
-          <a:prstGeom prst="rect">
-            <a:avLst/>
-          </a:prstGeom>
-          <a:noFill/>
-        </p:spPr>
-        <p:txBody>
-          <a:bodyPr wrap="square" lIns="0" rIns="0" tIns="0" bIns="0">
-            <a:spAutoFit/>
-          </a:bodyPr>
-          <a:lstStyle/>
-          <a:p>
-            <a:pPr>
-              <a:spcAft>
-                <a:spcPts val="1200"/>
-              </a:spcAft>
-              <a:defRPr sz="1000" b="0">
-                <a:solidFill>
-                  <a:srgbClr val="576774"/>
-                </a:solidFill>
-                <a:latin typeface="Microsoft YaHei"/>
-              </a:defRPr>
-            </a:pPr>
-            <a:r>
-              <a:t>04</a:t>
-            </a:r>
-          </a:p>
-        </p:txBody>
-      </p:sp>
-      <p:pic>
-        <p:nvPicPr>
-          <p:cNvPr id="5" name="Picture 4" descr="fig1.png"/>
-          <p:cNvPicPr>
-            <a:picLocks noChangeAspect="1"/>
-          </p:cNvPicPr>
-          <p:nvPr/>
-        </p:nvPicPr>
-        <p:blipFill>
-          <a:blip r:embed="rId3"/>
-          <a:stretch>
-            <a:fillRect/>
-          </a:stretch>
-        </p:blipFill>
-        <p:spPr>
-          <a:xfrm>
-            <a:off x="1051559" y="1463040"/>
-            <a:ext cx="6858000" cy="3931920"/>
-          </a:xfrm>
-          <a:prstGeom prst="rect">
-            <a:avLst/>
-          </a:prstGeom>
-        </p:spPr>
-      </p:pic>
-      <p:sp>
-        <p:nvSpPr>
-          <p:cNvPr id="6" name="TextBox 5"/>
-          <p:cNvSpPr txBox="1"/>
-          <p:nvPr/>
-        </p:nvSpPr>
-        <p:spPr>
-          <a:xfrm>
-            <a:off x="8595360" y="1828800"/>
-            <a:ext cx="2834640" cy="3474720"/>
-          </a:xfrm>
-          <a:prstGeom prst="rect">
-            <a:avLst/>
-          </a:prstGeom>
-          <a:noFill/>
-        </p:spPr>
-        <p:txBody>
-          <a:bodyPr wrap="square" lIns="0" rIns="0" tIns="0" bIns="0">
-            <a:spAutoFit/>
-          </a:bodyPr>
-          <a:lstStyle/>
-          <a:p>
-            <a:pPr>
-              <a:spcAft>
-                <a:spcPts val="1200"/>
-              </a:spcAft>
-              <a:defRPr sz="1700" b="0">
-                <a:solidFill>
-                  <a:srgbClr val="183343"/>
-                </a:solidFill>
-                <a:latin typeface="Microsoft YaHei"/>
-              </a:defRPr>
-            </a:pPr>
-            <a:r>
-              <a:t>ODDDP</a:t>
-            </a:r>
-          </a:p>
-          <a:p>
-            <a:pPr>
-              <a:spcAft>
-                <a:spcPts val="1200"/>
-              </a:spcAft>
-              <a:defRPr sz="1700" b="0">
-                <a:solidFill>
-                  <a:srgbClr val="183343"/>
-                </a:solidFill>
-                <a:latin typeface="Microsoft YaHei"/>
-              </a:defRPr>
-            </a:pPr>
-            <a:r>
-              <a:t>步长逐渐缩小</a:t>
-            </a:r>
-          </a:p>
-          <a:p>
-            <a:pPr>
-              <a:spcAft>
-                <a:spcPts val="1200"/>
-              </a:spcAft>
-              <a:defRPr sz="1700" b="0">
-                <a:solidFill>
-                  <a:srgbClr val="183343"/>
-                </a:solidFill>
-                <a:latin typeface="Microsoft YaHei"/>
-              </a:defRPr>
-            </a:pPr>
-          </a:p>
-          <a:p>
-            <a:pPr>
-              <a:spcAft>
-                <a:spcPts val="1200"/>
-              </a:spcAft>
-              <a:defRPr sz="1700" b="0">
-                <a:solidFill>
-                  <a:srgbClr val="183343"/>
-                </a:solidFill>
-                <a:latin typeface="Microsoft YaHei"/>
-              </a:defRPr>
-            </a:pPr>
-            <a:r>
-              <a:t>IWO-ODDDP</a:t>
-            </a:r>
-          </a:p>
-          <a:p>
-            <a:pPr>
-              <a:spcAft>
-                <a:spcPts val="1200"/>
-              </a:spcAft>
-              <a:defRPr sz="1700" b="0">
-                <a:solidFill>
-                  <a:srgbClr val="183343"/>
-                </a:solidFill>
-                <a:latin typeface="Microsoft YaHei"/>
-              </a:defRPr>
-            </a:pPr>
-            <a:r>
-              <a:t>随机扰动，总体收缩</a:t>
-            </a:r>
-          </a:p>
-          <a:p>
-            <a:pPr>
-              <a:spcAft>
-                <a:spcPts val="1200"/>
-              </a:spcAft>
-              <a:defRPr sz="1700" b="0">
-                <a:solidFill>
-                  <a:srgbClr val="183343"/>
-                </a:solidFill>
-                <a:latin typeface="Microsoft YaHei"/>
-              </a:defRPr>
-            </a:pPr>
-          </a:p>
-          <a:p>
-            <a:pPr>
-              <a:spcAft>
-                <a:spcPts val="1200"/>
-              </a:spcAft>
-              <a:defRPr sz="1700" b="0">
-                <a:solidFill>
-                  <a:srgbClr val="183343"/>
-                </a:solidFill>
-                <a:latin typeface="Microsoft YaHei"/>
-              </a:defRPr>
-            </a:pPr>
-            <a:r>
-              <a:t>M-IWO-ODDDP</a:t>
-            </a:r>
-          </a:p>
-          <a:p>
-            <a:pPr>
-              <a:spcAft>
-                <a:spcPts val="1200"/>
-              </a:spcAft>
-              <a:defRPr sz="1700" b="0">
-                <a:solidFill>
-                  <a:srgbClr val="183343"/>
-                </a:solidFill>
-                <a:latin typeface="Microsoft YaHei"/>
-              </a:defRPr>
-            </a:pPr>
-            <a:r>
-              <a:t>搜索范围交替变化</a:t>
-            </a:r>
-          </a:p>
-        </p:txBody>
-      </p:sp>
-      <p:sp>
-        <p:nvSpPr>
-          <p:cNvPr id="7" name="TextBox 6"/>
-          <p:cNvSpPr txBox="1"/>
-          <p:nvPr/>
-        </p:nvSpPr>
-        <p:spPr>
-          <a:xfrm>
-            <a:off x="640080" y="5715000"/>
-            <a:ext cx="10881360" cy="502920"/>
-          </a:xfrm>
-          <a:prstGeom prst="rect">
-            <a:avLst/>
-          </a:prstGeom>
-          <a:noFill/>
-        </p:spPr>
-        <p:txBody>
-          <a:bodyPr wrap="square" lIns="0" rIns="0" tIns="0" bIns="0">
-            <a:spAutoFit/>
-          </a:bodyPr>
-          <a:lstStyle/>
-          <a:p>
-            <a:pPr>
-              <a:spcAft>
-                <a:spcPts val="1200"/>
-              </a:spcAft>
-              <a:defRPr sz="1900" b="1">
-                <a:solidFill>
-                  <a:srgbClr val="287D8D"/>
-                </a:solidFill>
-                <a:latin typeface="Microsoft YaHei"/>
-              </a:defRPr>
-            </a:pPr>
-            <a:r>
-              <a:t>重新扩大搜索范围，为跳出局部最优提供机会。</a:t>
-            </a:r>
-          </a:p>
-        </p:txBody>
-      </p:sp>
-    </p:spTree>
-  </p:cSld>
-  <p:clrMapOvr>
-    <a:masterClrMapping/>
-  </p:clrMapOvr>
-</p:sld>
-</file>
-
-<file path=ppt/slides/slide5.xml><?xml version="1.0" encoding="utf-8"?>
-<p:sld xmlns:a="http://schemas.openxmlformats.org/drawingml/2006/main" xmlns:p="http://schemas.openxmlformats.org/presentationml/2006/main" xmlns:r="http://schemas.openxmlformats.org/officeDocument/2006/relationships">
-  <p:cSld>
-    <p:bg>
-      <p:bgPr>
-        <a:solidFill>
-          <a:srgbClr val="FFFFFF"/>
-        </a:solidFill>
-        <a:effectLst/>
-      </p:bgPr>
-    </p:bg>
-    <p:spTree>
-      <p:nvGrpSpPr>
-        <p:cNvPr id="1" name=""/>
-        <p:cNvGrpSpPr/>
-        <p:nvPr/>
-      </p:nvGrpSpPr>
-      <p:grpSpPr/>
-      <p:sp>
-        <p:nvSpPr>
-          <p:cNvPr id="2" name="TextBox 1"/>
-          <p:cNvSpPr txBox="1"/>
-          <p:nvPr/>
-        </p:nvSpPr>
-        <p:spPr>
-          <a:xfrm>
-            <a:off x="594360" y="411480"/>
-            <a:ext cx="10972800" cy="914400"/>
-          </a:xfrm>
-          <a:prstGeom prst="rect">
-            <a:avLst/>
-          </a:prstGeom>
-          <a:noFill/>
-        </p:spPr>
-        <p:txBody>
-          <a:bodyPr wrap="square" lIns="0" rIns="0" tIns="0" bIns="0">
-            <a:spAutoFit/>
-          </a:bodyPr>
-          <a:lstStyle/>
-          <a:p>
-            <a:pPr>
-              <a:spcAft>
-                <a:spcPts val="1200"/>
-              </a:spcAft>
-              <a:defRPr sz="2800" b="1">
-                <a:solidFill>
-                  <a:srgbClr val="183343"/>
-                </a:solidFill>
-                <a:latin typeface="Microsoft YaHei"/>
-              </a:defRPr>
-            </a:pPr>
-            <a:r>
-              <a:t>正交组合与动态规划构成每轮寻优过程</a:t>
-            </a:r>
-          </a:p>
-        </p:txBody>
-      </p:sp>
-      <p:sp>
-        <p:nvSpPr>
-          <p:cNvPr id="3" name="TextBox 2"/>
-          <p:cNvSpPr txBox="1"/>
-          <p:nvPr/>
-        </p:nvSpPr>
-        <p:spPr>
-          <a:xfrm>
-            <a:off x="594360" y="6455664"/>
-            <a:ext cx="10515600" cy="228600"/>
-          </a:xfrm>
-          <a:prstGeom prst="rect">
-            <a:avLst/>
-          </a:prstGeom>
-          <a:noFill/>
-        </p:spPr>
-        <p:txBody>
-          <a:bodyPr wrap="square" lIns="0" rIns="0" tIns="0" bIns="0">
-            <a:spAutoFit/>
-          </a:bodyPr>
-          <a:lstStyle/>
-          <a:p>
-            <a:pPr>
-              <a:spcAft>
-                <a:spcPts val="1200"/>
-              </a:spcAft>
-              <a:defRPr sz="900" b="0">
-                <a:solidFill>
-                  <a:srgbClr val="576774"/>
-                </a:solidFill>
-                <a:latin typeface="Microsoft YaHei"/>
-              </a:defRPr>
-            </a:pPr>
-            <a:r>
-              <a:t>依据：第4节，式12–14</a:t>
-            </a:r>
-          </a:p>
-        </p:txBody>
-      </p:sp>
-      <p:sp>
-        <p:nvSpPr>
-          <p:cNvPr id="4" name="TextBox 3"/>
-          <p:cNvSpPr txBox="1"/>
-          <p:nvPr/>
-        </p:nvSpPr>
-        <p:spPr>
-          <a:xfrm>
-            <a:off x="11109960" y="6428232"/>
-            <a:ext cx="457200" cy="274320"/>
-          </a:xfrm>
-          <a:prstGeom prst="rect">
-            <a:avLst/>
-          </a:prstGeom>
-          <a:noFill/>
-        </p:spPr>
-        <p:txBody>
-          <a:bodyPr wrap="square" lIns="0" rIns="0" tIns="0" bIns="0">
-            <a:spAutoFit/>
-          </a:bodyPr>
-          <a:lstStyle/>
-          <a:p>
-            <a:pPr>
-              <a:spcAft>
-                <a:spcPts val="1200"/>
-              </a:spcAft>
-              <a:defRPr sz="1000" b="0">
-                <a:solidFill>
-                  <a:srgbClr val="576774"/>
-                </a:solidFill>
-                <a:latin typeface="Microsoft YaHei"/>
-              </a:defRPr>
-            </a:pPr>
-            <a:r>
-              <a:t>05</a:t>
-            </a:r>
-          </a:p>
-        </p:txBody>
-      </p:sp>
-      <p:sp>
-        <p:nvSpPr>
-          <p:cNvPr id="5" name="TextBox 4"/>
-          <p:cNvSpPr txBox="1"/>
-          <p:nvPr/>
-        </p:nvSpPr>
-        <p:spPr>
-          <a:xfrm>
-            <a:off x="731520" y="1828800"/>
-            <a:ext cx="2560320" cy="640080"/>
-          </a:xfrm>
-          <a:prstGeom prst="rect">
-            <a:avLst/>
-          </a:prstGeom>
-          <a:noFill/>
-        </p:spPr>
-        <p:txBody>
-          <a:bodyPr wrap="square" lIns="0" rIns="0" tIns="0" bIns="0">
-            <a:spAutoFit/>
-          </a:bodyPr>
-          <a:lstStyle/>
-          <a:p>
-            <a:pPr>
-              <a:spcAft>
-                <a:spcPts val="1200"/>
-              </a:spcAft>
-              <a:defRPr sz="3600" b="1">
-                <a:solidFill>
-                  <a:srgbClr val="287D8D"/>
-                </a:solidFill>
-                <a:latin typeface="Microsoft YaHei"/>
-              </a:defRPr>
-            </a:pPr>
-            <a:r>
-              <a:t>01</a:t>
-            </a:r>
-          </a:p>
-        </p:txBody>
-      </p:sp>
-      <p:sp>
-        <p:nvSpPr>
-          <p:cNvPr id="6" name="TextBox 5"/>
-          <p:cNvSpPr txBox="1"/>
-          <p:nvPr/>
-        </p:nvSpPr>
-        <p:spPr>
-          <a:xfrm>
-            <a:off x="731520" y="2743200"/>
-            <a:ext cx="2560320" cy="914400"/>
-          </a:xfrm>
-          <a:prstGeom prst="rect">
-            <a:avLst/>
-          </a:prstGeom>
-          <a:noFill/>
-        </p:spPr>
-        <p:txBody>
-          <a:bodyPr wrap="square" lIns="0" rIns="0" tIns="0" bIns="0">
-            <a:spAutoFit/>
-          </a:bodyPr>
-          <a:lstStyle/>
-          <a:p>
-            <a:pPr>
-              <a:spcAft>
-                <a:spcPts val="1200"/>
-              </a:spcAft>
-              <a:defRPr sz="2200" b="1">
-                <a:solidFill>
-                  <a:srgbClr val="183343"/>
-                </a:solidFill>
-                <a:latin typeface="Microsoft YaHei"/>
-              </a:defRPr>
-            </a:pPr>
-            <a:r>
-              <a:t>初始水位过程</a:t>
-            </a:r>
-          </a:p>
-        </p:txBody>
-      </p:sp>
-      <p:sp>
-        <p:nvSpPr>
-          <p:cNvPr id="7" name="TextBox 6"/>
-          <p:cNvSpPr txBox="1"/>
-          <p:nvPr/>
-        </p:nvSpPr>
-        <p:spPr>
-          <a:xfrm>
-            <a:off x="3566160" y="1828800"/>
-            <a:ext cx="2560320" cy="640080"/>
-          </a:xfrm>
-          <a:prstGeom prst="rect">
-            <a:avLst/>
-          </a:prstGeom>
-          <a:noFill/>
-        </p:spPr>
-        <p:txBody>
-          <a:bodyPr wrap="square" lIns="0" rIns="0" tIns="0" bIns="0">
-            <a:spAutoFit/>
-          </a:bodyPr>
-          <a:lstStyle/>
-          <a:p>
-            <a:pPr>
-              <a:spcAft>
-                <a:spcPts val="1200"/>
-              </a:spcAft>
-              <a:defRPr sz="3600" b="1">
-                <a:solidFill>
-                  <a:srgbClr val="287D8D"/>
-                </a:solidFill>
-                <a:latin typeface="Microsoft YaHei"/>
-              </a:defRPr>
-            </a:pPr>
-            <a:r>
-              <a:t>02</a:t>
-            </a:r>
-          </a:p>
-        </p:txBody>
-      </p:sp>
-      <p:sp>
-        <p:nvSpPr>
-          <p:cNvPr id="8" name="TextBox 7"/>
-          <p:cNvSpPr txBox="1"/>
-          <p:nvPr/>
-        </p:nvSpPr>
-        <p:spPr>
-          <a:xfrm>
-            <a:off x="3566160" y="2743200"/>
-            <a:ext cx="2560320" cy="914400"/>
-          </a:xfrm>
-          <a:prstGeom prst="rect">
-            <a:avLst/>
-          </a:prstGeom>
-          <a:noFill/>
-        </p:spPr>
-        <p:txBody>
-          <a:bodyPr wrap="square" lIns="0" rIns="0" tIns="0" bIns="0">
-            <a:spAutoFit/>
-          </a:bodyPr>
-          <a:lstStyle/>
-          <a:p>
-            <a:pPr>
-              <a:spcAft>
-                <a:spcPts val="1200"/>
-              </a:spcAft>
-              <a:defRPr sz="2200" b="1">
-                <a:solidFill>
-                  <a:srgbClr val="183343"/>
-                </a:solidFill>
-                <a:latin typeface="Microsoft YaHei"/>
-              </a:defRPr>
-            </a:pPr>
-            <a:r>
-              <a:t>正交组合方案</a:t>
-            </a:r>
-          </a:p>
-        </p:txBody>
-      </p:sp>
-      <p:sp>
-        <p:nvSpPr>
-          <p:cNvPr id="9" name="TextBox 8"/>
-          <p:cNvSpPr txBox="1"/>
-          <p:nvPr/>
-        </p:nvSpPr>
-        <p:spPr>
-          <a:xfrm>
-            <a:off x="6400800" y="1828800"/>
-            <a:ext cx="2560320" cy="640080"/>
-          </a:xfrm>
-          <a:prstGeom prst="rect">
-            <a:avLst/>
-          </a:prstGeom>
-          <a:noFill/>
-        </p:spPr>
-        <p:txBody>
-          <a:bodyPr wrap="square" lIns="0" rIns="0" tIns="0" bIns="0">
-            <a:spAutoFit/>
-          </a:bodyPr>
-          <a:lstStyle/>
-          <a:p>
-            <a:pPr>
-              <a:spcAft>
-                <a:spcPts val="1200"/>
-              </a:spcAft>
-              <a:defRPr sz="3600" b="1">
-                <a:solidFill>
-                  <a:srgbClr val="287D8D"/>
-                </a:solidFill>
-                <a:latin typeface="Microsoft YaHei"/>
-              </a:defRPr>
-            </a:pPr>
-            <a:r>
-              <a:t>03</a:t>
-            </a:r>
-          </a:p>
-        </p:txBody>
-      </p:sp>
-      <p:sp>
-        <p:nvSpPr>
-          <p:cNvPr id="10" name="TextBox 9"/>
-          <p:cNvSpPr txBox="1"/>
-          <p:nvPr/>
-        </p:nvSpPr>
-        <p:spPr>
-          <a:xfrm>
-            <a:off x="6400800" y="2743200"/>
-            <a:ext cx="2560320" cy="914400"/>
-          </a:xfrm>
-          <a:prstGeom prst="rect">
-            <a:avLst/>
-          </a:prstGeom>
-          <a:noFill/>
-        </p:spPr>
-        <p:txBody>
-          <a:bodyPr wrap="square" lIns="0" rIns="0" tIns="0" bIns="0">
-            <a:spAutoFit/>
-          </a:bodyPr>
-          <a:lstStyle/>
-          <a:p>
-            <a:pPr>
-              <a:spcAft>
-                <a:spcPts val="1200"/>
-              </a:spcAft>
-              <a:defRPr sz="2200" b="1">
-                <a:solidFill>
-                  <a:srgbClr val="183343"/>
-                </a:solidFill>
-                <a:latin typeface="Microsoft YaHei"/>
-              </a:defRPr>
-            </a:pPr>
-            <a:r>
-              <a:t>高斯扰动候选</a:t>
-            </a:r>
-          </a:p>
-        </p:txBody>
-      </p:sp>
-      <p:sp>
-        <p:nvSpPr>
-          <p:cNvPr id="11" name="TextBox 10"/>
-          <p:cNvSpPr txBox="1"/>
-          <p:nvPr/>
-        </p:nvSpPr>
-        <p:spPr>
-          <a:xfrm>
-            <a:off x="9235440" y="1828800"/>
-            <a:ext cx="2560320" cy="640080"/>
-          </a:xfrm>
-          <a:prstGeom prst="rect">
-            <a:avLst/>
-          </a:prstGeom>
-          <a:noFill/>
-        </p:spPr>
-        <p:txBody>
-          <a:bodyPr wrap="square" lIns="0" rIns="0" tIns="0" bIns="0">
-            <a:spAutoFit/>
-          </a:bodyPr>
-          <a:lstStyle/>
-          <a:p>
-            <a:pPr>
-              <a:spcAft>
-                <a:spcPts val="1200"/>
-              </a:spcAft>
-              <a:defRPr sz="3600" b="1">
-                <a:solidFill>
-                  <a:srgbClr val="287D8D"/>
-                </a:solidFill>
-                <a:latin typeface="Microsoft YaHei"/>
-              </a:defRPr>
-            </a:pPr>
-            <a:r>
-              <a:t>04</a:t>
-            </a:r>
-          </a:p>
-        </p:txBody>
-      </p:sp>
-      <p:sp>
-        <p:nvSpPr>
-          <p:cNvPr id="12" name="TextBox 11"/>
-          <p:cNvSpPr txBox="1"/>
-          <p:nvPr/>
-        </p:nvSpPr>
-        <p:spPr>
-          <a:xfrm>
-            <a:off x="9235440" y="2743200"/>
-            <a:ext cx="2560320" cy="914400"/>
-          </a:xfrm>
-          <a:prstGeom prst="rect">
-            <a:avLst/>
-          </a:prstGeom>
-          <a:noFill/>
-        </p:spPr>
-        <p:txBody>
-          <a:bodyPr wrap="square" lIns="0" rIns="0" tIns="0" bIns="0">
-            <a:spAutoFit/>
-          </a:bodyPr>
-          <a:lstStyle/>
-          <a:p>
-            <a:pPr>
-              <a:spcAft>
-                <a:spcPts val="1200"/>
-              </a:spcAft>
-              <a:defRPr sz="2200" b="1">
-                <a:solidFill>
-                  <a:srgbClr val="183343"/>
-                </a:solidFill>
-                <a:latin typeface="Microsoft YaHei"/>
-              </a:defRPr>
-            </a:pPr>
-            <a:r>
-              <a:t>动态规划选优</a:t>
-            </a:r>
-          </a:p>
-        </p:txBody>
-      </p:sp>
-      <p:sp>
-        <p:nvSpPr>
-          <p:cNvPr id="13" name="TextBox 12"/>
-          <p:cNvSpPr txBox="1"/>
-          <p:nvPr/>
-        </p:nvSpPr>
-        <p:spPr>
-          <a:xfrm>
-            <a:off x="777240" y="4206240"/>
-            <a:ext cx="10515600" cy="822960"/>
-          </a:xfrm>
-          <a:prstGeom prst="rect">
-            <a:avLst/>
-          </a:prstGeom>
-          <a:noFill/>
-        </p:spPr>
-        <p:txBody>
-          <a:bodyPr wrap="square" lIns="0" rIns="0" tIns="0" bIns="0">
-            <a:spAutoFit/>
-          </a:bodyPr>
-          <a:lstStyle/>
-          <a:p>
-            <a:pPr>
-              <a:spcAft>
-                <a:spcPts val="1200"/>
-              </a:spcAft>
-              <a:defRPr sz="2200" b="0">
-                <a:solidFill>
-                  <a:srgbClr val="183343"/>
-                </a:solidFill>
-                <a:latin typeface="Microsoft YaHei"/>
-              </a:defRPr>
-            </a:pPr>
-            <a:r>
-              <a:t>更新当前方案，重复候选生成与动态规划，直至最大迭代次数。</a:t>
-            </a:r>
-          </a:p>
-        </p:txBody>
-      </p:sp>
-      <p:sp>
-        <p:nvSpPr>
-          <p:cNvPr id="14" name="TextBox 13"/>
-          <p:cNvSpPr txBox="1"/>
-          <p:nvPr/>
-        </p:nvSpPr>
-        <p:spPr>
-          <a:xfrm>
-            <a:off x="640080" y="5715000"/>
-            <a:ext cx="10881360" cy="502920"/>
-          </a:xfrm>
-          <a:prstGeom prst="rect">
-            <a:avLst/>
-          </a:prstGeom>
-          <a:noFill/>
-        </p:spPr>
-        <p:txBody>
-          <a:bodyPr wrap="square" lIns="0" rIns="0" tIns="0" bIns="0">
-            <a:spAutoFit/>
-          </a:bodyPr>
-          <a:lstStyle/>
-          <a:p>
-            <a:pPr>
-              <a:spcAft>
-                <a:spcPts val="1200"/>
-              </a:spcAft>
-              <a:defRPr sz="1900" b="1">
-                <a:solidFill>
-                  <a:srgbClr val="287D8D"/>
-                </a:solidFill>
-                <a:latin typeface="Microsoft YaHei"/>
-              </a:defRPr>
-            </a:pPr>
-            <a:r>
-              <a:t>标准差随余弦平方变化，控制每轮搜索范围。</a:t>
-            </a:r>
-          </a:p>
-        </p:txBody>
-      </p:sp>
-    </p:spTree>
-  </p:cSld>
-  <p:clrMapOvr>
-    <a:masterClrMapping/>
-  </p:clrMapOvr>
-</p:sld>
-</file>
-
-<file path=ppt/slides/slide6.xml><?xml version="1.0" encoding="utf-8"?>
-<p:sld xmlns:a="http://schemas.openxmlformats.org/drawingml/2006/main" xmlns:p="http://schemas.openxmlformats.org/presentationml/2006/main" xmlns:r="http://schemas.openxmlformats.org/officeDocument/2006/relationships">
-  <p:cSld>
-    <p:bg>
-      <p:bgPr>
-        <a:solidFill>
-          <a:srgbClr val="FFFFFF"/>
-        </a:solidFill>
-        <a:effectLst/>
-      </p:bgPr>
-    </p:bg>
-    <p:spTree>
-      <p:nvGrpSpPr>
-        <p:cNvPr id="1" name=""/>
-        <p:cNvGrpSpPr/>
-        <p:nvPr/>
-      </p:nvGrpSpPr>
-      <p:grpSpPr/>
-      <p:sp>
-        <p:nvSpPr>
-          <p:cNvPr id="2" name="TextBox 1"/>
-          <p:cNvSpPr txBox="1"/>
-          <p:nvPr/>
-        </p:nvSpPr>
-        <p:spPr>
-          <a:xfrm>
-            <a:off x="594360" y="411480"/>
-            <a:ext cx="10972800" cy="914400"/>
-          </a:xfrm>
-          <a:prstGeom prst="rect">
-            <a:avLst/>
-          </a:prstGeom>
-          <a:noFill/>
-        </p:spPr>
-        <p:txBody>
-          <a:bodyPr wrap="square" lIns="0" rIns="0" tIns="0" bIns="0">
-            <a:spAutoFit/>
-          </a:bodyPr>
-          <a:lstStyle/>
-          <a:p>
-            <a:pPr>
-              <a:spcAft>
-                <a:spcPts val="1200"/>
-              </a:spcAft>
-              <a:defRPr sz="2800" b="1">
-                <a:solidFill>
-                  <a:srgbClr val="183343"/>
-                </a:solidFill>
-                <a:latin typeface="Microsoft YaHei"/>
-              </a:defRPr>
-            </a:pPr>
-            <a:r>
-              <a:t>验证从二维函数延伸到真实水库群</a:t>
-            </a:r>
-          </a:p>
-        </p:txBody>
-      </p:sp>
-      <p:sp>
-        <p:nvSpPr>
-          <p:cNvPr id="3" name="TextBox 2"/>
-          <p:cNvSpPr txBox="1"/>
-          <p:nvPr/>
-        </p:nvSpPr>
-        <p:spPr>
-          <a:xfrm>
-            <a:off x="594360" y="6455664"/>
-            <a:ext cx="10515600" cy="228600"/>
-          </a:xfrm>
-          <a:prstGeom prst="rect">
-            <a:avLst/>
-          </a:prstGeom>
-          <a:noFill/>
-        </p:spPr>
-        <p:txBody>
-          <a:bodyPr wrap="square" lIns="0" rIns="0" tIns="0" bIns="0">
-            <a:spAutoFit/>
-          </a:bodyPr>
-          <a:lstStyle/>
-          <a:p>
-            <a:pPr>
-              <a:spcAft>
-                <a:spcPts val="1200"/>
-              </a:spcAft>
-              <a:defRPr sz="900" b="0">
-                <a:solidFill>
-                  <a:srgbClr val="576774"/>
-                </a:solidFill>
-                <a:latin typeface="Microsoft YaHei"/>
-              </a:defRPr>
-            </a:pPr>
-            <a:r>
-              <a:t>依据：第3.4节、第5节</a:t>
-            </a:r>
-          </a:p>
-        </p:txBody>
-      </p:sp>
-      <p:sp>
-        <p:nvSpPr>
-          <p:cNvPr id="4" name="TextBox 3"/>
-          <p:cNvSpPr txBox="1"/>
-          <p:nvPr/>
-        </p:nvSpPr>
-        <p:spPr>
-          <a:xfrm>
-            <a:off x="11109960" y="6428232"/>
-            <a:ext cx="457200" cy="274320"/>
-          </a:xfrm>
-          <a:prstGeom prst="rect">
-            <a:avLst/>
-          </a:prstGeom>
-          <a:noFill/>
-        </p:spPr>
-        <p:txBody>
-          <a:bodyPr wrap="square" lIns="0" rIns="0" tIns="0" bIns="0">
-            <a:spAutoFit/>
-          </a:bodyPr>
-          <a:lstStyle/>
-          <a:p>
-            <a:pPr>
-              <a:spcAft>
-                <a:spcPts val="1200"/>
-              </a:spcAft>
-              <a:defRPr sz="1000" b="0">
-                <a:solidFill>
-                  <a:srgbClr val="576774"/>
-                </a:solidFill>
-                <a:latin typeface="Microsoft YaHei"/>
-              </a:defRPr>
-            </a:pPr>
-            <a:r>
-              <a:t>06</a:t>
             </a:r>
           </a:p>
         </p:txBody>
@@ -7896,7 +8080,7 @@
                         </a:defRPr>
                       </a:pPr>
                       <a:r>
-                        <a:t>验证对象</a:t>
+                        <a:t>目标或约束</a:t>
                       </a:r>
                     </a:p>
                   </a:txBody>
@@ -7906,6 +8090,2530 @@
                     </a:solidFill>
                   </a:tcPr>
                 </a:tc>
+                <a:tc>
+                  <a:txBody>
+                    <a:bodyPr/>
+                    <a:lstStyle/>
+                    <a:p>
+                      <a:pPr>
+                        <a:defRPr sz="1700">
+                          <a:solidFill>
+                            <a:srgbClr val="FFFFFF"/>
+                          </a:solidFill>
+                          <a:latin typeface="Microsoft YaHei"/>
+                        </a:defRPr>
+                      </a:pPr>
+                      <a:r>
+                        <a:t>模型处理</a:t>
+                      </a:r>
+                    </a:p>
+                  </a:txBody>
+                  <a:tcPr>
+                    <a:solidFill>
+                      <a:srgbClr val="287D8D"/>
+                    </a:solidFill>
+                  </a:tcPr>
+                </a:tc>
+                <a:tc>
+                  <a:txBody>
+                    <a:bodyPr/>
+                    <a:lstStyle/>
+                    <a:p>
+                      <a:pPr>
+                        <a:defRPr sz="1700">
+                          <a:solidFill>
+                            <a:srgbClr val="FFFFFF"/>
+                          </a:solidFill>
+                          <a:latin typeface="Microsoft YaHei"/>
+                        </a:defRPr>
+                      </a:pPr>
+                      <a:r>
+                        <a:t>方向</a:t>
+                      </a:r>
+                    </a:p>
+                  </a:txBody>
+                  <a:tcPr>
+                    <a:solidFill>
+                      <a:srgbClr val="287D8D"/>
+                    </a:solidFill>
+                  </a:tcPr>
+                </a:tc>
+              </a:tr>
+              <a:tr h="621792">
+                <a:tc>
+                  <a:txBody>
+                    <a:bodyPr/>
+                    <a:lstStyle/>
+                    <a:p>
+                      <a:pPr>
+                        <a:defRPr sz="1700">
+                          <a:solidFill>
+                            <a:srgbClr val="183343"/>
+                          </a:solidFill>
+                          <a:latin typeface="Microsoft YaHei"/>
+                        </a:defRPr>
+                      </a:pPr>
+                      <a:r>
+                        <a:t>上游防洪</a:t>
+                      </a:r>
+                    </a:p>
+                  </a:txBody>
+                  <a:tcPr>
+                    <a:solidFill>
+                      <a:srgbClr val="F0F5F7"/>
+                    </a:solidFill>
+                  </a:tcPr>
+                </a:tc>
+                <a:tc>
+                  <a:txBody>
+                    <a:bodyPr/>
+                    <a:lstStyle/>
+                    <a:p>
+                      <a:pPr>
+                        <a:defRPr sz="1700">
+                          <a:solidFill>
+                            <a:srgbClr val="183343"/>
+                          </a:solidFill>
+                          <a:latin typeface="Microsoft YaHei"/>
+                        </a:defRPr>
+                      </a:pPr>
+                      <a:r>
+                        <a:t>调度期最高水位</a:t>
+                      </a:r>
+                    </a:p>
+                  </a:txBody>
+                  <a:tcPr>
+                    <a:solidFill>
+                      <a:srgbClr val="F0F5F7"/>
+                    </a:solidFill>
+                  </a:tcPr>
+                </a:tc>
+                <a:tc>
+                  <a:txBody>
+                    <a:bodyPr/>
+                    <a:lstStyle/>
+                    <a:p>
+                      <a:pPr>
+                        <a:defRPr sz="1700">
+                          <a:solidFill>
+                            <a:srgbClr val="183343"/>
+                          </a:solidFill>
+                          <a:latin typeface="Microsoft YaHei"/>
+                        </a:defRPr>
+                      </a:pPr>
+                      <a:r>
+                        <a:t>最小化</a:t>
+                      </a:r>
+                    </a:p>
+                  </a:txBody>
+                  <a:tcPr>
+                    <a:solidFill>
+                      <a:srgbClr val="F0F5F7"/>
+                    </a:solidFill>
+                  </a:tcPr>
+                </a:tc>
+              </a:tr>
+              <a:tr h="621792">
+                <a:tc>
+                  <a:txBody>
+                    <a:bodyPr/>
+                    <a:lstStyle/>
+                    <a:p>
+                      <a:pPr>
+                        <a:defRPr sz="1700">
+                          <a:solidFill>
+                            <a:srgbClr val="183343"/>
+                          </a:solidFill>
+                          <a:latin typeface="Microsoft YaHei"/>
+                        </a:defRPr>
+                      </a:pPr>
+                      <a:r>
+                        <a:t>下游防洪</a:t>
+                      </a:r>
+                    </a:p>
+                  </a:txBody>
+                  <a:tcPr>
+                    <a:solidFill>
+                      <a:srgbClr val="FFFFFF"/>
+                    </a:solidFill>
+                  </a:tcPr>
+                </a:tc>
+                <a:tc>
+                  <a:txBody>
+                    <a:bodyPr/>
+                    <a:lstStyle/>
+                    <a:p>
+                      <a:pPr>
+                        <a:defRPr sz="1700">
+                          <a:solidFill>
+                            <a:srgbClr val="183343"/>
+                          </a:solidFill>
+                          <a:latin typeface="Microsoft YaHei"/>
+                        </a:defRPr>
+                      </a:pPr>
+                      <a:r>
+                        <a:t>调度期最大下泄流量</a:t>
+                      </a:r>
+                    </a:p>
+                  </a:txBody>
+                  <a:tcPr>
+                    <a:solidFill>
+                      <a:srgbClr val="FFFFFF"/>
+                    </a:solidFill>
+                  </a:tcPr>
+                </a:tc>
+                <a:tc>
+                  <a:txBody>
+                    <a:bodyPr/>
+                    <a:lstStyle/>
+                    <a:p>
+                      <a:pPr>
+                        <a:defRPr sz="1700">
+                          <a:solidFill>
+                            <a:srgbClr val="183343"/>
+                          </a:solidFill>
+                          <a:latin typeface="Microsoft YaHei"/>
+                        </a:defRPr>
+                      </a:pPr>
+                      <a:r>
+                        <a:t>最小化</a:t>
+                      </a:r>
+                    </a:p>
+                  </a:txBody>
+                  <a:tcPr>
+                    <a:solidFill>
+                      <a:srgbClr val="FFFFFF"/>
+                    </a:solidFill>
+                  </a:tcPr>
+                </a:tc>
+              </a:tr>
+              <a:tr h="621792">
+                <a:tc>
+                  <a:txBody>
+                    <a:bodyPr/>
+                    <a:lstStyle/>
+                    <a:p>
+                      <a:pPr>
+                        <a:defRPr sz="1700">
+                          <a:solidFill>
+                            <a:srgbClr val="183343"/>
+                          </a:solidFill>
+                          <a:latin typeface="Microsoft YaHei"/>
+                        </a:defRPr>
+                      </a:pPr>
+                      <a:r>
+                        <a:t>发电效益</a:t>
+                      </a:r>
+                    </a:p>
+                  </a:txBody>
+                  <a:tcPr>
+                    <a:solidFill>
+                      <a:srgbClr val="F0F5F7"/>
+                    </a:solidFill>
+                  </a:tcPr>
+                </a:tc>
+                <a:tc>
+                  <a:txBody>
+                    <a:bodyPr/>
+                    <a:lstStyle/>
+                    <a:p>
+                      <a:pPr>
+                        <a:defRPr sz="1700">
+                          <a:solidFill>
+                            <a:srgbClr val="183343"/>
+                          </a:solidFill>
+                          <a:latin typeface="Microsoft YaHei"/>
+                        </a:defRPr>
+                      </a:pPr>
+                      <a:r>
+                        <a:t>梯级总发电量</a:t>
+                      </a:r>
+                    </a:p>
+                  </a:txBody>
+                  <a:tcPr>
+                    <a:solidFill>
+                      <a:srgbClr val="F0F5F7"/>
+                    </a:solidFill>
+                  </a:tcPr>
+                </a:tc>
+                <a:tc>
+                  <a:txBody>
+                    <a:bodyPr/>
+                    <a:lstStyle/>
+                    <a:p>
+                      <a:pPr>
+                        <a:defRPr sz="1700">
+                          <a:solidFill>
+                            <a:srgbClr val="183343"/>
+                          </a:solidFill>
+                          <a:latin typeface="Microsoft YaHei"/>
+                        </a:defRPr>
+                      </a:pPr>
+                      <a:r>
+                        <a:t>最大化</a:t>
+                      </a:r>
+                    </a:p>
+                  </a:txBody>
+                  <a:tcPr>
+                    <a:solidFill>
+                      <a:srgbClr val="F0F5F7"/>
+                    </a:solidFill>
+                  </a:tcPr>
+                </a:tc>
+              </a:tr>
+              <a:tr h="621792">
+                <a:tc>
+                  <a:txBody>
+                    <a:bodyPr/>
+                    <a:lstStyle/>
+                    <a:p>
+                      <a:pPr>
+                        <a:defRPr sz="1700">
+                          <a:solidFill>
+                            <a:srgbClr val="183343"/>
+                          </a:solidFill>
+                          <a:latin typeface="Microsoft YaHei"/>
+                        </a:defRPr>
+                      </a:pPr>
+                      <a:r>
+                        <a:t>生态需求</a:t>
+                      </a:r>
+                    </a:p>
+                  </a:txBody>
+                  <a:tcPr>
+                    <a:solidFill>
+                      <a:srgbClr val="FFFFFF"/>
+                    </a:solidFill>
+                  </a:tcPr>
+                </a:tc>
+                <a:tc>
+                  <a:txBody>
+                    <a:bodyPr/>
+                    <a:lstStyle/>
+                    <a:p>
+                      <a:pPr>
+                        <a:defRPr sz="1700">
+                          <a:solidFill>
+                            <a:srgbClr val="183343"/>
+                          </a:solidFill>
+                          <a:latin typeface="Microsoft YaHei"/>
+                        </a:defRPr>
+                      </a:pPr>
+                      <a:r>
+                        <a:t>最小生态下泄流量</a:t>
+                      </a:r>
+                    </a:p>
+                  </a:txBody>
+                  <a:tcPr>
+                    <a:solidFill>
+                      <a:srgbClr val="FFFFFF"/>
+                    </a:solidFill>
+                  </a:tcPr>
+                </a:tc>
+                <a:tc>
+                  <a:txBody>
+                    <a:bodyPr/>
+                    <a:lstStyle/>
+                    <a:p>
+                      <a:pPr>
+                        <a:defRPr sz="1700">
+                          <a:solidFill>
+                            <a:srgbClr val="183343"/>
+                          </a:solidFill>
+                          <a:latin typeface="Microsoft YaHei"/>
+                        </a:defRPr>
+                      </a:pPr>
+                      <a:r>
+                        <a:t>作为约束</a:t>
+                      </a:r>
+                    </a:p>
+                  </a:txBody>
+                  <a:tcPr>
+                    <a:solidFill>
+                      <a:srgbClr val="FFFFFF"/>
+                    </a:solidFill>
+                  </a:tcPr>
+                </a:tc>
+              </a:tr>
+            </a:tbl>
+          </a:graphicData>
+        </a:graphic>
+      </p:graphicFrame>
+      <p:sp>
+        <p:nvSpPr>
+          <p:cNvPr id="6" name="TextBox 5"/>
+          <p:cNvSpPr txBox="1"/>
+          <p:nvPr/>
+        </p:nvSpPr>
+        <p:spPr>
+          <a:xfrm>
+            <a:off x="640080" y="5715000"/>
+            <a:ext cx="10881360" cy="502920"/>
+          </a:xfrm>
+          <a:prstGeom prst="rect">
+            <a:avLst/>
+          </a:prstGeom>
+          <a:noFill/>
+        </p:spPr>
+        <p:txBody>
+          <a:bodyPr wrap="square" lIns="0" rIns="0" tIns="0" bIns="0">
+            <a:spAutoFit/>
+          </a:bodyPr>
+          <a:lstStyle/>
+          <a:p>
+            <a:pPr>
+              <a:spcAft>
+                <a:spcPts val="1200"/>
+              </a:spcAft>
+              <a:defRPr sz="1900" b="1">
+                <a:solidFill>
+                  <a:srgbClr val="287D8D"/>
+                </a:solidFill>
+                <a:latin typeface="Microsoft YaHei"/>
+              </a:defRPr>
+            </a:pPr>
+            <a:r>
+              <a:t>水量平衡、水位、流量、出力和上下游联系共同限制可行域。</a:t>
+            </a:r>
+          </a:p>
+        </p:txBody>
+      </p:sp>
+    </p:spTree>
+  </p:cSld>
+  <p:clrMapOvr>
+    <a:masterClrMapping/>
+  </p:clrMapOvr>
+</p:sld>
+</file>
+
+<file path=ppt/slides/slide4.xml><?xml version="1.0" encoding="utf-8"?>
+<p:sld xmlns:a="http://schemas.openxmlformats.org/drawingml/2006/main" xmlns:p="http://schemas.openxmlformats.org/presentationml/2006/main" xmlns:r="http://schemas.openxmlformats.org/officeDocument/2006/relationships">
+  <p:cSld>
+    <p:bg>
+      <p:bgPr>
+        <a:solidFill>
+          <a:srgbClr val="FFFFFF"/>
+        </a:solidFill>
+        <a:effectLst/>
+      </p:bgPr>
+    </p:bg>
+    <p:spTree>
+      <p:nvGrpSpPr>
+        <p:cNvPr id="1" name=""/>
+        <p:cNvGrpSpPr/>
+        <p:nvPr/>
+      </p:nvGrpSpPr>
+      <p:grpSpPr/>
+      <p:sp>
+        <p:nvSpPr>
+          <p:cNvPr id="2" name="TextBox 1"/>
+          <p:cNvSpPr txBox="1"/>
+          <p:nvPr/>
+        </p:nvSpPr>
+        <p:spPr>
+          <a:xfrm>
+            <a:off x="594360" y="411480"/>
+            <a:ext cx="10972800" cy="914400"/>
+          </a:xfrm>
+          <a:prstGeom prst="rect">
+            <a:avLst/>
+          </a:prstGeom>
+          <a:noFill/>
+        </p:spPr>
+        <p:txBody>
+          <a:bodyPr wrap="square" lIns="0" rIns="0" tIns="0" bIns="0">
+            <a:spAutoFit/>
+          </a:bodyPr>
+          <a:lstStyle/>
+          <a:p>
+            <a:pPr>
+              <a:spcAft>
+                <a:spcPts val="1200"/>
+              </a:spcAft>
+              <a:defRPr sz="2800" b="1">
+                <a:solidFill>
+                  <a:srgbClr val="183343"/>
+                </a:solidFill>
+                <a:latin typeface="Microsoft YaHei"/>
+              </a:defRPr>
+            </a:pPr>
+            <a:r>
+              <a:t>异常蓄泄过程会产生虚假的目标优势</a:t>
+            </a:r>
+          </a:p>
+        </p:txBody>
+      </p:sp>
+      <p:sp>
+        <p:nvSpPr>
+          <p:cNvPr id="3" name="TextBox 2"/>
+          <p:cNvSpPr txBox="1"/>
+          <p:nvPr/>
+        </p:nvSpPr>
+        <p:spPr>
+          <a:xfrm>
+            <a:off x="594360" y="6455664"/>
+            <a:ext cx="10515600" cy="228600"/>
+          </a:xfrm>
+          <a:prstGeom prst="rect">
+            <a:avLst/>
+          </a:prstGeom>
+          <a:noFill/>
+        </p:spPr>
+        <p:txBody>
+          <a:bodyPr wrap="square" lIns="0" rIns="0" tIns="0" bIns="0">
+            <a:spAutoFit/>
+          </a:bodyPr>
+          <a:lstStyle/>
+          <a:p>
+            <a:pPr>
+              <a:spcAft>
+                <a:spcPts val="1200"/>
+              </a:spcAft>
+              <a:defRPr sz="900" b="0">
+                <a:solidFill>
+                  <a:srgbClr val="576774"/>
+                </a:solidFill>
+                <a:latin typeface="Microsoft YaHei"/>
+              </a:defRPr>
+            </a:pPr>
+            <a:r>
+              <a:t>依据：第2.1节，原文图1</a:t>
+            </a:r>
+          </a:p>
+        </p:txBody>
+      </p:sp>
+      <p:sp>
+        <p:nvSpPr>
+          <p:cNvPr id="4" name="TextBox 3"/>
+          <p:cNvSpPr txBox="1"/>
+          <p:nvPr/>
+        </p:nvSpPr>
+        <p:spPr>
+          <a:xfrm>
+            <a:off x="11109960" y="6428232"/>
+            <a:ext cx="457200" cy="274320"/>
+          </a:xfrm>
+          <a:prstGeom prst="rect">
+            <a:avLst/>
+          </a:prstGeom>
+          <a:noFill/>
+        </p:spPr>
+        <p:txBody>
+          <a:bodyPr wrap="square" lIns="0" rIns="0" tIns="0" bIns="0">
+            <a:spAutoFit/>
+          </a:bodyPr>
+          <a:lstStyle/>
+          <a:p>
+            <a:pPr>
+              <a:spcAft>
+                <a:spcPts val="1200"/>
+              </a:spcAft>
+              <a:defRPr sz="1000" b="0">
+                <a:solidFill>
+                  <a:srgbClr val="576774"/>
+                </a:solidFill>
+                <a:latin typeface="Microsoft YaHei"/>
+              </a:defRPr>
+            </a:pPr>
+            <a:r>
+              <a:t>04</a:t>
+            </a:r>
+          </a:p>
+        </p:txBody>
+      </p:sp>
+      <p:pic>
+        <p:nvPicPr>
+          <p:cNvPr id="5" name="Picture 4" descr="fig1.png"/>
+          <p:cNvPicPr>
+            <a:picLocks noChangeAspect="1"/>
+          </p:cNvPicPr>
+          <p:nvPr/>
+        </p:nvPicPr>
+        <p:blipFill>
+          <a:blip r:embed="rId3"/>
+          <a:stretch>
+            <a:fillRect/>
+          </a:stretch>
+        </p:blipFill>
+        <p:spPr>
+          <a:xfrm>
+            <a:off x="1194598" y="1463040"/>
+            <a:ext cx="6571923" cy="3931920"/>
+          </a:xfrm>
+          <a:prstGeom prst="rect">
+            <a:avLst/>
+          </a:prstGeom>
+        </p:spPr>
+      </p:pic>
+      <p:sp>
+        <p:nvSpPr>
+          <p:cNvPr id="6" name="TextBox 5"/>
+          <p:cNvSpPr txBox="1"/>
+          <p:nvPr/>
+        </p:nvSpPr>
+        <p:spPr>
+          <a:xfrm>
+            <a:off x="8549640" y="1828800"/>
+            <a:ext cx="2834640" cy="2743200"/>
+          </a:xfrm>
+          <a:prstGeom prst="rect">
+            <a:avLst/>
+          </a:prstGeom>
+          <a:noFill/>
+        </p:spPr>
+        <p:txBody>
+          <a:bodyPr wrap="square" lIns="0" rIns="0" tIns="0" bIns="0">
+            <a:spAutoFit/>
+          </a:bodyPr>
+          <a:lstStyle/>
+          <a:p>
+            <a:pPr>
+              <a:spcAft>
+                <a:spcPts val="1200"/>
+              </a:spcAft>
+              <a:defRPr sz="2000" b="0">
+                <a:solidFill>
+                  <a:srgbClr val="183343"/>
+                </a:solidFill>
+                <a:latin typeface="Microsoft YaHei"/>
+              </a:defRPr>
+            </a:pPr>
+            <a:r>
+              <a:t>不可行时段</a:t>
+            </a:r>
+          </a:p>
+          <a:p>
+            <a:pPr>
+              <a:spcAft>
+                <a:spcPts val="1200"/>
+              </a:spcAft>
+              <a:defRPr sz="2000" b="0">
+                <a:solidFill>
+                  <a:srgbClr val="183343"/>
+                </a:solidFill>
+                <a:latin typeface="Microsoft YaHei"/>
+              </a:defRPr>
+            </a:pPr>
+            <a:r>
+              <a:t>影响相邻时段收益</a:t>
+            </a:r>
+          </a:p>
+          <a:p>
+            <a:pPr>
+              <a:spcAft>
+                <a:spcPts val="1200"/>
+              </a:spcAft>
+              <a:defRPr sz="2000" b="0">
+                <a:solidFill>
+                  <a:srgbClr val="183343"/>
+                </a:solidFill>
+                <a:latin typeface="Microsoft YaHei"/>
+              </a:defRPr>
+            </a:pPr>
+          </a:p>
+          <a:p>
+            <a:pPr>
+              <a:spcAft>
+                <a:spcPts val="1200"/>
+              </a:spcAft>
+              <a:defRPr sz="2000" b="0">
+                <a:solidFill>
+                  <a:srgbClr val="183343"/>
+                </a:solidFill>
+                <a:latin typeface="Microsoft YaHei"/>
+              </a:defRPr>
+            </a:pPr>
+            <a:r>
+              <a:t>仅比较目标值</a:t>
+            </a:r>
+          </a:p>
+          <a:p>
+            <a:pPr>
+              <a:spcAft>
+                <a:spcPts val="1200"/>
+              </a:spcAft>
+              <a:defRPr sz="2000" b="0">
+                <a:solidFill>
+                  <a:srgbClr val="183343"/>
+                </a:solidFill>
+                <a:latin typeface="Microsoft YaHei"/>
+              </a:defRPr>
+            </a:pPr>
+            <a:r>
+              <a:t>可能误判解的质量</a:t>
+            </a:r>
+          </a:p>
+        </p:txBody>
+      </p:sp>
+      <p:sp>
+        <p:nvSpPr>
+          <p:cNvPr id="7" name="TextBox 6"/>
+          <p:cNvSpPr txBox="1"/>
+          <p:nvPr/>
+        </p:nvSpPr>
+        <p:spPr>
+          <a:xfrm>
+            <a:off x="640080" y="5715000"/>
+            <a:ext cx="10881360" cy="502920"/>
+          </a:xfrm>
+          <a:prstGeom prst="rect">
+            <a:avLst/>
+          </a:prstGeom>
+          <a:noFill/>
+        </p:spPr>
+        <p:txBody>
+          <a:bodyPr wrap="square" lIns="0" rIns="0" tIns="0" bIns="0">
+            <a:spAutoFit/>
+          </a:bodyPr>
+          <a:lstStyle/>
+          <a:p>
+            <a:pPr>
+              <a:spcAft>
+                <a:spcPts val="1200"/>
+              </a:spcAft>
+              <a:defRPr sz="1900" b="1">
+                <a:solidFill>
+                  <a:srgbClr val="287D8D"/>
+                </a:solidFill>
+                <a:latin typeface="Microsoft YaHei"/>
+              </a:defRPr>
+            </a:pPr>
+            <a:r>
+              <a:t>算法需要识别目标值中由约束破坏造成的虚假成分。</a:t>
+            </a:r>
+          </a:p>
+        </p:txBody>
+      </p:sp>
+    </p:spTree>
+  </p:cSld>
+  <p:clrMapOvr>
+    <a:masterClrMapping/>
+  </p:clrMapOvr>
+</p:sld>
+</file>
+
+<file path=ppt/slides/slide5.xml><?xml version="1.0" encoding="utf-8"?>
+<p:sld xmlns:a="http://schemas.openxmlformats.org/drawingml/2006/main" xmlns:p="http://schemas.openxmlformats.org/presentationml/2006/main" xmlns:r="http://schemas.openxmlformats.org/officeDocument/2006/relationships">
+  <p:cSld>
+    <p:bg>
+      <p:bgPr>
+        <a:solidFill>
+          <a:srgbClr val="FFFFFF"/>
+        </a:solidFill>
+        <a:effectLst/>
+      </p:bgPr>
+    </p:bg>
+    <p:spTree>
+      <p:nvGrpSpPr>
+        <p:cNvPr id="1" name=""/>
+        <p:cNvGrpSpPr/>
+        <p:nvPr/>
+      </p:nvGrpSpPr>
+      <p:grpSpPr/>
+      <p:sp>
+        <p:nvSpPr>
+          <p:cNvPr id="2" name="TextBox 1"/>
+          <p:cNvSpPr txBox="1"/>
+          <p:nvPr/>
+        </p:nvSpPr>
+        <p:spPr>
+          <a:xfrm>
+            <a:off x="594360" y="411480"/>
+            <a:ext cx="10972800" cy="914400"/>
+          </a:xfrm>
+          <a:prstGeom prst="rect">
+            <a:avLst/>
+          </a:prstGeom>
+          <a:noFill/>
+        </p:spPr>
+        <p:txBody>
+          <a:bodyPr wrap="square" lIns="0" rIns="0" tIns="0" bIns="0">
+            <a:spAutoFit/>
+          </a:bodyPr>
+          <a:lstStyle/>
+          <a:p>
+            <a:pPr>
+              <a:spcAft>
+                <a:spcPts val="1200"/>
+              </a:spcAft>
+              <a:defRPr sz="2800" b="1">
+                <a:solidFill>
+                  <a:srgbClr val="183343"/>
+                </a:solidFill>
+                <a:latin typeface="Microsoft YaHei"/>
+              </a:defRPr>
+            </a:pPr>
+            <a:r>
+              <a:t>参考目标值利用近似修复过程评价解</a:t>
+            </a:r>
+          </a:p>
+        </p:txBody>
+      </p:sp>
+      <p:sp>
+        <p:nvSpPr>
+          <p:cNvPr id="3" name="TextBox 2"/>
+          <p:cNvSpPr txBox="1"/>
+          <p:nvPr/>
+        </p:nvSpPr>
+        <p:spPr>
+          <a:xfrm>
+            <a:off x="594360" y="6455664"/>
+            <a:ext cx="10515600" cy="228600"/>
+          </a:xfrm>
+          <a:prstGeom prst="rect">
+            <a:avLst/>
+          </a:prstGeom>
+          <a:noFill/>
+        </p:spPr>
+        <p:txBody>
+          <a:bodyPr wrap="square" lIns="0" rIns="0" tIns="0" bIns="0">
+            <a:spAutoFit/>
+          </a:bodyPr>
+          <a:lstStyle/>
+          <a:p>
+            <a:pPr>
+              <a:spcAft>
+                <a:spcPts val="1200"/>
+              </a:spcAft>
+              <a:defRPr sz="900" b="0">
+                <a:solidFill>
+                  <a:srgbClr val="576774"/>
+                </a:solidFill>
+                <a:latin typeface="Microsoft YaHei"/>
+              </a:defRPr>
+            </a:pPr>
+            <a:r>
+              <a:t>依据：第2.2.1节，原文图2</a:t>
+            </a:r>
+          </a:p>
+        </p:txBody>
+      </p:sp>
+      <p:sp>
+        <p:nvSpPr>
+          <p:cNvPr id="4" name="TextBox 3"/>
+          <p:cNvSpPr txBox="1"/>
+          <p:nvPr/>
+        </p:nvSpPr>
+        <p:spPr>
+          <a:xfrm>
+            <a:off x="11109960" y="6428232"/>
+            <a:ext cx="457200" cy="274320"/>
+          </a:xfrm>
+          <a:prstGeom prst="rect">
+            <a:avLst/>
+          </a:prstGeom>
+          <a:noFill/>
+        </p:spPr>
+        <p:txBody>
+          <a:bodyPr wrap="square" lIns="0" rIns="0" tIns="0" bIns="0">
+            <a:spAutoFit/>
+          </a:bodyPr>
+          <a:lstStyle/>
+          <a:p>
+            <a:pPr>
+              <a:spcAft>
+                <a:spcPts val="1200"/>
+              </a:spcAft>
+              <a:defRPr sz="1000" b="0">
+                <a:solidFill>
+                  <a:srgbClr val="576774"/>
+                </a:solidFill>
+                <a:latin typeface="Microsoft YaHei"/>
+              </a:defRPr>
+            </a:pPr>
+            <a:r>
+              <a:t>05</a:t>
+            </a:r>
+          </a:p>
+        </p:txBody>
+      </p:sp>
+      <p:pic>
+        <p:nvPicPr>
+          <p:cNvPr id="5" name="Picture 4" descr="fig2.png"/>
+          <p:cNvPicPr>
+            <a:picLocks noChangeAspect="1"/>
+          </p:cNvPicPr>
+          <p:nvPr/>
+        </p:nvPicPr>
+        <p:blipFill>
+          <a:blip r:embed="rId3"/>
+          <a:stretch>
+            <a:fillRect/>
+          </a:stretch>
+        </p:blipFill>
+        <p:spPr>
+          <a:xfrm>
+            <a:off x="1217902" y="1463040"/>
+            <a:ext cx="6525314" cy="3931920"/>
+          </a:xfrm>
+          <a:prstGeom prst="rect">
+            <a:avLst/>
+          </a:prstGeom>
+        </p:spPr>
+      </p:pic>
+      <p:sp>
+        <p:nvSpPr>
+          <p:cNvPr id="6" name="TextBox 5"/>
+          <p:cNvSpPr txBox="1"/>
+          <p:nvPr/>
+        </p:nvSpPr>
+        <p:spPr>
+          <a:xfrm>
+            <a:off x="8549640" y="1783080"/>
+            <a:ext cx="2834640" cy="3474720"/>
+          </a:xfrm>
+          <a:prstGeom prst="rect">
+            <a:avLst/>
+          </a:prstGeom>
+          <a:noFill/>
+        </p:spPr>
+        <p:txBody>
+          <a:bodyPr wrap="square" lIns="0" rIns="0" tIns="0" bIns="0">
+            <a:spAutoFit/>
+          </a:bodyPr>
+          <a:lstStyle/>
+          <a:p>
+            <a:pPr>
+              <a:spcAft>
+                <a:spcPts val="1200"/>
+              </a:spcAft>
+              <a:defRPr sz="1800" b="0">
+                <a:solidFill>
+                  <a:srgbClr val="183343"/>
+                </a:solidFill>
+                <a:latin typeface="Microsoft YaHei"/>
+              </a:defRPr>
+            </a:pPr>
+            <a:r>
+              <a:t>顺向推算允许范围</a:t>
+            </a:r>
+          </a:p>
+          <a:p>
+            <a:pPr>
+              <a:spcAft>
+                <a:spcPts val="1200"/>
+              </a:spcAft>
+              <a:defRPr sz="1800" b="0">
+                <a:solidFill>
+                  <a:srgbClr val="183343"/>
+                </a:solidFill>
+                <a:latin typeface="Microsoft YaHei"/>
+              </a:defRPr>
+            </a:pPr>
+          </a:p>
+          <a:p>
+            <a:pPr>
+              <a:spcAft>
+                <a:spcPts val="1200"/>
+              </a:spcAft>
+              <a:defRPr sz="1800" b="0">
+                <a:solidFill>
+                  <a:srgbClr val="183343"/>
+                </a:solidFill>
+                <a:latin typeface="Microsoft YaHei"/>
+              </a:defRPr>
+            </a:pPr>
+            <a:r>
+              <a:t>逆向构造参考过程</a:t>
+            </a:r>
+          </a:p>
+          <a:p>
+            <a:pPr>
+              <a:spcAft>
+                <a:spcPts val="1200"/>
+              </a:spcAft>
+              <a:defRPr sz="1800" b="0">
+                <a:solidFill>
+                  <a:srgbClr val="183343"/>
+                </a:solidFill>
+                <a:latin typeface="Microsoft YaHei"/>
+              </a:defRPr>
+            </a:pPr>
+          </a:p>
+          <a:p>
+            <a:pPr>
+              <a:spcAft>
+                <a:spcPts val="1200"/>
+              </a:spcAft>
+              <a:defRPr sz="1800" b="0">
+                <a:solidFill>
+                  <a:srgbClr val="183343"/>
+                </a:solidFill>
+                <a:latin typeface="Microsoft YaHei"/>
+              </a:defRPr>
+            </a:pPr>
+            <a:r>
+              <a:t>计算参考目标值 Pc</a:t>
+            </a:r>
+          </a:p>
+          <a:p>
+            <a:pPr>
+              <a:spcAft>
+                <a:spcPts val="1200"/>
+              </a:spcAft>
+              <a:defRPr sz="1800" b="0">
+                <a:solidFill>
+                  <a:srgbClr val="183343"/>
+                </a:solidFill>
+                <a:latin typeface="Microsoft YaHei"/>
+              </a:defRPr>
+            </a:pPr>
+          </a:p>
+          <a:p>
+            <a:pPr>
+              <a:spcAft>
+                <a:spcPts val="1200"/>
+              </a:spcAft>
+              <a:defRPr sz="1800" b="0">
+                <a:solidFill>
+                  <a:srgbClr val="183343"/>
+                </a:solidFill>
+                <a:latin typeface="Microsoft YaHei"/>
+              </a:defRPr>
+            </a:pPr>
+            <a:r>
+              <a:t>参考过程未必可行</a:t>
+            </a:r>
+          </a:p>
+        </p:txBody>
+      </p:sp>
+      <p:sp>
+        <p:nvSpPr>
+          <p:cNvPr id="7" name="TextBox 6"/>
+          <p:cNvSpPr txBox="1"/>
+          <p:nvPr/>
+        </p:nvSpPr>
+        <p:spPr>
+          <a:xfrm>
+            <a:off x="640080" y="5715000"/>
+            <a:ext cx="10881360" cy="502920"/>
+          </a:xfrm>
+          <a:prstGeom prst="rect">
+            <a:avLst/>
+          </a:prstGeom>
+          <a:noFill/>
+        </p:spPr>
+        <p:txBody>
+          <a:bodyPr wrap="square" lIns="0" rIns="0" tIns="0" bIns="0">
+            <a:spAutoFit/>
+          </a:bodyPr>
+          <a:lstStyle/>
+          <a:p>
+            <a:pPr>
+              <a:spcAft>
+                <a:spcPts val="1200"/>
+              </a:spcAft>
+              <a:defRPr sz="1900" b="1">
+                <a:solidFill>
+                  <a:srgbClr val="287D8D"/>
+                </a:solidFill>
+                <a:latin typeface="Microsoft YaHei"/>
+              </a:defRPr>
+            </a:pPr>
+            <a:r>
+              <a:t>Pc削弱虚假收益的影响，但不提供可行性保证。</a:t>
+            </a:r>
+          </a:p>
+        </p:txBody>
+      </p:sp>
+    </p:spTree>
+  </p:cSld>
+  <p:clrMapOvr>
+    <a:masterClrMapping/>
+  </p:clrMapOvr>
+</p:sld>
+</file>
+
+<file path=ppt/slides/slide6.xml><?xml version="1.0" encoding="utf-8"?>
+<p:sld xmlns:a="http://schemas.openxmlformats.org/drawingml/2006/main" xmlns:p="http://schemas.openxmlformats.org/presentationml/2006/main" xmlns:r="http://schemas.openxmlformats.org/officeDocument/2006/relationships">
+  <p:cSld>
+    <p:bg>
+      <p:bgPr>
+        <a:solidFill>
+          <a:srgbClr val="FFFFFF"/>
+        </a:solidFill>
+        <a:effectLst/>
+      </p:bgPr>
+    </p:bg>
+    <p:spTree>
+      <p:nvGrpSpPr>
+        <p:cNvPr id="1" name=""/>
+        <p:cNvGrpSpPr/>
+        <p:nvPr/>
+      </p:nvGrpSpPr>
+      <p:grpSpPr/>
+      <p:sp>
+        <p:nvSpPr>
+          <p:cNvPr id="2" name="TextBox 1"/>
+          <p:cNvSpPr txBox="1"/>
+          <p:nvPr/>
+        </p:nvSpPr>
+        <p:spPr>
+          <a:xfrm>
+            <a:off x="594360" y="411480"/>
+            <a:ext cx="10972800" cy="914400"/>
+          </a:xfrm>
+          <a:prstGeom prst="rect">
+            <a:avLst/>
+          </a:prstGeom>
+          <a:noFill/>
+        </p:spPr>
+        <p:txBody>
+          <a:bodyPr wrap="square" lIns="0" rIns="0" tIns="0" bIns="0">
+            <a:spAutoFit/>
+          </a:bodyPr>
+          <a:lstStyle/>
+          <a:p>
+            <a:pPr>
+              <a:spcAft>
+                <a:spcPts val="1200"/>
+              </a:spcAft>
+              <a:defRPr sz="2800" b="1">
+                <a:solidFill>
+                  <a:srgbClr val="183343"/>
+                </a:solidFill>
+                <a:latin typeface="Microsoft YaHei"/>
+              </a:defRPr>
+            </a:pPr>
+            <a:r>
+              <a:t>偏移度参与目标评价的加权</a:t>
+            </a:r>
+          </a:p>
+        </p:txBody>
+      </p:sp>
+      <p:sp>
+        <p:nvSpPr>
+          <p:cNvPr id="3" name="TextBox 2"/>
+          <p:cNvSpPr txBox="1"/>
+          <p:nvPr/>
+        </p:nvSpPr>
+        <p:spPr>
+          <a:xfrm>
+            <a:off x="594360" y="6455664"/>
+            <a:ext cx="10515600" cy="228600"/>
+          </a:xfrm>
+          <a:prstGeom prst="rect">
+            <a:avLst/>
+          </a:prstGeom>
+          <a:noFill/>
+        </p:spPr>
+        <p:txBody>
+          <a:bodyPr wrap="square" lIns="0" rIns="0" tIns="0" bIns="0">
+            <a:spAutoFit/>
+          </a:bodyPr>
+          <a:lstStyle/>
+          <a:p>
+            <a:pPr>
+              <a:spcAft>
+                <a:spcPts val="1200"/>
+              </a:spcAft>
+              <a:defRPr sz="900" b="0">
+                <a:solidFill>
+                  <a:srgbClr val="576774"/>
+                </a:solidFill>
+                <a:latin typeface="Microsoft YaHei"/>
+              </a:defRPr>
+            </a:pPr>
+            <a:r>
+              <a:t>依据：第2.2.2节，式10–12</a:t>
+            </a:r>
+          </a:p>
+        </p:txBody>
+      </p:sp>
+      <p:sp>
+        <p:nvSpPr>
+          <p:cNvPr id="4" name="TextBox 3"/>
+          <p:cNvSpPr txBox="1"/>
+          <p:nvPr/>
+        </p:nvSpPr>
+        <p:spPr>
+          <a:xfrm>
+            <a:off x="11109960" y="6428232"/>
+            <a:ext cx="457200" cy="274320"/>
+          </a:xfrm>
+          <a:prstGeom prst="rect">
+            <a:avLst/>
+          </a:prstGeom>
+          <a:noFill/>
+        </p:spPr>
+        <p:txBody>
+          <a:bodyPr wrap="square" lIns="0" rIns="0" tIns="0" bIns="0">
+            <a:spAutoFit/>
+          </a:bodyPr>
+          <a:lstStyle/>
+          <a:p>
+            <a:pPr>
+              <a:spcAft>
+                <a:spcPts val="1200"/>
+              </a:spcAft>
+              <a:defRPr sz="1000" b="0">
+                <a:solidFill>
+                  <a:srgbClr val="576774"/>
+                </a:solidFill>
+                <a:latin typeface="Microsoft YaHei"/>
+              </a:defRPr>
+            </a:pPr>
+            <a:r>
+              <a:t>06</a:t>
+            </a:r>
+          </a:p>
+        </p:txBody>
+      </p:sp>
+      <p:sp>
+        <p:nvSpPr>
+          <p:cNvPr id="5" name="TextBox 4"/>
+          <p:cNvSpPr txBox="1"/>
+          <p:nvPr/>
+        </p:nvSpPr>
+        <p:spPr>
+          <a:xfrm>
+            <a:off x="822960" y="1600200"/>
+            <a:ext cx="10515600" cy="731520"/>
+          </a:xfrm>
+          <a:prstGeom prst="rect">
+            <a:avLst/>
+          </a:prstGeom>
+          <a:noFill/>
+        </p:spPr>
+        <p:txBody>
+          <a:bodyPr wrap="square" lIns="0" rIns="0" tIns="0" bIns="0">
+            <a:spAutoFit/>
+          </a:bodyPr>
+          <a:lstStyle/>
+          <a:p>
+            <a:pPr>
+              <a:spcAft>
+                <a:spcPts val="1200"/>
+              </a:spcAft>
+              <a:defRPr sz="3200" b="1">
+                <a:solidFill>
+                  <a:srgbClr val="287D8D"/>
+                </a:solidFill>
+                <a:latin typeface="Microsoft YaHei"/>
+              </a:defRPr>
+            </a:pPr>
+            <a:r>
+              <a:t>P = wPq + (1 − w)Pc</a:t>
+            </a:r>
+          </a:p>
+        </p:txBody>
+      </p:sp>
+      <p:sp>
+        <p:nvSpPr>
+          <p:cNvPr id="6" name="TextBox 5"/>
+          <p:cNvSpPr txBox="1"/>
+          <p:nvPr/>
+        </p:nvSpPr>
+        <p:spPr>
+          <a:xfrm>
+            <a:off x="822960" y="2651760"/>
+            <a:ext cx="10515600" cy="914400"/>
+          </a:xfrm>
+          <a:prstGeom prst="rect">
+            <a:avLst/>
+          </a:prstGeom>
+          <a:noFill/>
+        </p:spPr>
+        <p:txBody>
+          <a:bodyPr wrap="square" lIns="0" rIns="0" tIns="0" bIns="0">
+            <a:spAutoFit/>
+          </a:bodyPr>
+          <a:lstStyle/>
+          <a:p>
+            <a:pPr>
+              <a:spcAft>
+                <a:spcPts val="1200"/>
+              </a:spcAft>
+              <a:defRPr sz="2500" b="0">
+                <a:solidFill>
+                  <a:srgbClr val="183343"/>
+                </a:solidFill>
+                <a:latin typeface="Microsoft YaHei"/>
+              </a:defRPr>
+            </a:pPr>
+            <a:r>
+              <a:t>w = 1 − φ/T        φ = Σφt        φt = ΔVt/Vt</a:t>
+            </a:r>
+          </a:p>
+        </p:txBody>
+      </p:sp>
+      <p:graphicFrame>
+        <p:nvGraphicFramePr>
+          <p:cNvPr id="7" name="Table 6"/>
+          <p:cNvGraphicFramePr>
+            <a:graphicFrameLocks noGrp="1"/>
+          </p:cNvGraphicFramePr>
+          <p:nvPr/>
+        </p:nvGraphicFramePr>
+        <p:xfrm>
+          <a:off x="731520" y="3749039"/>
+          <a:ext cx="10698480" cy="1463040"/>
+        </p:xfrm>
+        <a:graphic>
+          <a:graphicData uri="http://schemas.openxmlformats.org/drawingml/2006/table">
+            <a:tbl>
+              <a:tblPr firstRow="1" bandRow="1">
+                <a:tableStyleId>{5C22544A-7EE6-4342-B048-85BDC9FD1C3A}</a:tableStyleId>
+              </a:tblPr>
+              <a:tblGrid>
+                <a:gridCol w="5349240"/>
+                <a:gridCol w="5349240"/>
+              </a:tblGrid>
+              <a:tr h="365760">
+                <a:tc>
+                  <a:txBody>
+                    <a:bodyPr/>
+                    <a:lstStyle/>
+                    <a:p>
+                      <a:pPr>
+                        <a:defRPr sz="1700">
+                          <a:solidFill>
+                            <a:srgbClr val="FFFFFF"/>
+                          </a:solidFill>
+                          <a:latin typeface="Microsoft YaHei"/>
+                        </a:defRPr>
+                      </a:pPr>
+                      <a:r>
+                        <a:t>符号</a:t>
+                      </a:r>
+                    </a:p>
+                  </a:txBody>
+                  <a:tcPr>
+                    <a:solidFill>
+                      <a:srgbClr val="287D8D"/>
+                    </a:solidFill>
+                  </a:tcPr>
+                </a:tc>
+                <a:tc>
+                  <a:txBody>
+                    <a:bodyPr/>
+                    <a:lstStyle/>
+                    <a:p>
+                      <a:pPr>
+                        <a:defRPr sz="1700">
+                          <a:solidFill>
+                            <a:srgbClr val="FFFFFF"/>
+                          </a:solidFill>
+                          <a:latin typeface="Microsoft YaHei"/>
+                        </a:defRPr>
+                      </a:pPr>
+                      <a:r>
+                        <a:t>含义</a:t>
+                      </a:r>
+                    </a:p>
+                  </a:txBody>
+                  <a:tcPr>
+                    <a:solidFill>
+                      <a:srgbClr val="287D8D"/>
+                    </a:solidFill>
+                  </a:tcPr>
+                </a:tc>
+              </a:tr>
+              <a:tr h="365760">
+                <a:tc>
+                  <a:txBody>
+                    <a:bodyPr/>
+                    <a:lstStyle/>
+                    <a:p>
+                      <a:pPr>
+                        <a:defRPr sz="1700">
+                          <a:solidFill>
+                            <a:srgbClr val="183343"/>
+                          </a:solidFill>
+                          <a:latin typeface="Microsoft YaHei"/>
+                        </a:defRPr>
+                      </a:pPr>
+                      <a:r>
+                        <a:t>Pc</a:t>
+                      </a:r>
+                    </a:p>
+                  </a:txBody>
+                  <a:tcPr>
+                    <a:solidFill>
+                      <a:srgbClr val="F0F5F7"/>
+                    </a:solidFill>
+                  </a:tcPr>
+                </a:tc>
+                <a:tc>
+                  <a:txBody>
+                    <a:bodyPr/>
+                    <a:lstStyle/>
+                    <a:p>
+                      <a:pPr>
+                        <a:defRPr sz="1700">
+                          <a:solidFill>
+                            <a:srgbClr val="183343"/>
+                          </a:solidFill>
+                          <a:latin typeface="Microsoft YaHei"/>
+                        </a:defRPr>
+                      </a:pPr>
+                      <a:r>
+                        <a:t>参考过程线对应的目标值</a:t>
+                      </a:r>
+                    </a:p>
+                  </a:txBody>
+                  <a:tcPr>
+                    <a:solidFill>
+                      <a:srgbClr val="F0F5F7"/>
+                    </a:solidFill>
+                  </a:tcPr>
+                </a:tc>
+              </a:tr>
+              <a:tr h="365760">
+                <a:tc>
+                  <a:txBody>
+                    <a:bodyPr/>
+                    <a:lstStyle/>
+                    <a:p>
+                      <a:pPr>
+                        <a:defRPr sz="1700">
+                          <a:solidFill>
+                            <a:srgbClr val="183343"/>
+                          </a:solidFill>
+                          <a:latin typeface="Microsoft YaHei"/>
+                        </a:defRPr>
+                      </a:pPr>
+                      <a:r>
+                        <a:t>Pq</a:t>
+                      </a:r>
+                    </a:p>
+                  </a:txBody>
+                  <a:tcPr>
+                    <a:solidFill>
+                      <a:srgbClr val="FFFFFF"/>
+                    </a:solidFill>
+                  </a:tcPr>
+                </a:tc>
+                <a:tc>
+                  <a:txBody>
+                    <a:bodyPr/>
+                    <a:lstStyle/>
+                    <a:p>
+                      <a:pPr>
+                        <a:defRPr sz="1700">
+                          <a:solidFill>
+                            <a:srgbClr val="183343"/>
+                          </a:solidFill>
+                          <a:latin typeface="Microsoft YaHei"/>
+                        </a:defRPr>
+                      </a:pPr>
+                      <a:r>
+                        <a:t>结合约束惩罚计算的潜力目标值</a:t>
+                      </a:r>
+                    </a:p>
+                  </a:txBody>
+                  <a:tcPr>
+                    <a:solidFill>
+                      <a:srgbClr val="FFFFFF"/>
+                    </a:solidFill>
+                  </a:tcPr>
+                </a:tc>
+              </a:tr>
+              <a:tr h="365760">
+                <a:tc>
+                  <a:txBody>
+                    <a:bodyPr/>
+                    <a:lstStyle/>
+                    <a:p>
+                      <a:pPr>
+                        <a:defRPr sz="1700">
+                          <a:solidFill>
+                            <a:srgbClr val="183343"/>
+                          </a:solidFill>
+                          <a:latin typeface="Microsoft YaHei"/>
+                        </a:defRPr>
+                      </a:pPr>
+                      <a:r>
+                        <a:t>φ</a:t>
+                      </a:r>
+                    </a:p>
+                  </a:txBody>
+                  <a:tcPr>
+                    <a:solidFill>
+                      <a:srgbClr val="F0F5F7"/>
+                    </a:solidFill>
+                  </a:tcPr>
+                </a:tc>
+                <a:tc>
+                  <a:txBody>
+                    <a:bodyPr/>
+                    <a:lstStyle/>
+                    <a:p>
+                      <a:pPr>
+                        <a:defRPr sz="1700">
+                          <a:solidFill>
+                            <a:srgbClr val="183343"/>
+                          </a:solidFill>
+                          <a:latin typeface="Microsoft YaHei"/>
+                        </a:defRPr>
+                      </a:pPr>
+                      <a:r>
+                        <a:t>整个调度周期的约束偏移程度</a:t>
+                      </a:r>
+                    </a:p>
+                  </a:txBody>
+                  <a:tcPr>
+                    <a:solidFill>
+                      <a:srgbClr val="F0F5F7"/>
+                    </a:solidFill>
+                  </a:tcPr>
+                </a:tc>
+              </a:tr>
+            </a:tbl>
+          </a:graphicData>
+        </a:graphic>
+      </p:graphicFrame>
+      <p:sp>
+        <p:nvSpPr>
+          <p:cNvPr id="8" name="TextBox 7"/>
+          <p:cNvSpPr txBox="1"/>
+          <p:nvPr/>
+        </p:nvSpPr>
+        <p:spPr>
+          <a:xfrm>
+            <a:off x="640080" y="5715000"/>
+            <a:ext cx="10881360" cy="502920"/>
+          </a:xfrm>
+          <a:prstGeom prst="rect">
+            <a:avLst/>
+          </a:prstGeom>
+          <a:noFill/>
+        </p:spPr>
+        <p:txBody>
+          <a:bodyPr wrap="square" lIns="0" rIns="0" tIns="0" bIns="0">
+            <a:spAutoFit/>
+          </a:bodyPr>
+          <a:lstStyle/>
+          <a:p>
+            <a:pPr>
+              <a:spcAft>
+                <a:spcPts val="1200"/>
+              </a:spcAft>
+              <a:defRPr sz="1900" b="1">
+                <a:solidFill>
+                  <a:srgbClr val="287D8D"/>
+                </a:solidFill>
+                <a:latin typeface="Microsoft YaHei"/>
+              </a:defRPr>
+            </a:pPr>
+            <a:r>
+              <a:t>偏移度越大，潜力目标值在综合评价中的权重越低。</a:t>
+            </a:r>
+          </a:p>
+        </p:txBody>
+      </p:sp>
+    </p:spTree>
+  </p:cSld>
+  <p:clrMapOvr>
+    <a:masterClrMapping/>
+  </p:clrMapOvr>
+</p:sld>
+</file>
+
+<file path=ppt/slides/slide7.xml><?xml version="1.0" encoding="utf-8"?>
+<p:sld xmlns:a="http://schemas.openxmlformats.org/drawingml/2006/main" xmlns:p="http://schemas.openxmlformats.org/presentationml/2006/main" xmlns:r="http://schemas.openxmlformats.org/officeDocument/2006/relationships">
+  <p:cSld>
+    <p:bg>
+      <p:bgPr>
+        <a:solidFill>
+          <a:srgbClr val="FFFFFF"/>
+        </a:solidFill>
+        <a:effectLst/>
+      </p:bgPr>
+    </p:bg>
+    <p:spTree>
+      <p:nvGrpSpPr>
+        <p:cNvPr id="1" name=""/>
+        <p:cNvGrpSpPr/>
+        <p:nvPr/>
+      </p:nvGrpSpPr>
+      <p:grpSpPr/>
+      <p:sp>
+        <p:nvSpPr>
+          <p:cNvPr id="2" name="TextBox 1"/>
+          <p:cNvSpPr txBox="1"/>
+          <p:nvPr/>
+        </p:nvSpPr>
+        <p:spPr>
+          <a:xfrm>
+            <a:off x="594360" y="411480"/>
+            <a:ext cx="10972800" cy="914400"/>
+          </a:xfrm>
+          <a:prstGeom prst="rect">
+            <a:avLst/>
+          </a:prstGeom>
+          <a:noFill/>
+        </p:spPr>
+        <p:txBody>
+          <a:bodyPr wrap="square" lIns="0" rIns="0" tIns="0" bIns="0">
+            <a:spAutoFit/>
+          </a:bodyPr>
+          <a:lstStyle/>
+          <a:p>
+            <a:pPr>
+              <a:spcAft>
+                <a:spcPts val="1200"/>
+              </a:spcAft>
+              <a:defRPr sz="2800" b="1">
+                <a:solidFill>
+                  <a:srgbClr val="183343"/>
+                </a:solidFill>
+                <a:latin typeface="Microsoft YaHei"/>
+              </a:defRPr>
+            </a:pPr>
+            <a:r>
+              <a:t>变异方向根据允许范围与相邻状态调整</a:t>
+            </a:r>
+          </a:p>
+        </p:txBody>
+      </p:sp>
+      <p:sp>
+        <p:nvSpPr>
+          <p:cNvPr id="3" name="TextBox 2"/>
+          <p:cNvSpPr txBox="1"/>
+          <p:nvPr/>
+        </p:nvSpPr>
+        <p:spPr>
+          <a:xfrm>
+            <a:off x="594360" y="6455664"/>
+            <a:ext cx="10515600" cy="228600"/>
+          </a:xfrm>
+          <a:prstGeom prst="rect">
+            <a:avLst/>
+          </a:prstGeom>
+          <a:noFill/>
+        </p:spPr>
+        <p:txBody>
+          <a:bodyPr wrap="square" lIns="0" rIns="0" tIns="0" bIns="0">
+            <a:spAutoFit/>
+          </a:bodyPr>
+          <a:lstStyle/>
+          <a:p>
+            <a:pPr>
+              <a:spcAft>
+                <a:spcPts val="1200"/>
+              </a:spcAft>
+              <a:defRPr sz="900" b="0">
+                <a:solidFill>
+                  <a:srgbClr val="576774"/>
+                </a:solidFill>
+                <a:latin typeface="Microsoft YaHei"/>
+              </a:defRPr>
+            </a:pPr>
+            <a:r>
+              <a:t>依据：第2.3节，原文图3、式13–18</a:t>
+            </a:r>
+          </a:p>
+        </p:txBody>
+      </p:sp>
+      <p:sp>
+        <p:nvSpPr>
+          <p:cNvPr id="4" name="TextBox 3"/>
+          <p:cNvSpPr txBox="1"/>
+          <p:nvPr/>
+        </p:nvSpPr>
+        <p:spPr>
+          <a:xfrm>
+            <a:off x="11109960" y="6428232"/>
+            <a:ext cx="457200" cy="274320"/>
+          </a:xfrm>
+          <a:prstGeom prst="rect">
+            <a:avLst/>
+          </a:prstGeom>
+          <a:noFill/>
+        </p:spPr>
+        <p:txBody>
+          <a:bodyPr wrap="square" lIns="0" rIns="0" tIns="0" bIns="0">
+            <a:spAutoFit/>
+          </a:bodyPr>
+          <a:lstStyle/>
+          <a:p>
+            <a:pPr>
+              <a:spcAft>
+                <a:spcPts val="1200"/>
+              </a:spcAft>
+              <a:defRPr sz="1000" b="0">
+                <a:solidFill>
+                  <a:srgbClr val="576774"/>
+                </a:solidFill>
+                <a:latin typeface="Microsoft YaHei"/>
+              </a:defRPr>
+            </a:pPr>
+            <a:r>
+              <a:t>07</a:t>
+            </a:r>
+          </a:p>
+        </p:txBody>
+      </p:sp>
+      <p:pic>
+        <p:nvPicPr>
+          <p:cNvPr id="5" name="Picture 4" descr="fig3.png"/>
+          <p:cNvPicPr>
+            <a:picLocks noChangeAspect="1"/>
+          </p:cNvPicPr>
+          <p:nvPr/>
+        </p:nvPicPr>
+        <p:blipFill>
+          <a:blip r:embed="rId3"/>
+          <a:stretch>
+            <a:fillRect/>
+          </a:stretch>
+        </p:blipFill>
+        <p:spPr>
+          <a:xfrm>
+            <a:off x="1146975" y="1463040"/>
+            <a:ext cx="6667168" cy="3931920"/>
+          </a:xfrm>
+          <a:prstGeom prst="rect">
+            <a:avLst/>
+          </a:prstGeom>
+        </p:spPr>
+      </p:pic>
+      <p:sp>
+        <p:nvSpPr>
+          <p:cNvPr id="6" name="TextBox 5"/>
+          <p:cNvSpPr txBox="1"/>
+          <p:nvPr/>
+        </p:nvSpPr>
+        <p:spPr>
+          <a:xfrm>
+            <a:off x="8549640" y="1737360"/>
+            <a:ext cx="2834640" cy="3383280"/>
+          </a:xfrm>
+          <a:prstGeom prst="rect">
+            <a:avLst/>
+          </a:prstGeom>
+          <a:noFill/>
+        </p:spPr>
+        <p:txBody>
+          <a:bodyPr wrap="square" lIns="0" rIns="0" tIns="0" bIns="0">
+            <a:spAutoFit/>
+          </a:bodyPr>
+          <a:lstStyle/>
+          <a:p>
+            <a:pPr>
+              <a:spcAft>
+                <a:spcPts val="1200"/>
+              </a:spcAft>
+              <a:defRPr sz="1800" b="0">
+                <a:solidFill>
+                  <a:srgbClr val="183343"/>
+                </a:solidFill>
+                <a:latin typeface="Microsoft YaHei"/>
+              </a:defRPr>
+            </a:pPr>
+            <a:r>
+              <a:t>高于允许上限</a:t>
+            </a:r>
+          </a:p>
+          <a:p>
+            <a:pPr>
+              <a:spcAft>
+                <a:spcPts val="1200"/>
+              </a:spcAft>
+              <a:defRPr sz="1800" b="0">
+                <a:solidFill>
+                  <a:srgbClr val="183343"/>
+                </a:solidFill>
+                <a:latin typeface="Microsoft YaHei"/>
+              </a:defRPr>
+            </a:pPr>
+            <a:r>
+              <a:t>向下调整</a:t>
+            </a:r>
+          </a:p>
+          <a:p>
+            <a:pPr>
+              <a:spcAft>
+                <a:spcPts val="1200"/>
+              </a:spcAft>
+              <a:defRPr sz="1800" b="0">
+                <a:solidFill>
+                  <a:srgbClr val="183343"/>
+                </a:solidFill>
+                <a:latin typeface="Microsoft YaHei"/>
+              </a:defRPr>
+            </a:pPr>
+          </a:p>
+          <a:p>
+            <a:pPr>
+              <a:spcAft>
+                <a:spcPts val="1200"/>
+              </a:spcAft>
+              <a:defRPr sz="1800" b="0">
+                <a:solidFill>
+                  <a:srgbClr val="183343"/>
+                </a:solidFill>
+                <a:latin typeface="Microsoft YaHei"/>
+              </a:defRPr>
+            </a:pPr>
+            <a:r>
+              <a:t>低于允许下限</a:t>
+            </a:r>
+          </a:p>
+          <a:p>
+            <a:pPr>
+              <a:spcAft>
+                <a:spcPts val="1200"/>
+              </a:spcAft>
+              <a:defRPr sz="1800" b="0">
+                <a:solidFill>
+                  <a:srgbClr val="183343"/>
+                </a:solidFill>
+                <a:latin typeface="Microsoft YaHei"/>
+              </a:defRPr>
+            </a:pPr>
+            <a:r>
+              <a:t>向上调整</a:t>
+            </a:r>
+          </a:p>
+          <a:p>
+            <a:pPr>
+              <a:spcAft>
+                <a:spcPts val="1200"/>
+              </a:spcAft>
+              <a:defRPr sz="1800" b="0">
+                <a:solidFill>
+                  <a:srgbClr val="183343"/>
+                </a:solidFill>
+                <a:latin typeface="Microsoft YaHei"/>
+              </a:defRPr>
+            </a:pPr>
+          </a:p>
+          <a:p>
+            <a:pPr>
+              <a:spcAft>
+                <a:spcPts val="1200"/>
+              </a:spcAft>
+              <a:defRPr sz="1800" b="0">
+                <a:solidFill>
+                  <a:srgbClr val="183343"/>
+                </a:solidFill>
+                <a:latin typeface="Microsoft YaHei"/>
+              </a:defRPr>
+            </a:pPr>
+            <a:r>
+              <a:t>范围内节点</a:t>
+            </a:r>
+          </a:p>
+          <a:p>
+            <a:pPr>
+              <a:spcAft>
+                <a:spcPts val="1200"/>
+              </a:spcAft>
+              <a:defRPr sz="1800" b="0">
+                <a:solidFill>
+                  <a:srgbClr val="183343"/>
+                </a:solidFill>
+                <a:latin typeface="Microsoft YaHei"/>
+              </a:defRPr>
+            </a:pPr>
+            <a:r>
+              <a:t>结合前后状态调整</a:t>
+            </a:r>
+          </a:p>
+        </p:txBody>
+      </p:sp>
+      <p:sp>
+        <p:nvSpPr>
+          <p:cNvPr id="7" name="TextBox 6"/>
+          <p:cNvSpPr txBox="1"/>
+          <p:nvPr/>
+        </p:nvSpPr>
+        <p:spPr>
+          <a:xfrm>
+            <a:off x="640080" y="5715000"/>
+            <a:ext cx="10881360" cy="502920"/>
+          </a:xfrm>
+          <a:prstGeom prst="rect">
+            <a:avLst/>
+          </a:prstGeom>
+          <a:noFill/>
+        </p:spPr>
+        <p:txBody>
+          <a:bodyPr wrap="square" lIns="0" rIns="0" tIns="0" bIns="0">
+            <a:spAutoFit/>
+          </a:bodyPr>
+          <a:lstStyle/>
+          <a:p>
+            <a:pPr>
+              <a:spcAft>
+                <a:spcPts val="1200"/>
+              </a:spcAft>
+              <a:defRPr sz="1900" b="1">
+                <a:solidFill>
+                  <a:srgbClr val="287D8D"/>
+                </a:solidFill>
+                <a:latin typeface="Microsoft YaHei"/>
+              </a:defRPr>
+            </a:pPr>
+            <a:r>
+              <a:t>变异引导提高可行性，不等同于每次变异都得到可行解。</a:t>
+            </a:r>
+          </a:p>
+        </p:txBody>
+      </p:sp>
+    </p:spTree>
+  </p:cSld>
+  <p:clrMapOvr>
+    <a:masterClrMapping/>
+  </p:clrMapOvr>
+</p:sld>
+</file>
+
+<file path=ppt/slides/slide8.xml><?xml version="1.0" encoding="utf-8"?>
+<p:sld xmlns:a="http://schemas.openxmlformats.org/drawingml/2006/main" xmlns:p="http://schemas.openxmlformats.org/presentationml/2006/main" xmlns:r="http://schemas.openxmlformats.org/officeDocument/2006/relationships">
+  <p:cSld>
+    <p:bg>
+      <p:bgPr>
+        <a:solidFill>
+          <a:srgbClr val="FFFFFF"/>
+        </a:solidFill>
+        <a:effectLst/>
+      </p:bgPr>
+    </p:bg>
+    <p:spTree>
+      <p:nvGrpSpPr>
+        <p:cNvPr id="1" name=""/>
+        <p:cNvGrpSpPr/>
+        <p:nvPr/>
+      </p:nvGrpSpPr>
+      <p:grpSpPr/>
+      <p:sp>
+        <p:nvSpPr>
+          <p:cNvPr id="2" name="TextBox 1"/>
+          <p:cNvSpPr txBox="1"/>
+          <p:nvPr/>
+        </p:nvSpPr>
+        <p:spPr>
+          <a:xfrm>
+            <a:off x="594360" y="411480"/>
+            <a:ext cx="10972800" cy="914400"/>
+          </a:xfrm>
+          <a:prstGeom prst="rect">
+            <a:avLst/>
+          </a:prstGeom>
+          <a:noFill/>
+        </p:spPr>
+        <p:txBody>
+          <a:bodyPr wrap="square" lIns="0" rIns="0" tIns="0" bIns="0">
+            <a:spAutoFit/>
+          </a:bodyPr>
+          <a:lstStyle/>
+          <a:p>
+            <a:pPr>
+              <a:spcAft>
+                <a:spcPts val="1200"/>
+              </a:spcAft>
+              <a:defRPr sz="2800" b="1">
+                <a:solidFill>
+                  <a:srgbClr val="183343"/>
+                </a:solidFill>
+                <a:latin typeface="Microsoft YaHei"/>
+              </a:defRPr>
+            </a:pPr>
+            <a:r>
+              <a:t>改进保留NSGA-II的排序与精英保留框架</a:t>
+            </a:r>
+          </a:p>
+        </p:txBody>
+      </p:sp>
+      <p:sp>
+        <p:nvSpPr>
+          <p:cNvPr id="3" name="TextBox 2"/>
+          <p:cNvSpPr txBox="1"/>
+          <p:nvPr/>
+        </p:nvSpPr>
+        <p:spPr>
+          <a:xfrm>
+            <a:off x="594360" y="6455664"/>
+            <a:ext cx="10515600" cy="228600"/>
+          </a:xfrm>
+          <a:prstGeom prst="rect">
+            <a:avLst/>
+          </a:prstGeom>
+          <a:noFill/>
+        </p:spPr>
+        <p:txBody>
+          <a:bodyPr wrap="square" lIns="0" rIns="0" tIns="0" bIns="0">
+            <a:spAutoFit/>
+          </a:bodyPr>
+          <a:lstStyle/>
+          <a:p>
+            <a:pPr>
+              <a:spcAft>
+                <a:spcPts val="1200"/>
+              </a:spcAft>
+              <a:defRPr sz="900" b="0">
+                <a:solidFill>
+                  <a:srgbClr val="576774"/>
+                </a:solidFill>
+                <a:latin typeface="Microsoft YaHei"/>
+              </a:defRPr>
+            </a:pPr>
+            <a:r>
+              <a:t>整理自：第2.4节</a:t>
+            </a:r>
+          </a:p>
+        </p:txBody>
+      </p:sp>
+      <p:sp>
+        <p:nvSpPr>
+          <p:cNvPr id="4" name="TextBox 3"/>
+          <p:cNvSpPr txBox="1"/>
+          <p:nvPr/>
+        </p:nvSpPr>
+        <p:spPr>
+          <a:xfrm>
+            <a:off x="11109960" y="6428232"/>
+            <a:ext cx="457200" cy="274320"/>
+          </a:xfrm>
+          <a:prstGeom prst="rect">
+            <a:avLst/>
+          </a:prstGeom>
+          <a:noFill/>
+        </p:spPr>
+        <p:txBody>
+          <a:bodyPr wrap="square" lIns="0" rIns="0" tIns="0" bIns="0">
+            <a:spAutoFit/>
+          </a:bodyPr>
+          <a:lstStyle/>
+          <a:p>
+            <a:pPr>
+              <a:spcAft>
+                <a:spcPts val="1200"/>
+              </a:spcAft>
+              <a:defRPr sz="1000" b="0">
+                <a:solidFill>
+                  <a:srgbClr val="576774"/>
+                </a:solidFill>
+                <a:latin typeface="Microsoft YaHei"/>
+              </a:defRPr>
+            </a:pPr>
+            <a:r>
+              <a:t>08</a:t>
+            </a:r>
+          </a:p>
+        </p:txBody>
+      </p:sp>
+      <p:sp>
+        <p:nvSpPr>
+          <p:cNvPr id="5" name="TextBox 4"/>
+          <p:cNvSpPr txBox="1"/>
+          <p:nvPr/>
+        </p:nvSpPr>
+        <p:spPr>
+          <a:xfrm>
+            <a:off x="731520" y="1828800"/>
+            <a:ext cx="2651760" cy="731520"/>
+          </a:xfrm>
+          <a:prstGeom prst="rect">
+            <a:avLst/>
+          </a:prstGeom>
+          <a:noFill/>
+        </p:spPr>
+        <p:txBody>
+          <a:bodyPr wrap="square" lIns="0" rIns="0" tIns="0" bIns="0">
+            <a:spAutoFit/>
+          </a:bodyPr>
+          <a:lstStyle/>
+          <a:p>
+            <a:pPr>
+              <a:spcAft>
+                <a:spcPts val="1200"/>
+              </a:spcAft>
+              <a:defRPr sz="3600" b="1">
+                <a:solidFill>
+                  <a:srgbClr val="287D8D"/>
+                </a:solidFill>
+                <a:latin typeface="Microsoft YaHei"/>
+              </a:defRPr>
+            </a:pPr>
+            <a:r>
+              <a:t>01</a:t>
+            </a:r>
+          </a:p>
+        </p:txBody>
+      </p:sp>
+      <p:sp>
+        <p:nvSpPr>
+          <p:cNvPr id="6" name="TextBox 5"/>
+          <p:cNvSpPr txBox="1"/>
+          <p:nvPr/>
+        </p:nvSpPr>
+        <p:spPr>
+          <a:xfrm>
+            <a:off x="731520" y="2788920"/>
+            <a:ext cx="2560320" cy="1234440"/>
+          </a:xfrm>
+          <a:prstGeom prst="rect">
+            <a:avLst/>
+          </a:prstGeom>
+          <a:noFill/>
+        </p:spPr>
+        <p:txBody>
+          <a:bodyPr wrap="square" lIns="0" rIns="0" tIns="0" bIns="0">
+            <a:spAutoFit/>
+          </a:bodyPr>
+          <a:lstStyle/>
+          <a:p>
+            <a:pPr>
+              <a:spcAft>
+                <a:spcPts val="1200"/>
+              </a:spcAft>
+              <a:defRPr sz="2100" b="1">
+                <a:solidFill>
+                  <a:srgbClr val="183343"/>
+                </a:solidFill>
+                <a:latin typeface="Microsoft YaHei"/>
+              </a:defRPr>
+            </a:pPr>
+            <a:r>
+              <a:t>初始种群与目标评价</a:t>
+            </a:r>
+          </a:p>
+        </p:txBody>
+      </p:sp>
+      <p:sp>
+        <p:nvSpPr>
+          <p:cNvPr id="7" name="TextBox 6"/>
+          <p:cNvSpPr txBox="1"/>
+          <p:nvPr/>
+        </p:nvSpPr>
+        <p:spPr>
+          <a:xfrm>
+            <a:off x="3566160" y="1828800"/>
+            <a:ext cx="2651760" cy="731520"/>
+          </a:xfrm>
+          <a:prstGeom prst="rect">
+            <a:avLst/>
+          </a:prstGeom>
+          <a:noFill/>
+        </p:spPr>
+        <p:txBody>
+          <a:bodyPr wrap="square" lIns="0" rIns="0" tIns="0" bIns="0">
+            <a:spAutoFit/>
+          </a:bodyPr>
+          <a:lstStyle/>
+          <a:p>
+            <a:pPr>
+              <a:spcAft>
+                <a:spcPts val="1200"/>
+              </a:spcAft>
+              <a:defRPr sz="3600" b="1">
+                <a:solidFill>
+                  <a:srgbClr val="287D8D"/>
+                </a:solidFill>
+                <a:latin typeface="Microsoft YaHei"/>
+              </a:defRPr>
+            </a:pPr>
+            <a:r>
+              <a:t>02</a:t>
+            </a:r>
+          </a:p>
+        </p:txBody>
+      </p:sp>
+      <p:sp>
+        <p:nvSpPr>
+          <p:cNvPr id="8" name="TextBox 7"/>
+          <p:cNvSpPr txBox="1"/>
+          <p:nvPr/>
+        </p:nvSpPr>
+        <p:spPr>
+          <a:xfrm>
+            <a:off x="3566160" y="2788920"/>
+            <a:ext cx="2560320" cy="1234440"/>
+          </a:xfrm>
+          <a:prstGeom prst="rect">
+            <a:avLst/>
+          </a:prstGeom>
+          <a:noFill/>
+        </p:spPr>
+        <p:txBody>
+          <a:bodyPr wrap="square" lIns="0" rIns="0" tIns="0" bIns="0">
+            <a:spAutoFit/>
+          </a:bodyPr>
+          <a:lstStyle/>
+          <a:p>
+            <a:pPr>
+              <a:spcAft>
+                <a:spcPts val="1200"/>
+              </a:spcAft>
+              <a:defRPr sz="2100" b="1">
+                <a:solidFill>
+                  <a:srgbClr val="183343"/>
+                </a:solidFill>
+                <a:latin typeface="Microsoft YaHei"/>
+              </a:defRPr>
+            </a:pPr>
+            <a:r>
+              <a:t>选择、交叉、引导变异</a:t>
+            </a:r>
+          </a:p>
+        </p:txBody>
+      </p:sp>
+      <p:sp>
+        <p:nvSpPr>
+          <p:cNvPr id="9" name="TextBox 8"/>
+          <p:cNvSpPr txBox="1"/>
+          <p:nvPr/>
+        </p:nvSpPr>
+        <p:spPr>
+          <a:xfrm>
+            <a:off x="6400800" y="1828800"/>
+            <a:ext cx="2651760" cy="731520"/>
+          </a:xfrm>
+          <a:prstGeom prst="rect">
+            <a:avLst/>
+          </a:prstGeom>
+          <a:noFill/>
+        </p:spPr>
+        <p:txBody>
+          <a:bodyPr wrap="square" lIns="0" rIns="0" tIns="0" bIns="0">
+            <a:spAutoFit/>
+          </a:bodyPr>
+          <a:lstStyle/>
+          <a:p>
+            <a:pPr>
+              <a:spcAft>
+                <a:spcPts val="1200"/>
+              </a:spcAft>
+              <a:defRPr sz="3600" b="1">
+                <a:solidFill>
+                  <a:srgbClr val="287D8D"/>
+                </a:solidFill>
+                <a:latin typeface="Microsoft YaHei"/>
+              </a:defRPr>
+            </a:pPr>
+            <a:r>
+              <a:t>03</a:t>
+            </a:r>
+          </a:p>
+        </p:txBody>
+      </p:sp>
+      <p:sp>
+        <p:nvSpPr>
+          <p:cNvPr id="10" name="TextBox 9"/>
+          <p:cNvSpPr txBox="1"/>
+          <p:nvPr/>
+        </p:nvSpPr>
+        <p:spPr>
+          <a:xfrm>
+            <a:off x="6400800" y="2788920"/>
+            <a:ext cx="2560320" cy="1234440"/>
+          </a:xfrm>
+          <a:prstGeom prst="rect">
+            <a:avLst/>
+          </a:prstGeom>
+          <a:noFill/>
+        </p:spPr>
+        <p:txBody>
+          <a:bodyPr wrap="square" lIns="0" rIns="0" tIns="0" bIns="0">
+            <a:spAutoFit/>
+          </a:bodyPr>
+          <a:lstStyle/>
+          <a:p>
+            <a:pPr>
+              <a:spcAft>
+                <a:spcPts val="1200"/>
+              </a:spcAft>
+              <a:defRPr sz="2100" b="1">
+                <a:solidFill>
+                  <a:srgbClr val="183343"/>
+                </a:solidFill>
+                <a:latin typeface="Microsoft YaHei"/>
+              </a:defRPr>
+            </a:pPr>
+            <a:r>
+              <a:t>父子代合并排序</a:t>
+            </a:r>
+          </a:p>
+        </p:txBody>
+      </p:sp>
+      <p:sp>
+        <p:nvSpPr>
+          <p:cNvPr id="11" name="TextBox 10"/>
+          <p:cNvSpPr txBox="1"/>
+          <p:nvPr/>
+        </p:nvSpPr>
+        <p:spPr>
+          <a:xfrm>
+            <a:off x="9235440" y="1828800"/>
+            <a:ext cx="2651760" cy="731520"/>
+          </a:xfrm>
+          <a:prstGeom prst="rect">
+            <a:avLst/>
+          </a:prstGeom>
+          <a:noFill/>
+        </p:spPr>
+        <p:txBody>
+          <a:bodyPr wrap="square" lIns="0" rIns="0" tIns="0" bIns="0">
+            <a:spAutoFit/>
+          </a:bodyPr>
+          <a:lstStyle/>
+          <a:p>
+            <a:pPr>
+              <a:spcAft>
+                <a:spcPts val="1200"/>
+              </a:spcAft>
+              <a:defRPr sz="3600" b="1">
+                <a:solidFill>
+                  <a:srgbClr val="287D8D"/>
+                </a:solidFill>
+                <a:latin typeface="Microsoft YaHei"/>
+              </a:defRPr>
+            </a:pPr>
+            <a:r>
+              <a:t>04</a:t>
+            </a:r>
+          </a:p>
+        </p:txBody>
+      </p:sp>
+      <p:sp>
+        <p:nvSpPr>
+          <p:cNvPr id="12" name="TextBox 11"/>
+          <p:cNvSpPr txBox="1"/>
+          <p:nvPr/>
+        </p:nvSpPr>
+        <p:spPr>
+          <a:xfrm>
+            <a:off x="9235440" y="2788920"/>
+            <a:ext cx="2560320" cy="1234440"/>
+          </a:xfrm>
+          <a:prstGeom prst="rect">
+            <a:avLst/>
+          </a:prstGeom>
+          <a:noFill/>
+        </p:spPr>
+        <p:txBody>
+          <a:bodyPr wrap="square" lIns="0" rIns="0" tIns="0" bIns="0">
+            <a:spAutoFit/>
+          </a:bodyPr>
+          <a:lstStyle/>
+          <a:p>
+            <a:pPr>
+              <a:spcAft>
+                <a:spcPts val="1200"/>
+              </a:spcAft>
+              <a:defRPr sz="2100" b="1">
+                <a:solidFill>
+                  <a:srgbClr val="183343"/>
+                </a:solidFill>
+                <a:latin typeface="Microsoft YaHei"/>
+              </a:defRPr>
+            </a:pPr>
+            <a:r>
+              <a:t>拥挤距离与精英保留</a:t>
+            </a:r>
+          </a:p>
+        </p:txBody>
+      </p:sp>
+      <p:sp>
+        <p:nvSpPr>
+          <p:cNvPr id="13" name="TextBox 12"/>
+          <p:cNvSpPr txBox="1"/>
+          <p:nvPr/>
+        </p:nvSpPr>
+        <p:spPr>
+          <a:xfrm>
+            <a:off x="822960" y="4617720"/>
+            <a:ext cx="10515600" cy="640080"/>
+          </a:xfrm>
+          <a:prstGeom prst="rect">
+            <a:avLst/>
+          </a:prstGeom>
+          <a:noFill/>
+        </p:spPr>
+        <p:txBody>
+          <a:bodyPr wrap="square" lIns="0" rIns="0" tIns="0" bIns="0">
+            <a:spAutoFit/>
+          </a:bodyPr>
+          <a:lstStyle/>
+          <a:p>
+            <a:pPr>
+              <a:spcAft>
+                <a:spcPts val="1200"/>
+              </a:spcAft>
+              <a:defRPr sz="2400" b="0">
+                <a:solidFill>
+                  <a:srgbClr val="183343"/>
+                </a:solidFill>
+                <a:latin typeface="Microsoft YaHei"/>
+              </a:defRPr>
+            </a:pPr>
+            <a:r>
+              <a:t>循环迭代，输出用于多目标决策的解集。</a:t>
+            </a:r>
+          </a:p>
+        </p:txBody>
+      </p:sp>
+    </p:spTree>
+  </p:cSld>
+  <p:clrMapOvr>
+    <a:masterClrMapping/>
+  </p:clrMapOvr>
+</p:sld>
+</file>
+
+<file path=ppt/slides/slide9.xml><?xml version="1.0" encoding="utf-8"?>
+<p:sld xmlns:a="http://schemas.openxmlformats.org/drawingml/2006/main" xmlns:p="http://schemas.openxmlformats.org/presentationml/2006/main" xmlns:r="http://schemas.openxmlformats.org/officeDocument/2006/relationships">
+  <p:cSld>
+    <p:bg>
+      <p:bgPr>
+        <a:solidFill>
+          <a:srgbClr val="FFFFFF"/>
+        </a:solidFill>
+        <a:effectLst/>
+      </p:bgPr>
+    </p:bg>
+    <p:spTree>
+      <p:nvGrpSpPr>
+        <p:cNvPr id="1" name=""/>
+        <p:cNvGrpSpPr/>
+        <p:nvPr/>
+      </p:nvGrpSpPr>
+      <p:grpSpPr/>
+      <p:sp>
+        <p:nvSpPr>
+          <p:cNvPr id="2" name="TextBox 1"/>
+          <p:cNvSpPr txBox="1"/>
+          <p:nvPr/>
+        </p:nvSpPr>
+        <p:spPr>
+          <a:xfrm>
+            <a:off x="594360" y="411480"/>
+            <a:ext cx="10972800" cy="914400"/>
+          </a:xfrm>
+          <a:prstGeom prst="rect">
+            <a:avLst/>
+          </a:prstGeom>
+          <a:noFill/>
+        </p:spPr>
+        <p:txBody>
+          <a:bodyPr wrap="square" lIns="0" rIns="0" tIns="0" bIns="0">
+            <a:spAutoFit/>
+          </a:bodyPr>
+          <a:lstStyle/>
+          <a:p>
+            <a:pPr>
+              <a:spcAft>
+                <a:spcPts val="1200"/>
+              </a:spcAft>
+              <a:defRPr sz="2800" b="1">
+                <a:solidFill>
+                  <a:srgbClr val="183343"/>
+                </a:solidFill>
+                <a:latin typeface="Microsoft YaHei"/>
+              </a:defRPr>
+            </a:pPr>
+            <a:r>
+              <a:t>金溪算例用365个日时段检验两类性能</a:t>
+            </a:r>
+          </a:p>
+        </p:txBody>
+      </p:sp>
+      <p:sp>
+        <p:nvSpPr>
+          <p:cNvPr id="3" name="TextBox 2"/>
+          <p:cNvSpPr txBox="1"/>
+          <p:nvPr/>
+        </p:nvSpPr>
+        <p:spPr>
+          <a:xfrm>
+            <a:off x="594360" y="6455664"/>
+            <a:ext cx="10515600" cy="228600"/>
+          </a:xfrm>
+          <a:prstGeom prst="rect">
+            <a:avLst/>
+          </a:prstGeom>
+          <a:noFill/>
+        </p:spPr>
+        <p:txBody>
+          <a:bodyPr wrap="square" lIns="0" rIns="0" tIns="0" bIns="0">
+            <a:spAutoFit/>
+          </a:bodyPr>
+          <a:lstStyle/>
+          <a:p>
+            <a:pPr>
+              <a:spcAft>
+                <a:spcPts val="1200"/>
+              </a:spcAft>
+              <a:defRPr sz="900" b="0">
+                <a:solidFill>
+                  <a:srgbClr val="576774"/>
+                </a:solidFill>
+                <a:latin typeface="Microsoft YaHei"/>
+              </a:defRPr>
+            </a:pPr>
+            <a:r>
+              <a:t>依据：第3.1–3.2节、表1</a:t>
+            </a:r>
+          </a:p>
+        </p:txBody>
+      </p:sp>
+      <p:sp>
+        <p:nvSpPr>
+          <p:cNvPr id="4" name="TextBox 3"/>
+          <p:cNvSpPr txBox="1"/>
+          <p:nvPr/>
+        </p:nvSpPr>
+        <p:spPr>
+          <a:xfrm>
+            <a:off x="11109960" y="6428232"/>
+            <a:ext cx="457200" cy="274320"/>
+          </a:xfrm>
+          <a:prstGeom prst="rect">
+            <a:avLst/>
+          </a:prstGeom>
+          <a:noFill/>
+        </p:spPr>
+        <p:txBody>
+          <a:bodyPr wrap="square" lIns="0" rIns="0" tIns="0" bIns="0">
+            <a:spAutoFit/>
+          </a:bodyPr>
+          <a:lstStyle/>
+          <a:p>
+            <a:pPr>
+              <a:spcAft>
+                <a:spcPts val="1200"/>
+              </a:spcAft>
+              <a:defRPr sz="1000" b="0">
+                <a:solidFill>
+                  <a:srgbClr val="576774"/>
+                </a:solidFill>
+                <a:latin typeface="Microsoft YaHei"/>
+              </a:defRPr>
+            </a:pPr>
+            <a:r>
+              <a:t>09</a:t>
+            </a:r>
+          </a:p>
+        </p:txBody>
+      </p:sp>
+      <p:graphicFrame>
+        <p:nvGraphicFramePr>
+          <p:cNvPr id="5" name="Table 4"/>
+          <p:cNvGraphicFramePr>
+            <a:graphicFrameLocks noGrp="1"/>
+          </p:cNvGraphicFramePr>
+          <p:nvPr/>
+        </p:nvGraphicFramePr>
+        <p:xfrm>
+          <a:off x="731520" y="1554480"/>
+          <a:ext cx="10698480" cy="3108960"/>
+        </p:xfrm>
+        <a:graphic>
+          <a:graphicData uri="http://schemas.openxmlformats.org/drawingml/2006/table">
+            <a:tbl>
+              <a:tblPr firstRow="1" bandRow="1">
+                <a:tableStyleId>{5C22544A-7EE6-4342-B048-85BDC9FD1C3A}</a:tableStyleId>
+              </a:tblPr>
+              <a:tblGrid>
+                <a:gridCol w="3566160"/>
+                <a:gridCol w="3566160"/>
+                <a:gridCol w="3566160"/>
+              </a:tblGrid>
+              <a:tr h="621792">
                 <a:tc>
                   <a:txBody>
                     <a:bodyPr/>
@@ -7944,7 +10652,31 @@
                         </a:defRPr>
                       </a:pPr>
                       <a:r>
-                        <a:t>检验问题</a:t>
+                        <a:t>求可行解实验</a:t>
+                      </a:r>
+                    </a:p>
+                  </a:txBody>
+                  <a:tcPr>
+                    <a:solidFill>
+                      <a:srgbClr val="287D8D"/>
+                    </a:solidFill>
+                  </a:tcPr>
+                </a:tc>
+                <a:tc>
+                  <a:txBody>
+                    <a:bodyPr/>
+                    <a:lstStyle/>
+                    <a:p>
+                      <a:pPr>
+                        <a:defRPr sz="1700">
+                          <a:solidFill>
+                            <a:srgbClr val="FFFFFF"/>
+                          </a:solidFill>
+                          <a:latin typeface="Microsoft YaHei"/>
+                        </a:defRPr>
+                      </a:pPr>
+                      <a:r>
+                        <a:t>多目标优化实验</a:t>
                       </a:r>
                     </a:p>
                   </a:txBody>
@@ -7970,7 +10702,7 @@
                         </a:defRPr>
                       </a:pPr>
                       <a:r>
-                        <a:t>测试函数</a:t>
+                        <a:t>时间尺度</a:t>
                       </a:r>
                     </a:p>
                   </a:txBody>
@@ -7994,7 +10726,7 @@
                         </a:defRPr>
                       </a:pPr>
                       <a:r>
-                        <a:t>Schaffer、Shubert</a:t>
+                        <a:t>365个日时段</a:t>
                       </a:r>
                     </a:p>
                   </a:txBody>
@@ -8018,7 +10750,7 @@
                         </a:defRPr>
                       </a:pPr>
                       <a:r>
-                        <a:t>能否接近已知最优值</a:t>
+                        <a:t>365个日时段</a:t>
                       </a:r>
                     </a:p>
                   </a:txBody>
@@ -8044,7 +10776,7 @@
                         </a:defRPr>
                       </a:pPr>
                       <a:r>
-                        <a:t>初始解敏感性</a:t>
+                        <a:t>迭代预算</a:t>
                       </a:r>
                     </a:p>
                   </a:txBody>
@@ -8068,7 +10800,7 @@
                         </a:defRPr>
                       </a:pPr>
                       <a:r>
-                        <a:t>Schaffer，100组初始解</a:t>
+                        <a:t>20000次</a:t>
                       </a:r>
                     </a:p>
                   </a:txBody>
@@ -8092,7 +10824,7 @@
                         </a:defRPr>
                       </a:pPr>
                       <a:r>
-                        <a:t>对起始位置是否敏感</a:t>
+                        <a:t>500000次</a:t>
                       </a:r>
                     </a:p>
                   </a:txBody>
@@ -8118,7 +10850,7 @@
                         </a:defRPr>
                       </a:pPr>
                       <a:r>
-                        <a:t>参数敏感性</a:t>
+                        <a:t>基线</a:t>
                       </a:r>
                     </a:p>
                   </a:txBody>
@@ -8142,7 +10874,7 @@
                         </a:defRPr>
                       </a:pPr>
                       <a:r>
-                        <a:t>标准差初值与终值分别变化</a:t>
+                        <a:t>PSO、GA、NSGA-II</a:t>
                       </a:r>
                     </a:p>
                   </a:txBody>
@@ -8166,7 +10898,7 @@
                         </a:defRPr>
                       </a:pPr>
                       <a:r>
-                        <a:t>参数变化对精度的影响</a:t>
+                        <a:t>MODP、MOPSO、MOGA、NSGA-II</a:t>
                       </a:r>
                     </a:p>
                   </a:txBody>
@@ -8192,7 +10924,7 @@
                         </a:defRPr>
                       </a:pPr>
                       <a:r>
-                        <a:t>工程算例</a:t>
+                        <a:t>评价重点</a:t>
                       </a:r>
                     </a:p>
                   </a:txBody>
@@ -8216,7 +10948,7 @@
                         </a:defRPr>
                       </a:pPr>
                       <a:r>
-                        <a:t>乌江流域，2018年径流</a:t>
+                        <a:t>偏移度、运行时间</a:t>
                       </a:r>
                     </a:p>
                   </a:txBody>
@@ -8240,7 +10972,7 @@
                         </a:defRPr>
                       </a:pPr>
                       <a:r>
-                        <a:t>调度收益与计算耗时</a:t>
+                        <a:t>各目标最优值均值、耗时</a:t>
                       </a:r>
                     </a:p>
                   </a:txBody>
@@ -8289,939 +11021,7 @@
               </a:defRPr>
             </a:pPr>
             <a:r>
-              <a:t>测试函数的稳定性与工程调度的稳定性需分别评价。</a:t>
-            </a:r>
-          </a:p>
-        </p:txBody>
-      </p:sp>
-    </p:spTree>
-  </p:cSld>
-  <p:clrMapOvr>
-    <a:masterClrMapping/>
-  </p:clrMapOvr>
-</p:sld>
-</file>
-
-<file path=ppt/slides/slide7.xml><?xml version="1.0" encoding="utf-8"?>
-<p:sld xmlns:a="http://schemas.openxmlformats.org/drawingml/2006/main" xmlns:p="http://schemas.openxmlformats.org/presentationml/2006/main" xmlns:r="http://schemas.openxmlformats.org/officeDocument/2006/relationships">
-  <p:cSld>
-    <p:bg>
-      <p:bgPr>
-        <a:solidFill>
-          <a:srgbClr val="FFFFFF"/>
-        </a:solidFill>
-        <a:effectLst/>
-      </p:bgPr>
-    </p:bg>
-    <p:spTree>
-      <p:nvGrpSpPr>
-        <p:cNvPr id="1" name=""/>
-        <p:cNvGrpSpPr/>
-        <p:nvPr/>
-      </p:nvGrpSpPr>
-      <p:grpSpPr/>
-      <p:sp>
-        <p:nvSpPr>
-          <p:cNvPr id="2" name="TextBox 1"/>
-          <p:cNvSpPr txBox="1"/>
-          <p:nvPr/>
-        </p:nvSpPr>
-        <p:spPr>
-          <a:xfrm>
-            <a:off x="594360" y="411480"/>
-            <a:ext cx="10972800" cy="914400"/>
-          </a:xfrm>
-          <a:prstGeom prst="rect">
-            <a:avLst/>
-          </a:prstGeom>
-          <a:noFill/>
-        </p:spPr>
-        <p:txBody>
-          <a:bodyPr wrap="square" lIns="0" rIns="0" tIns="0" bIns="0">
-            <a:spAutoFit/>
-          </a:bodyPr>
-          <a:lstStyle/>
-          <a:p>
-            <a:pPr>
-              <a:spcAft>
-                <a:spcPts val="1200"/>
-              </a:spcAft>
-              <a:defRPr sz="2800" b="1">
-                <a:solidFill>
-                  <a:srgbClr val="183343"/>
-                </a:solidFill>
-                <a:latin typeface="Microsoft YaHei"/>
-              </a:defRPr>
-            </a:pPr>
-            <a:r>
-              <a:t>改进算法在测试函数上更接近已知最优值</a:t>
-            </a:r>
-          </a:p>
-        </p:txBody>
-      </p:sp>
-      <p:sp>
-        <p:nvSpPr>
-          <p:cNvPr id="3" name="TextBox 2"/>
-          <p:cNvSpPr txBox="1"/>
-          <p:nvPr/>
-        </p:nvSpPr>
-        <p:spPr>
-          <a:xfrm>
-            <a:off x="594360" y="6455664"/>
-            <a:ext cx="10515600" cy="228600"/>
-          </a:xfrm>
-          <a:prstGeom prst="rect">
-            <a:avLst/>
-          </a:prstGeom>
-          <a:noFill/>
-        </p:spPr>
-        <p:txBody>
-          <a:bodyPr wrap="square" lIns="0" rIns="0" tIns="0" bIns="0">
-            <a:spAutoFit/>
-          </a:bodyPr>
-          <a:lstStyle/>
-          <a:p>
-            <a:pPr>
-              <a:spcAft>
-                <a:spcPts val="1200"/>
-              </a:spcAft>
-              <a:defRPr sz="900" b="0">
-                <a:solidFill>
-                  <a:srgbClr val="576774"/>
-                </a:solidFill>
-                <a:latin typeface="Microsoft YaHei"/>
-              </a:defRPr>
-            </a:pPr>
-            <a:r>
-              <a:t>依据：第3.4.1节，原文表1</a:t>
-            </a:r>
-          </a:p>
-        </p:txBody>
-      </p:sp>
-      <p:sp>
-        <p:nvSpPr>
-          <p:cNvPr id="4" name="TextBox 3"/>
-          <p:cNvSpPr txBox="1"/>
-          <p:nvPr/>
-        </p:nvSpPr>
-        <p:spPr>
-          <a:xfrm>
-            <a:off x="11109960" y="6428232"/>
-            <a:ext cx="457200" cy="274320"/>
-          </a:xfrm>
-          <a:prstGeom prst="rect">
-            <a:avLst/>
-          </a:prstGeom>
-          <a:noFill/>
-        </p:spPr>
-        <p:txBody>
-          <a:bodyPr wrap="square" lIns="0" rIns="0" tIns="0" bIns="0">
-            <a:spAutoFit/>
-          </a:bodyPr>
-          <a:lstStyle/>
-          <a:p>
-            <a:pPr>
-              <a:spcAft>
-                <a:spcPts val="1200"/>
-              </a:spcAft>
-              <a:defRPr sz="1000" b="0">
-                <a:solidFill>
-                  <a:srgbClr val="576774"/>
-                </a:solidFill>
-                <a:latin typeface="Microsoft YaHei"/>
-              </a:defRPr>
-            </a:pPr>
-            <a:r>
-              <a:t>07</a:t>
-            </a:r>
-          </a:p>
-        </p:txBody>
-      </p:sp>
-      <p:graphicFrame>
-        <p:nvGraphicFramePr>
-          <p:cNvPr id="5" name="Table 4"/>
-          <p:cNvGraphicFramePr>
-            <a:graphicFrameLocks noGrp="1"/>
-          </p:cNvGraphicFramePr>
-          <p:nvPr/>
-        </p:nvGraphicFramePr>
-        <p:xfrm>
-          <a:off x="731520" y="1920240"/>
-          <a:ext cx="10698480" cy="2194560"/>
-        </p:xfrm>
-        <a:graphic>
-          <a:graphicData uri="http://schemas.openxmlformats.org/drawingml/2006/table">
-            <a:tbl>
-              <a:tblPr firstRow="1" bandRow="1">
-                <a:tableStyleId>{5C22544A-7EE6-4342-B048-85BDC9FD1C3A}</a:tableStyleId>
-              </a:tblPr>
-              <a:tblGrid>
-                <a:gridCol w="2674620"/>
-                <a:gridCol w="2674620"/>
-                <a:gridCol w="2674620"/>
-                <a:gridCol w="2674620"/>
-              </a:tblGrid>
-              <a:tr h="731520">
-                <a:tc>
-                  <a:txBody>
-                    <a:bodyPr/>
-                    <a:lstStyle/>
-                    <a:p>
-                      <a:pPr>
-                        <a:defRPr sz="1700">
-                          <a:solidFill>
-                            <a:srgbClr val="FFFFFF"/>
-                          </a:solidFill>
-                          <a:latin typeface="Microsoft YaHei"/>
-                        </a:defRPr>
-                      </a:pPr>
-                      <a:r>
-                        <a:t>函数</a:t>
-                      </a:r>
-                    </a:p>
-                  </a:txBody>
-                  <a:tcPr>
-                    <a:solidFill>
-                      <a:srgbClr val="287D8D"/>
-                    </a:solidFill>
-                  </a:tcPr>
-                </a:tc>
-                <a:tc>
-                  <a:txBody>
-                    <a:bodyPr/>
-                    <a:lstStyle/>
-                    <a:p>
-                      <a:pPr>
-                        <a:defRPr sz="1700">
-                          <a:solidFill>
-                            <a:srgbClr val="FFFFFF"/>
-                          </a:solidFill>
-                          <a:latin typeface="Microsoft YaHei"/>
-                        </a:defRPr>
-                      </a:pPr>
-                      <a:r>
-                        <a:t>ODDDP</a:t>
-                      </a:r>
-                    </a:p>
-                  </a:txBody>
-                  <a:tcPr>
-                    <a:solidFill>
-                      <a:srgbClr val="287D8D"/>
-                    </a:solidFill>
-                  </a:tcPr>
-                </a:tc>
-                <a:tc>
-                  <a:txBody>
-                    <a:bodyPr/>
-                    <a:lstStyle/>
-                    <a:p>
-                      <a:pPr>
-                        <a:defRPr sz="1700">
-                          <a:solidFill>
-                            <a:srgbClr val="FFFFFF"/>
-                          </a:solidFill>
-                          <a:latin typeface="Microsoft YaHei"/>
-                        </a:defRPr>
-                      </a:pPr>
-                      <a:r>
-                        <a:t>IWO-ODDDP</a:t>
-                      </a:r>
-                    </a:p>
-                  </a:txBody>
-                  <a:tcPr>
-                    <a:solidFill>
-                      <a:srgbClr val="287D8D"/>
-                    </a:solidFill>
-                  </a:tcPr>
-                </a:tc>
-                <a:tc>
-                  <a:txBody>
-                    <a:bodyPr/>
-                    <a:lstStyle/>
-                    <a:p>
-                      <a:pPr>
-                        <a:defRPr sz="1700">
-                          <a:solidFill>
-                            <a:srgbClr val="FFFFFF"/>
-                          </a:solidFill>
-                          <a:latin typeface="Microsoft YaHei"/>
-                        </a:defRPr>
-                      </a:pPr>
-                      <a:r>
-                        <a:t>M-IWO-ODDDP</a:t>
-                      </a:r>
-                    </a:p>
-                  </a:txBody>
-                  <a:tcPr>
-                    <a:solidFill>
-                      <a:srgbClr val="287D8D"/>
-                    </a:solidFill>
-                  </a:tcPr>
-                </a:tc>
-              </a:tr>
-              <a:tr h="731520">
-                <a:tc>
-                  <a:txBody>
-                    <a:bodyPr/>
-                    <a:lstStyle/>
-                    <a:p>
-                      <a:pPr>
-                        <a:defRPr sz="1700">
-                          <a:solidFill>
-                            <a:srgbClr val="183343"/>
-                          </a:solidFill>
-                          <a:latin typeface="Microsoft YaHei"/>
-                        </a:defRPr>
-                      </a:pPr>
-                      <a:r>
-                        <a:t>Schaffer</a:t>
-                      </a:r>
-                    </a:p>
-                  </a:txBody>
-                  <a:tcPr>
-                    <a:solidFill>
-                      <a:srgbClr val="F0F5F7"/>
-                    </a:solidFill>
-                  </a:tcPr>
-                </a:tc>
-                <a:tc>
-                  <a:txBody>
-                    <a:bodyPr/>
-                    <a:lstStyle/>
-                    <a:p>
-                      <a:pPr>
-                        <a:defRPr sz="1700">
-                          <a:solidFill>
-                            <a:srgbClr val="183343"/>
-                          </a:solidFill>
-                          <a:latin typeface="Microsoft YaHei"/>
-                        </a:defRPr>
-                      </a:pPr>
-                      <a:r>
-                        <a:t>0.037227</a:t>
-                      </a:r>
-                    </a:p>
-                  </a:txBody>
-                  <a:tcPr>
-                    <a:solidFill>
-                      <a:srgbClr val="F0F5F7"/>
-                    </a:solidFill>
-                  </a:tcPr>
-                </a:tc>
-                <a:tc>
-                  <a:txBody>
-                    <a:bodyPr/>
-                    <a:lstStyle/>
-                    <a:p>
-                      <a:pPr>
-                        <a:defRPr sz="1700">
-                          <a:solidFill>
-                            <a:srgbClr val="183343"/>
-                          </a:solidFill>
-                          <a:latin typeface="Microsoft YaHei"/>
-                        </a:defRPr>
-                      </a:pPr>
-                      <a:r>
-                        <a:t>0.009716</a:t>
-                      </a:r>
-                    </a:p>
-                  </a:txBody>
-                  <a:tcPr>
-                    <a:solidFill>
-                      <a:srgbClr val="F0F5F7"/>
-                    </a:solidFill>
-                  </a:tcPr>
-                </a:tc>
-                <a:tc>
-                  <a:txBody>
-                    <a:bodyPr/>
-                    <a:lstStyle/>
-                    <a:p>
-                      <a:pPr>
-                        <a:defRPr sz="1700">
-                          <a:solidFill>
-                            <a:srgbClr val="183343"/>
-                          </a:solidFill>
-                          <a:latin typeface="Microsoft YaHei"/>
-                        </a:defRPr>
-                      </a:pPr>
-                      <a:r>
-                        <a:t>2.00 × 10⁻¹²</a:t>
-                      </a:r>
-                    </a:p>
-                  </a:txBody>
-                  <a:tcPr>
-                    <a:solidFill>
-                      <a:srgbClr val="F0F5F7"/>
-                    </a:solidFill>
-                  </a:tcPr>
-                </a:tc>
-              </a:tr>
-              <a:tr h="731520">
-                <a:tc>
-                  <a:txBody>
-                    <a:bodyPr/>
-                    <a:lstStyle/>
-                    <a:p>
-                      <a:pPr>
-                        <a:defRPr sz="1700">
-                          <a:solidFill>
-                            <a:srgbClr val="183343"/>
-                          </a:solidFill>
-                          <a:latin typeface="Microsoft YaHei"/>
-                        </a:defRPr>
-                      </a:pPr>
-                      <a:r>
-                        <a:t>Shubert</a:t>
-                      </a:r>
-                    </a:p>
-                  </a:txBody>
-                  <a:tcPr>
-                    <a:solidFill>
-                      <a:srgbClr val="FFFFFF"/>
-                    </a:solidFill>
-                  </a:tcPr>
-                </a:tc>
-                <a:tc>
-                  <a:txBody>
-                    <a:bodyPr/>
-                    <a:lstStyle/>
-                    <a:p>
-                      <a:pPr>
-                        <a:defRPr sz="1700">
-                          <a:solidFill>
-                            <a:srgbClr val="183343"/>
-                          </a:solidFill>
-                          <a:latin typeface="Microsoft YaHei"/>
-                        </a:defRPr>
-                      </a:pPr>
-                      <a:r>
-                        <a:t>−186.617395</a:t>
-                      </a:r>
-                    </a:p>
-                  </a:txBody>
-                  <a:tcPr>
-                    <a:solidFill>
-                      <a:srgbClr val="FFFFFF"/>
-                    </a:solidFill>
-                  </a:tcPr>
-                </a:tc>
-                <a:tc>
-                  <a:txBody>
-                    <a:bodyPr/>
-                    <a:lstStyle/>
-                    <a:p>
-                      <a:pPr>
-                        <a:defRPr sz="1700">
-                          <a:solidFill>
-                            <a:srgbClr val="183343"/>
-                          </a:solidFill>
-                          <a:latin typeface="Microsoft YaHei"/>
-                        </a:defRPr>
-                      </a:pPr>
-                      <a:r>
-                        <a:t>−186.730909</a:t>
-                      </a:r>
-                    </a:p>
-                  </a:txBody>
-                  <a:tcPr>
-                    <a:solidFill>
-                      <a:srgbClr val="FFFFFF"/>
-                    </a:solidFill>
-                  </a:tcPr>
-                </a:tc>
-                <a:tc>
-                  <a:txBody>
-                    <a:bodyPr/>
-                    <a:lstStyle/>
-                    <a:p>
-                      <a:pPr>
-                        <a:defRPr sz="1700">
-                          <a:solidFill>
-                            <a:srgbClr val="183343"/>
-                          </a:solidFill>
-                          <a:latin typeface="Microsoft YaHei"/>
-                        </a:defRPr>
-                      </a:pPr>
-                      <a:r>
-                        <a:t>−186.730909</a:t>
-                      </a:r>
-                    </a:p>
-                  </a:txBody>
-                  <a:tcPr>
-                    <a:solidFill>
-                      <a:srgbClr val="FFFFFF"/>
-                    </a:solidFill>
-                  </a:tcPr>
-                </a:tc>
-              </a:tr>
-            </a:tbl>
-          </a:graphicData>
-        </a:graphic>
-      </p:graphicFrame>
-      <p:sp>
-        <p:nvSpPr>
-          <p:cNvPr id="6" name="TextBox 5"/>
-          <p:cNvSpPr txBox="1"/>
-          <p:nvPr/>
-        </p:nvSpPr>
-        <p:spPr>
-          <a:xfrm>
-            <a:off x="640080" y="5715000"/>
-            <a:ext cx="10881360" cy="502920"/>
-          </a:xfrm>
-          <a:prstGeom prst="rect">
-            <a:avLst/>
-          </a:prstGeom>
-          <a:noFill/>
-        </p:spPr>
-        <p:txBody>
-          <a:bodyPr wrap="square" lIns="0" rIns="0" tIns="0" bIns="0">
-            <a:spAutoFit/>
-          </a:bodyPr>
-          <a:lstStyle/>
-          <a:p>
-            <a:pPr>
-              <a:spcAft>
-                <a:spcPts val="1200"/>
-              </a:spcAft>
-              <a:defRPr sz="1900" b="1">
-                <a:solidFill>
-                  <a:srgbClr val="287D8D"/>
-                </a:solidFill>
-                <a:latin typeface="Microsoft YaHei"/>
-              </a:defRPr>
-            </a:pPr>
-            <a:r>
-              <a:t>二维测试支持搜索能力改善，尚不能替代高维验证。</a:t>
-            </a:r>
-          </a:p>
-        </p:txBody>
-      </p:sp>
-    </p:spTree>
-  </p:cSld>
-  <p:clrMapOvr>
-    <a:masterClrMapping/>
-  </p:clrMapOvr>
-</p:sld>
-</file>
-
-<file path=ppt/slides/slide8.xml><?xml version="1.0" encoding="utf-8"?>
-<p:sld xmlns:a="http://schemas.openxmlformats.org/drawingml/2006/main" xmlns:p="http://schemas.openxmlformats.org/presentationml/2006/main" xmlns:r="http://schemas.openxmlformats.org/officeDocument/2006/relationships">
-  <p:cSld>
-    <p:bg>
-      <p:bgPr>
-        <a:solidFill>
-          <a:srgbClr val="FFFFFF"/>
-        </a:solidFill>
-        <a:effectLst/>
-      </p:bgPr>
-    </p:bg>
-    <p:spTree>
-      <p:nvGrpSpPr>
-        <p:cNvPr id="1" name=""/>
-        <p:cNvGrpSpPr/>
-        <p:nvPr/>
-      </p:nvGrpSpPr>
-      <p:grpSpPr/>
-      <p:sp>
-        <p:nvSpPr>
-          <p:cNvPr id="2" name="TextBox 1"/>
-          <p:cNvSpPr txBox="1"/>
-          <p:nvPr/>
-        </p:nvSpPr>
-        <p:spPr>
-          <a:xfrm>
-            <a:off x="594360" y="411480"/>
-            <a:ext cx="10972800" cy="914400"/>
-          </a:xfrm>
-          <a:prstGeom prst="rect">
-            <a:avLst/>
-          </a:prstGeom>
-          <a:noFill/>
-        </p:spPr>
-        <p:txBody>
-          <a:bodyPr wrap="square" lIns="0" rIns="0" tIns="0" bIns="0">
-            <a:spAutoFit/>
-          </a:bodyPr>
-          <a:lstStyle/>
-          <a:p>
-            <a:pPr>
-              <a:spcAft>
-                <a:spcPts val="1200"/>
-              </a:spcAft>
-              <a:defRPr sz="2800" b="1">
-                <a:solidFill>
-                  <a:srgbClr val="183343"/>
-                </a:solidFill>
-                <a:latin typeface="Microsoft YaHei"/>
-              </a:defRPr>
-            </a:pPr>
-            <a:r>
-              <a:t>乌江算例以18种正交组合生成候选状态</a:t>
-            </a:r>
-          </a:p>
-        </p:txBody>
-      </p:sp>
-      <p:sp>
-        <p:nvSpPr>
-          <p:cNvPr id="3" name="TextBox 2"/>
-          <p:cNvSpPr txBox="1"/>
-          <p:nvPr/>
-        </p:nvSpPr>
-        <p:spPr>
-          <a:xfrm>
-            <a:off x="594360" y="6455664"/>
-            <a:ext cx="10515600" cy="228600"/>
-          </a:xfrm>
-          <a:prstGeom prst="rect">
-            <a:avLst/>
-          </a:prstGeom>
-          <a:noFill/>
-        </p:spPr>
-        <p:txBody>
-          <a:bodyPr wrap="square" lIns="0" rIns="0" tIns="0" bIns="0">
-            <a:spAutoFit/>
-          </a:bodyPr>
-          <a:lstStyle/>
-          <a:p>
-            <a:pPr>
-              <a:spcAft>
-                <a:spcPts val="1200"/>
-              </a:spcAft>
-              <a:defRPr sz="900" b="0">
-                <a:solidFill>
-                  <a:srgbClr val="576774"/>
-                </a:solidFill>
-                <a:latin typeface="Microsoft YaHei"/>
-              </a:defRPr>
-            </a:pPr>
-            <a:r>
-              <a:t>依据：第5节，原文图3</a:t>
-            </a:r>
-          </a:p>
-        </p:txBody>
-      </p:sp>
-      <p:sp>
-        <p:nvSpPr>
-          <p:cNvPr id="4" name="TextBox 3"/>
-          <p:cNvSpPr txBox="1"/>
-          <p:nvPr/>
-        </p:nvSpPr>
-        <p:spPr>
-          <a:xfrm>
-            <a:off x="11109960" y="6428232"/>
-            <a:ext cx="457200" cy="274320"/>
-          </a:xfrm>
-          <a:prstGeom prst="rect">
-            <a:avLst/>
-          </a:prstGeom>
-          <a:noFill/>
-        </p:spPr>
-        <p:txBody>
-          <a:bodyPr wrap="square" lIns="0" rIns="0" tIns="0" bIns="0">
-            <a:spAutoFit/>
-          </a:bodyPr>
-          <a:lstStyle/>
-          <a:p>
-            <a:pPr>
-              <a:spcAft>
-                <a:spcPts val="1200"/>
-              </a:spcAft>
-              <a:defRPr sz="1000" b="0">
-                <a:solidFill>
-                  <a:srgbClr val="576774"/>
-                </a:solidFill>
-                <a:latin typeface="Microsoft YaHei"/>
-              </a:defRPr>
-            </a:pPr>
-            <a:r>
-              <a:t>08</a:t>
-            </a:r>
-          </a:p>
-        </p:txBody>
-      </p:sp>
-      <p:pic>
-        <p:nvPicPr>
-          <p:cNvPr id="5" name="Picture 4" descr="fig3.png"/>
-          <p:cNvPicPr>
-            <a:picLocks noChangeAspect="1"/>
-          </p:cNvPicPr>
-          <p:nvPr/>
-        </p:nvPicPr>
-        <p:blipFill>
-          <a:blip r:embed="rId3"/>
-          <a:stretch>
-            <a:fillRect/>
-          </a:stretch>
-        </p:blipFill>
-        <p:spPr>
-          <a:xfrm>
-            <a:off x="2147495" y="1645919"/>
-            <a:ext cx="7866529" cy="2377440"/>
-          </a:xfrm>
-          <a:prstGeom prst="rect">
-            <a:avLst/>
-          </a:prstGeom>
-        </p:spPr>
-      </p:pic>
-      <p:sp>
-        <p:nvSpPr>
-          <p:cNvPr id="6" name="TextBox 5"/>
-          <p:cNvSpPr txBox="1"/>
-          <p:nvPr/>
-        </p:nvSpPr>
-        <p:spPr>
-          <a:xfrm>
-            <a:off x="822960" y="4343400"/>
-            <a:ext cx="10515600" cy="914400"/>
-          </a:xfrm>
-          <a:prstGeom prst="rect">
-            <a:avLst/>
-          </a:prstGeom>
-          <a:noFill/>
-        </p:spPr>
-        <p:txBody>
-          <a:bodyPr wrap="square" lIns="0" rIns="0" tIns="0" bIns="0">
-            <a:spAutoFit/>
-          </a:bodyPr>
-          <a:lstStyle/>
-          <a:p>
-            <a:pPr>
-              <a:spcAft>
-                <a:spcPts val="1200"/>
-              </a:spcAft>
-              <a:defRPr sz="2000" b="0">
-                <a:solidFill>
-                  <a:srgbClr val="183343"/>
-                </a:solidFill>
-                <a:latin typeface="Microsoft YaHei"/>
-              </a:defRPr>
-            </a:pPr>
-            <a:r>
-              <a:t>7因素、3水平、18种组合</a:t>
-            </a:r>
-          </a:p>
-          <a:p>
-            <a:pPr>
-              <a:spcAft>
-                <a:spcPts val="1200"/>
-              </a:spcAft>
-              <a:defRPr sz="2000" b="0">
-                <a:solidFill>
-                  <a:srgbClr val="183343"/>
-                </a:solidFill>
-                <a:latin typeface="Microsoft YaHei"/>
-              </a:defRPr>
-            </a:pPr>
-            <a:r>
-              <a:t>标准差初值10，终值0.001，初始方案采用等流量法</a:t>
-            </a:r>
-          </a:p>
-        </p:txBody>
-      </p:sp>
-    </p:spTree>
-  </p:cSld>
-  <p:clrMapOvr>
-    <a:masterClrMapping/>
-  </p:clrMapOvr>
-</p:sld>
-</file>
-
-<file path=ppt/slides/slide9.xml><?xml version="1.0" encoding="utf-8"?>
-<p:sld xmlns:a="http://schemas.openxmlformats.org/drawingml/2006/main" xmlns:p="http://schemas.openxmlformats.org/presentationml/2006/main" xmlns:r="http://schemas.openxmlformats.org/officeDocument/2006/relationships">
-  <p:cSld>
-    <p:bg>
-      <p:bgPr>
-        <a:solidFill>
-          <a:srgbClr val="FFFFFF"/>
-        </a:solidFill>
-        <a:effectLst/>
-      </p:bgPr>
-    </p:bg>
-    <p:spTree>
-      <p:nvGrpSpPr>
-        <p:cNvPr id="1" name=""/>
-        <p:cNvGrpSpPr/>
-        <p:nvPr/>
-      </p:nvGrpSpPr>
-      <p:grpSpPr/>
-      <p:sp>
-        <p:nvSpPr>
-          <p:cNvPr id="2" name="TextBox 1"/>
-          <p:cNvSpPr txBox="1"/>
-          <p:nvPr/>
-        </p:nvSpPr>
-        <p:spPr>
-          <a:xfrm>
-            <a:off x="594360" y="411480"/>
-            <a:ext cx="10972800" cy="914400"/>
-          </a:xfrm>
-          <a:prstGeom prst="rect">
-            <a:avLst/>
-          </a:prstGeom>
-          <a:noFill/>
-        </p:spPr>
-        <p:txBody>
-          <a:bodyPr wrap="square" lIns="0" rIns="0" tIns="0" bIns="0">
-            <a:spAutoFit/>
-          </a:bodyPr>
-          <a:lstStyle/>
-          <a:p>
-            <a:pPr>
-              <a:spcAft>
-                <a:spcPts val="1200"/>
-              </a:spcAft>
-              <a:defRPr sz="2800" b="1">
-                <a:solidFill>
-                  <a:srgbClr val="183343"/>
-                </a:solidFill>
-                <a:latin typeface="Microsoft YaHei"/>
-              </a:defRPr>
-            </a:pPr>
-            <a:r>
-              <a:t>改进方案提高收益，相同迭代次数下耗时接近</a:t>
-            </a:r>
-          </a:p>
-        </p:txBody>
-      </p:sp>
-      <p:sp>
-        <p:nvSpPr>
-          <p:cNvPr id="3" name="TextBox 2"/>
-          <p:cNvSpPr txBox="1"/>
-          <p:nvPr/>
-        </p:nvSpPr>
-        <p:spPr>
-          <a:xfrm>
-            <a:off x="594360" y="6455664"/>
-            <a:ext cx="10515600" cy="228600"/>
-          </a:xfrm>
-          <a:prstGeom prst="rect">
-            <a:avLst/>
-          </a:prstGeom>
-          <a:noFill/>
-        </p:spPr>
-        <p:txBody>
-          <a:bodyPr wrap="square" lIns="0" rIns="0" tIns="0" bIns="0">
-            <a:spAutoFit/>
-          </a:bodyPr>
-          <a:lstStyle/>
-          <a:p>
-            <a:pPr>
-              <a:spcAft>
-                <a:spcPts val="1200"/>
-              </a:spcAft>
-              <a:defRPr sz="900" b="0">
-                <a:solidFill>
-                  <a:srgbClr val="576774"/>
-                </a:solidFill>
-                <a:latin typeface="Microsoft YaHei"/>
-              </a:defRPr>
-            </a:pPr>
-            <a:r>
-              <a:t>依据：第5.1节，原文图4</a:t>
-            </a:r>
-          </a:p>
-        </p:txBody>
-      </p:sp>
-      <p:sp>
-        <p:nvSpPr>
-          <p:cNvPr id="4" name="TextBox 3"/>
-          <p:cNvSpPr txBox="1"/>
-          <p:nvPr/>
-        </p:nvSpPr>
-        <p:spPr>
-          <a:xfrm>
-            <a:off x="11109960" y="6428232"/>
-            <a:ext cx="457200" cy="274320"/>
-          </a:xfrm>
-          <a:prstGeom prst="rect">
-            <a:avLst/>
-          </a:prstGeom>
-          <a:noFill/>
-        </p:spPr>
-        <p:txBody>
-          <a:bodyPr wrap="square" lIns="0" rIns="0" tIns="0" bIns="0">
-            <a:spAutoFit/>
-          </a:bodyPr>
-          <a:lstStyle/>
-          <a:p>
-            <a:pPr>
-              <a:spcAft>
-                <a:spcPts val="1200"/>
-              </a:spcAft>
-              <a:defRPr sz="1000" b="0">
-                <a:solidFill>
-                  <a:srgbClr val="576774"/>
-                </a:solidFill>
-                <a:latin typeface="Microsoft YaHei"/>
-              </a:defRPr>
-            </a:pPr>
-            <a:r>
-              <a:t>09</a:t>
-            </a:r>
-          </a:p>
-        </p:txBody>
-      </p:sp>
-      <p:pic>
-        <p:nvPicPr>
-          <p:cNvPr id="5" name="Picture 4" descr="fig4.png"/>
-          <p:cNvPicPr>
-            <a:picLocks noChangeAspect="1"/>
-          </p:cNvPicPr>
-          <p:nvPr/>
-        </p:nvPicPr>
-        <p:blipFill>
-          <a:blip r:embed="rId3"/>
-          <a:stretch>
-            <a:fillRect/>
-          </a:stretch>
-        </p:blipFill>
-        <p:spPr>
-          <a:xfrm>
-            <a:off x="3406560" y="1417320"/>
-            <a:ext cx="5348398" cy="3840480"/>
-          </a:xfrm>
-          <a:prstGeom prst="rect">
-            <a:avLst/>
-          </a:prstGeom>
-        </p:spPr>
-      </p:pic>
-      <p:sp>
-        <p:nvSpPr>
-          <p:cNvPr id="6" name="TextBox 5"/>
-          <p:cNvSpPr txBox="1"/>
-          <p:nvPr/>
-        </p:nvSpPr>
-        <p:spPr>
-          <a:xfrm>
-            <a:off x="640080" y="5715000"/>
-            <a:ext cx="10881360" cy="502920"/>
-          </a:xfrm>
-          <a:prstGeom prst="rect">
-            <a:avLst/>
-          </a:prstGeom>
-          <a:noFill/>
-        </p:spPr>
-        <p:txBody>
-          <a:bodyPr wrap="square" lIns="0" rIns="0" tIns="0" bIns="0">
-            <a:spAutoFit/>
-          </a:bodyPr>
-          <a:lstStyle/>
-          <a:p>
-            <a:pPr>
-              <a:spcAft>
-                <a:spcPts val="1200"/>
-              </a:spcAft>
-              <a:defRPr sz="1900" b="1">
-                <a:solidFill>
-                  <a:srgbClr val="287D8D"/>
-                </a:solidFill>
-                <a:latin typeface="Microsoft YaHei"/>
-              </a:defRPr>
-            </a:pPr>
-            <a:r>
-              <a:t>更好的搜索结果伴随随机波动，未证明全面的速度优势。</a:t>
+              <a:t>807.46秒属于求可行解实验，20196.47秒属于多目标优化实验。</a:t>
             </a:r>
           </a:p>
         </p:txBody>
